--- a/prezentacie/c01w.pptx
+++ b/prezentacie/c01w.pptx
@@ -6,16 +6,17 @@
   </p:sldMasterIdLst>
   <p:sldIdLst>
     <p:sldId id="266" r:id="rId2"/>
-    <p:sldId id="257" r:id="rId3"/>
-    <p:sldId id="258" r:id="rId4"/>
-    <p:sldId id="259" r:id="rId5"/>
-    <p:sldId id="260" r:id="rId6"/>
-    <p:sldId id="261" r:id="rId7"/>
-    <p:sldId id="262" r:id="rId8"/>
-    <p:sldId id="263" r:id="rId9"/>
-    <p:sldId id="267" r:id="rId10"/>
-    <p:sldId id="264" r:id="rId11"/>
-    <p:sldId id="265" r:id="rId12"/>
+    <p:sldId id="268" r:id="rId3"/>
+    <p:sldId id="257" r:id="rId4"/>
+    <p:sldId id="258" r:id="rId5"/>
+    <p:sldId id="259" r:id="rId6"/>
+    <p:sldId id="260" r:id="rId7"/>
+    <p:sldId id="261" r:id="rId8"/>
+    <p:sldId id="262" r:id="rId9"/>
+    <p:sldId id="265" r:id="rId10"/>
+    <p:sldId id="263" r:id="rId11"/>
+    <p:sldId id="267" r:id="rId12"/>
+    <p:sldId id="264" r:id="rId13"/>
   </p:sldIdLst>
   <p:sldSz cx="12192000" cy="6858000"/>
   <p:notesSz cx="6858000" cy="9144000"/>
@@ -122,2794 +123,6 @@
 </p:presentation>
 </file>
 
-<file path=ppt/diagrams/colors1.xml><?xml version="1.0" encoding="utf-8"?>
-<dgm:colorsDef xmlns:dgm="http://schemas.openxmlformats.org/drawingml/2006/diagram" xmlns:a="http://schemas.openxmlformats.org/drawingml/2006/main" uniqueId="urn:microsoft.com/office/officeart/2005/8/colors/colorful2">
-  <dgm:title val=""/>
-  <dgm:desc val=""/>
-  <dgm:catLst>
-    <dgm:cat type="colorful" pri="10200"/>
-  </dgm:catLst>
-  <dgm:styleLbl name="node0">
-    <dgm:fillClrLst meth="repeat">
-      <a:schemeClr val="accent1"/>
-    </dgm:fillClrLst>
-    <dgm:linClrLst meth="repeat">
-      <a:schemeClr val="lt1"/>
-    </dgm:linClrLst>
-    <dgm:effectClrLst/>
-    <dgm:txLinClrLst/>
-    <dgm:txFillClrLst/>
-    <dgm:txEffectClrLst/>
-  </dgm:styleLbl>
-  <dgm:styleLbl name="node1">
-    <dgm:fillClrLst>
-      <a:schemeClr val="accent2"/>
-      <a:schemeClr val="accent3"/>
-    </dgm:fillClrLst>
-    <dgm:linClrLst meth="repeat">
-      <a:schemeClr val="lt1"/>
-    </dgm:linClrLst>
-    <dgm:effectClrLst/>
-    <dgm:txLinClrLst/>
-    <dgm:txFillClrLst/>
-    <dgm:txEffectClrLst/>
-  </dgm:styleLbl>
-  <dgm:styleLbl name="alignNode1">
-    <dgm:fillClrLst>
-      <a:schemeClr val="accent2"/>
-      <a:schemeClr val="accent3"/>
-    </dgm:fillClrLst>
-    <dgm:linClrLst>
-      <a:schemeClr val="accent2"/>
-      <a:schemeClr val="accent3"/>
-    </dgm:linClrLst>
-    <dgm:effectClrLst/>
-    <dgm:txLinClrLst/>
-    <dgm:txFillClrLst/>
-    <dgm:txEffectClrLst/>
-  </dgm:styleLbl>
-  <dgm:styleLbl name="lnNode1">
-    <dgm:fillClrLst>
-      <a:schemeClr val="accent2"/>
-      <a:schemeClr val="accent3"/>
-    </dgm:fillClrLst>
-    <dgm:linClrLst meth="repeat">
-      <a:schemeClr val="lt1"/>
-    </dgm:linClrLst>
-    <dgm:effectClrLst/>
-    <dgm:txLinClrLst/>
-    <dgm:txFillClrLst/>
-    <dgm:txEffectClrLst/>
-  </dgm:styleLbl>
-  <dgm:styleLbl name="vennNode1">
-    <dgm:fillClrLst>
-      <a:schemeClr val="accent2">
-        <a:alpha val="50000"/>
-      </a:schemeClr>
-      <a:schemeClr val="accent3">
-        <a:alpha val="50000"/>
-      </a:schemeClr>
-    </dgm:fillClrLst>
-    <dgm:linClrLst meth="repeat">
-      <a:schemeClr val="lt1"/>
-    </dgm:linClrLst>
-    <dgm:effectClrLst/>
-    <dgm:txLinClrLst/>
-    <dgm:txFillClrLst/>
-    <dgm:txEffectClrLst/>
-  </dgm:styleLbl>
-  <dgm:styleLbl name="node2">
-    <dgm:fillClrLst>
-      <a:schemeClr val="accent3"/>
-    </dgm:fillClrLst>
-    <dgm:linClrLst meth="repeat">
-      <a:schemeClr val="lt1"/>
-    </dgm:linClrLst>
-    <dgm:effectClrLst/>
-    <dgm:txLinClrLst/>
-    <dgm:txFillClrLst/>
-    <dgm:txEffectClrLst/>
-  </dgm:styleLbl>
-  <dgm:styleLbl name="node3">
-    <dgm:fillClrLst>
-      <a:schemeClr val="accent4"/>
-    </dgm:fillClrLst>
-    <dgm:linClrLst meth="repeat">
-      <a:schemeClr val="lt1"/>
-    </dgm:linClrLst>
-    <dgm:effectClrLst/>
-    <dgm:txLinClrLst/>
-    <dgm:txFillClrLst/>
-    <dgm:txEffectClrLst/>
-  </dgm:styleLbl>
-  <dgm:styleLbl name="node4">
-    <dgm:fillClrLst>
-      <a:schemeClr val="accent5"/>
-    </dgm:fillClrLst>
-    <dgm:linClrLst meth="repeat">
-      <a:schemeClr val="lt1"/>
-    </dgm:linClrLst>
-    <dgm:effectClrLst/>
-    <dgm:txLinClrLst/>
-    <dgm:txFillClrLst/>
-    <dgm:txEffectClrLst/>
-  </dgm:styleLbl>
-  <dgm:styleLbl name="fgImgPlace1">
-    <dgm:fillClrLst>
-      <a:schemeClr val="accent2">
-        <a:tint val="50000"/>
-      </a:schemeClr>
-      <a:schemeClr val="accent3">
-        <a:tint val="50000"/>
-      </a:schemeClr>
-    </dgm:fillClrLst>
-    <dgm:linClrLst meth="repeat">
-      <a:schemeClr val="lt1"/>
-    </dgm:linClrLst>
-    <dgm:effectClrLst/>
-    <dgm:txLinClrLst/>
-    <dgm:txFillClrLst meth="repeat">
-      <a:schemeClr val="lt1"/>
-    </dgm:txFillClrLst>
-    <dgm:txEffectClrLst/>
-  </dgm:styleLbl>
-  <dgm:styleLbl name="alignImgPlace1">
-    <dgm:fillClrLst>
-      <a:schemeClr val="accent2">
-        <a:tint val="50000"/>
-      </a:schemeClr>
-      <a:schemeClr val="accent3">
-        <a:tint val="20000"/>
-      </a:schemeClr>
-    </dgm:fillClrLst>
-    <dgm:linClrLst meth="repeat">
-      <a:schemeClr val="lt1"/>
-    </dgm:linClrLst>
-    <dgm:effectClrLst/>
-    <dgm:txLinClrLst/>
-    <dgm:txFillClrLst meth="repeat">
-      <a:schemeClr val="lt1"/>
-    </dgm:txFillClrLst>
-    <dgm:txEffectClrLst/>
-  </dgm:styleLbl>
-  <dgm:styleLbl name="bgImgPlace1">
-    <dgm:fillClrLst>
-      <a:schemeClr val="accent2">
-        <a:tint val="50000"/>
-      </a:schemeClr>
-      <a:schemeClr val="accent3">
-        <a:tint val="20000"/>
-      </a:schemeClr>
-    </dgm:fillClrLst>
-    <dgm:linClrLst meth="repeat">
-      <a:schemeClr val="lt1"/>
-    </dgm:linClrLst>
-    <dgm:effectClrLst/>
-    <dgm:txLinClrLst/>
-    <dgm:txFillClrLst meth="repeat">
-      <a:schemeClr val="lt1"/>
-    </dgm:txFillClrLst>
-    <dgm:txEffectClrLst/>
-  </dgm:styleLbl>
-  <dgm:styleLbl name="sibTrans2D1">
-    <dgm:fillClrLst>
-      <a:schemeClr val="accent2"/>
-      <a:schemeClr val="accent3"/>
-    </dgm:fillClrLst>
-    <dgm:linClrLst meth="repeat">
-      <a:schemeClr val="lt1"/>
-    </dgm:linClrLst>
-    <dgm:effectClrLst/>
-    <dgm:txLinClrLst/>
-    <dgm:txFillClrLst/>
-    <dgm:txEffectClrLst/>
-  </dgm:styleLbl>
-  <dgm:styleLbl name="fgSibTrans2D1">
-    <dgm:fillClrLst>
-      <a:schemeClr val="accent2"/>
-      <a:schemeClr val="accent3"/>
-    </dgm:fillClrLst>
-    <dgm:linClrLst meth="repeat">
-      <a:schemeClr val="lt1"/>
-    </dgm:linClrLst>
-    <dgm:effectClrLst/>
-    <dgm:txLinClrLst/>
-    <dgm:txFillClrLst meth="repeat">
-      <a:schemeClr val="lt1"/>
-    </dgm:txFillClrLst>
-    <dgm:txEffectClrLst/>
-  </dgm:styleLbl>
-  <dgm:styleLbl name="bgSibTrans2D1">
-    <dgm:fillClrLst>
-      <a:schemeClr val="accent2"/>
-      <a:schemeClr val="accent3"/>
-    </dgm:fillClrLst>
-    <dgm:linClrLst meth="repeat">
-      <a:schemeClr val="lt1"/>
-    </dgm:linClrLst>
-    <dgm:effectClrLst/>
-    <dgm:txLinClrLst/>
-    <dgm:txFillClrLst meth="repeat">
-      <a:schemeClr val="lt1"/>
-    </dgm:txFillClrLst>
-    <dgm:txEffectClrLst/>
-  </dgm:styleLbl>
-  <dgm:styleLbl name="sibTrans1D1">
-    <dgm:fillClrLst/>
-    <dgm:linClrLst>
-      <a:schemeClr val="accent2"/>
-      <a:schemeClr val="accent3"/>
-    </dgm:linClrLst>
-    <dgm:effectClrLst/>
-    <dgm:txLinClrLst/>
-    <dgm:txFillClrLst meth="repeat">
-      <a:schemeClr val="tx1"/>
-    </dgm:txFillClrLst>
-    <dgm:txEffectClrLst/>
-  </dgm:styleLbl>
-  <dgm:styleLbl name="callout">
-    <dgm:fillClrLst meth="repeat">
-      <a:schemeClr val="accent2"/>
-    </dgm:fillClrLst>
-    <dgm:linClrLst meth="repeat">
-      <a:schemeClr val="accent2">
-        <a:tint val="50000"/>
-      </a:schemeClr>
-    </dgm:linClrLst>
-    <dgm:effectClrLst/>
-    <dgm:txLinClrLst/>
-    <dgm:txFillClrLst meth="repeat">
-      <a:schemeClr val="tx1"/>
-    </dgm:txFillClrLst>
-    <dgm:txEffectClrLst/>
-  </dgm:styleLbl>
-  <dgm:styleLbl name="asst0">
-    <dgm:fillClrLst meth="repeat">
-      <a:schemeClr val="accent2"/>
-    </dgm:fillClrLst>
-    <dgm:linClrLst meth="repeat">
-      <a:schemeClr val="lt1">
-        <a:shade val="80000"/>
-      </a:schemeClr>
-    </dgm:linClrLst>
-    <dgm:effectClrLst/>
-    <dgm:txLinClrLst/>
-    <dgm:txFillClrLst/>
-    <dgm:txEffectClrLst/>
-  </dgm:styleLbl>
-  <dgm:styleLbl name="asst1">
-    <dgm:fillClrLst meth="repeat">
-      <a:schemeClr val="accent3"/>
-    </dgm:fillClrLst>
-    <dgm:linClrLst meth="repeat">
-      <a:schemeClr val="lt1">
-        <a:shade val="80000"/>
-      </a:schemeClr>
-    </dgm:linClrLst>
-    <dgm:effectClrLst/>
-    <dgm:txLinClrLst/>
-    <dgm:txFillClrLst/>
-    <dgm:txEffectClrLst/>
-  </dgm:styleLbl>
-  <dgm:styleLbl name="asst2">
-    <dgm:fillClrLst>
-      <a:schemeClr val="accent4"/>
-    </dgm:fillClrLst>
-    <dgm:linClrLst meth="repeat">
-      <a:schemeClr val="lt1"/>
-    </dgm:linClrLst>
-    <dgm:effectClrLst/>
-    <dgm:txLinClrLst/>
-    <dgm:txFillClrLst/>
-    <dgm:txEffectClrLst/>
-  </dgm:styleLbl>
-  <dgm:styleLbl name="asst3">
-    <dgm:fillClrLst>
-      <a:schemeClr val="accent5"/>
-    </dgm:fillClrLst>
-    <dgm:linClrLst meth="repeat">
-      <a:schemeClr val="lt1"/>
-    </dgm:linClrLst>
-    <dgm:effectClrLst/>
-    <dgm:txLinClrLst/>
-    <dgm:txFillClrLst/>
-    <dgm:txEffectClrLst/>
-  </dgm:styleLbl>
-  <dgm:styleLbl name="asst4">
-    <dgm:fillClrLst>
-      <a:schemeClr val="accent6"/>
-    </dgm:fillClrLst>
-    <dgm:linClrLst meth="repeat">
-      <a:schemeClr val="lt1"/>
-    </dgm:linClrLst>
-    <dgm:effectClrLst/>
-    <dgm:txLinClrLst/>
-    <dgm:txFillClrLst/>
-    <dgm:txEffectClrLst/>
-  </dgm:styleLbl>
-  <dgm:styleLbl name="parChTrans2D1">
-    <dgm:fillClrLst meth="repeat">
-      <a:schemeClr val="accent2"/>
-    </dgm:fillClrLst>
-    <dgm:linClrLst meth="repeat">
-      <a:schemeClr val="lt1"/>
-    </dgm:linClrLst>
-    <dgm:effectClrLst/>
-    <dgm:txLinClrLst/>
-    <dgm:txFillClrLst meth="repeat">
-      <a:schemeClr val="lt1"/>
-    </dgm:txFillClrLst>
-    <dgm:txEffectClrLst/>
-  </dgm:styleLbl>
-  <dgm:styleLbl name="parChTrans2D2">
-    <dgm:fillClrLst meth="repeat">
-      <a:schemeClr val="accent3"/>
-    </dgm:fillClrLst>
-    <dgm:linClrLst meth="repeat">
-      <a:schemeClr val="lt1"/>
-    </dgm:linClrLst>
-    <dgm:effectClrLst/>
-    <dgm:txLinClrLst/>
-    <dgm:txFillClrLst/>
-    <dgm:txEffectClrLst/>
-  </dgm:styleLbl>
-  <dgm:styleLbl name="parChTrans2D3">
-    <dgm:fillClrLst meth="repeat">
-      <a:schemeClr val="accent4"/>
-    </dgm:fillClrLst>
-    <dgm:linClrLst meth="repeat">
-      <a:schemeClr val="lt1"/>
-    </dgm:linClrLst>
-    <dgm:effectClrLst/>
-    <dgm:txLinClrLst/>
-    <dgm:txFillClrLst/>
-    <dgm:txEffectClrLst/>
-  </dgm:styleLbl>
-  <dgm:styleLbl name="parChTrans2D4">
-    <dgm:fillClrLst meth="repeat">
-      <a:schemeClr val="accent5"/>
-    </dgm:fillClrLst>
-    <dgm:linClrLst meth="repeat">
-      <a:schemeClr val="lt1"/>
-    </dgm:linClrLst>
-    <dgm:effectClrLst/>
-    <dgm:txLinClrLst/>
-    <dgm:txFillClrLst meth="repeat">
-      <a:schemeClr val="lt1"/>
-    </dgm:txFillClrLst>
-    <dgm:txEffectClrLst/>
-  </dgm:styleLbl>
-  <dgm:styleLbl name="parChTrans1D1">
-    <dgm:fillClrLst meth="repeat">
-      <a:schemeClr val="accent2"/>
-    </dgm:fillClrLst>
-    <dgm:linClrLst meth="repeat">
-      <a:schemeClr val="accent2"/>
-    </dgm:linClrLst>
-    <dgm:effectClrLst/>
-    <dgm:txLinClrLst/>
-    <dgm:txFillClrLst meth="repeat">
-      <a:schemeClr val="tx1"/>
-    </dgm:txFillClrLst>
-    <dgm:txEffectClrLst/>
-  </dgm:styleLbl>
-  <dgm:styleLbl name="parChTrans1D2">
-    <dgm:fillClrLst meth="repeat">
-      <a:schemeClr val="accent2">
-        <a:tint val="90000"/>
-      </a:schemeClr>
-    </dgm:fillClrLst>
-    <dgm:linClrLst meth="repeat">
-      <a:schemeClr val="accent3"/>
-    </dgm:linClrLst>
-    <dgm:effectClrLst/>
-    <dgm:txLinClrLst/>
-    <dgm:txFillClrLst meth="repeat">
-      <a:schemeClr val="tx1"/>
-    </dgm:txFillClrLst>
-    <dgm:txEffectClrLst/>
-  </dgm:styleLbl>
-  <dgm:styleLbl name="parChTrans1D3">
-    <dgm:fillClrLst meth="repeat">
-      <a:schemeClr val="accent2">
-        <a:tint val="70000"/>
-      </a:schemeClr>
-    </dgm:fillClrLst>
-    <dgm:linClrLst meth="repeat">
-      <a:schemeClr val="accent4"/>
-    </dgm:linClrLst>
-    <dgm:effectClrLst/>
-    <dgm:txLinClrLst/>
-    <dgm:txFillClrLst meth="repeat">
-      <a:schemeClr val="tx1"/>
-    </dgm:txFillClrLst>
-    <dgm:txEffectClrLst/>
-  </dgm:styleLbl>
-  <dgm:styleLbl name="parChTrans1D4">
-    <dgm:fillClrLst meth="repeat">
-      <a:schemeClr val="accent2">
-        <a:tint val="50000"/>
-      </a:schemeClr>
-    </dgm:fillClrLst>
-    <dgm:linClrLst meth="repeat">
-      <a:schemeClr val="accent5"/>
-    </dgm:linClrLst>
-    <dgm:effectClrLst/>
-    <dgm:txLinClrLst/>
-    <dgm:txFillClrLst meth="repeat">
-      <a:schemeClr val="tx1"/>
-    </dgm:txFillClrLst>
-    <dgm:txEffectClrLst/>
-  </dgm:styleLbl>
-  <dgm:styleLbl name="fgAcc1">
-    <dgm:fillClrLst meth="repeat">
-      <a:schemeClr val="lt1">
-        <a:alpha val="90000"/>
-      </a:schemeClr>
-    </dgm:fillClrLst>
-    <dgm:linClrLst>
-      <a:schemeClr val="accent2"/>
-      <a:schemeClr val="accent3"/>
-    </dgm:linClrLst>
-    <dgm:effectClrLst/>
-    <dgm:txLinClrLst/>
-    <dgm:txFillClrLst meth="repeat">
-      <a:schemeClr val="dk1"/>
-    </dgm:txFillClrLst>
-    <dgm:txEffectClrLst/>
-  </dgm:styleLbl>
-  <dgm:styleLbl name="conFgAcc1">
-    <dgm:fillClrLst meth="repeat">
-      <a:schemeClr val="lt1">
-        <a:alpha val="90000"/>
-      </a:schemeClr>
-    </dgm:fillClrLst>
-    <dgm:linClrLst>
-      <a:schemeClr val="accent2"/>
-      <a:schemeClr val="accent3"/>
-    </dgm:linClrLst>
-    <dgm:effectClrLst/>
-    <dgm:txLinClrLst/>
-    <dgm:txFillClrLst meth="repeat">
-      <a:schemeClr val="dk1"/>
-    </dgm:txFillClrLst>
-    <dgm:txEffectClrLst/>
-  </dgm:styleLbl>
-  <dgm:styleLbl name="alignAcc1">
-    <dgm:fillClrLst meth="repeat">
-      <a:schemeClr val="lt1">
-        <a:alpha val="90000"/>
-      </a:schemeClr>
-    </dgm:fillClrLst>
-    <dgm:linClrLst>
-      <a:schemeClr val="accent2"/>
-      <a:schemeClr val="accent3"/>
-    </dgm:linClrLst>
-    <dgm:effectClrLst/>
-    <dgm:txLinClrLst/>
-    <dgm:txFillClrLst meth="repeat">
-      <a:schemeClr val="dk1"/>
-    </dgm:txFillClrLst>
-    <dgm:txEffectClrLst/>
-  </dgm:styleLbl>
-  <dgm:styleLbl name="trAlignAcc1">
-    <dgm:fillClrLst meth="repeat">
-      <a:schemeClr val="lt1">
-        <a:alpha val="40000"/>
-      </a:schemeClr>
-    </dgm:fillClrLst>
-    <dgm:linClrLst meth="repeat">
-      <a:schemeClr val="accent2"/>
-    </dgm:linClrLst>
-    <dgm:effectClrLst/>
-    <dgm:txLinClrLst/>
-    <dgm:txFillClrLst meth="repeat">
-      <a:schemeClr val="dk1"/>
-    </dgm:txFillClrLst>
-    <dgm:txEffectClrLst/>
-  </dgm:styleLbl>
-  <dgm:styleLbl name="bgAcc1">
-    <dgm:fillClrLst meth="repeat">
-      <a:schemeClr val="lt1">
-        <a:alpha val="90000"/>
-      </a:schemeClr>
-    </dgm:fillClrLst>
-    <dgm:linClrLst>
-      <a:schemeClr val="accent2"/>
-      <a:schemeClr val="accent3"/>
-    </dgm:linClrLst>
-    <dgm:effectClrLst/>
-    <dgm:txLinClrLst/>
-    <dgm:txFillClrLst meth="repeat">
-      <a:schemeClr val="dk1"/>
-    </dgm:txFillClrLst>
-    <dgm:txEffectClrLst/>
-  </dgm:styleLbl>
-  <dgm:styleLbl name="solidFgAcc1">
-    <dgm:fillClrLst meth="repeat">
-      <a:schemeClr val="lt1"/>
-    </dgm:fillClrLst>
-    <dgm:linClrLst>
-      <a:schemeClr val="accent2"/>
-      <a:schemeClr val="accent3"/>
-    </dgm:linClrLst>
-    <dgm:effectClrLst/>
-    <dgm:txLinClrLst/>
-    <dgm:txFillClrLst meth="repeat">
-      <a:schemeClr val="dk1"/>
-    </dgm:txFillClrLst>
-    <dgm:txEffectClrLst/>
-  </dgm:styleLbl>
-  <dgm:styleLbl name="solidAlignAcc1">
-    <dgm:fillClrLst meth="repeat">
-      <a:schemeClr val="lt1"/>
-    </dgm:fillClrLst>
-    <dgm:linClrLst>
-      <a:schemeClr val="accent2"/>
-      <a:schemeClr val="accent3"/>
-    </dgm:linClrLst>
-    <dgm:effectClrLst/>
-    <dgm:txLinClrLst/>
-    <dgm:txFillClrLst meth="repeat">
-      <a:schemeClr val="dk1"/>
-    </dgm:txFillClrLst>
-    <dgm:txEffectClrLst/>
-  </dgm:styleLbl>
-  <dgm:styleLbl name="solidBgAcc1">
-    <dgm:fillClrLst meth="repeat">
-      <a:schemeClr val="lt1"/>
-    </dgm:fillClrLst>
-    <dgm:linClrLst>
-      <a:schemeClr val="accent2"/>
-      <a:schemeClr val="accent3"/>
-    </dgm:linClrLst>
-    <dgm:effectClrLst/>
-    <dgm:txLinClrLst/>
-    <dgm:txFillClrLst meth="repeat">
-      <a:schemeClr val="dk1"/>
-    </dgm:txFillClrLst>
-    <dgm:txEffectClrLst/>
-  </dgm:styleLbl>
-  <dgm:styleLbl name="fgAccFollowNode1">
-    <dgm:fillClrLst>
-      <a:schemeClr val="accent2">
-        <a:tint val="40000"/>
-        <a:alpha val="90000"/>
-      </a:schemeClr>
-      <a:schemeClr val="accent3">
-        <a:tint val="40000"/>
-        <a:alpha val="90000"/>
-      </a:schemeClr>
-    </dgm:fillClrLst>
-    <dgm:linClrLst>
-      <a:schemeClr val="accent2">
-        <a:tint val="40000"/>
-        <a:alpha val="90000"/>
-      </a:schemeClr>
-      <a:schemeClr val="accent3">
-        <a:tint val="40000"/>
-        <a:alpha val="90000"/>
-      </a:schemeClr>
-    </dgm:linClrLst>
-    <dgm:effectClrLst/>
-    <dgm:txLinClrLst/>
-    <dgm:txFillClrLst meth="repeat">
-      <a:schemeClr val="dk1"/>
-    </dgm:txFillClrLst>
-    <dgm:txEffectClrLst/>
-  </dgm:styleLbl>
-  <dgm:styleLbl name="alignAccFollowNode1">
-    <dgm:fillClrLst>
-      <a:schemeClr val="accent2">
-        <a:tint val="40000"/>
-        <a:alpha val="90000"/>
-      </a:schemeClr>
-      <a:schemeClr val="accent3">
-        <a:tint val="40000"/>
-        <a:alpha val="90000"/>
-      </a:schemeClr>
-    </dgm:fillClrLst>
-    <dgm:linClrLst>
-      <a:schemeClr val="accent2">
-        <a:tint val="40000"/>
-        <a:alpha val="90000"/>
-      </a:schemeClr>
-      <a:schemeClr val="accent3">
-        <a:tint val="40000"/>
-        <a:alpha val="90000"/>
-      </a:schemeClr>
-    </dgm:linClrLst>
-    <dgm:effectClrLst/>
-    <dgm:txLinClrLst/>
-    <dgm:txFillClrLst meth="repeat">
-      <a:schemeClr val="dk1"/>
-    </dgm:txFillClrLst>
-    <dgm:txEffectClrLst/>
-  </dgm:styleLbl>
-  <dgm:styleLbl name="bgAccFollowNode1">
-    <dgm:fillClrLst>
-      <a:schemeClr val="accent2">
-        <a:tint val="40000"/>
-        <a:alpha val="90000"/>
-      </a:schemeClr>
-      <a:schemeClr val="accent3">
-        <a:tint val="40000"/>
-        <a:alpha val="90000"/>
-      </a:schemeClr>
-    </dgm:fillClrLst>
-    <dgm:linClrLst>
-      <a:schemeClr val="accent2">
-        <a:tint val="40000"/>
-        <a:alpha val="90000"/>
-      </a:schemeClr>
-      <a:schemeClr val="accent3">
-        <a:tint val="40000"/>
-        <a:alpha val="90000"/>
-      </a:schemeClr>
-    </dgm:linClrLst>
-    <dgm:effectClrLst/>
-    <dgm:txLinClrLst/>
-    <dgm:txFillClrLst meth="repeat">
-      <a:schemeClr val="dk1"/>
-    </dgm:txFillClrLst>
-    <dgm:txEffectClrLst/>
-  </dgm:styleLbl>
-  <dgm:styleLbl name="fgAcc0">
-    <dgm:fillClrLst meth="repeat">
-      <a:schemeClr val="lt1">
-        <a:alpha val="90000"/>
-      </a:schemeClr>
-    </dgm:fillClrLst>
-    <dgm:linClrLst>
-      <a:schemeClr val="accent1"/>
-    </dgm:linClrLst>
-    <dgm:effectClrLst/>
-    <dgm:txLinClrLst/>
-    <dgm:txFillClrLst meth="repeat">
-      <a:schemeClr val="dk1"/>
-    </dgm:txFillClrLst>
-    <dgm:txEffectClrLst/>
-  </dgm:styleLbl>
-  <dgm:styleLbl name="fgAcc2">
-    <dgm:fillClrLst meth="repeat">
-      <a:schemeClr val="lt1">
-        <a:alpha val="90000"/>
-      </a:schemeClr>
-    </dgm:fillClrLst>
-    <dgm:linClrLst>
-      <a:schemeClr val="accent3"/>
-    </dgm:linClrLst>
-    <dgm:effectClrLst/>
-    <dgm:txLinClrLst/>
-    <dgm:txFillClrLst meth="repeat">
-      <a:schemeClr val="dk1"/>
-    </dgm:txFillClrLst>
-    <dgm:txEffectClrLst/>
-  </dgm:styleLbl>
-  <dgm:styleLbl name="fgAcc3">
-    <dgm:fillClrLst meth="repeat">
-      <a:schemeClr val="lt1">
-        <a:alpha val="90000"/>
-      </a:schemeClr>
-    </dgm:fillClrLst>
-    <dgm:linClrLst>
-      <a:schemeClr val="accent4"/>
-    </dgm:linClrLst>
-    <dgm:effectClrLst/>
-    <dgm:txLinClrLst/>
-    <dgm:txFillClrLst meth="repeat">
-      <a:schemeClr val="dk1"/>
-    </dgm:txFillClrLst>
-    <dgm:txEffectClrLst/>
-  </dgm:styleLbl>
-  <dgm:styleLbl name="fgAcc4">
-    <dgm:fillClrLst meth="repeat">
-      <a:schemeClr val="lt1">
-        <a:alpha val="90000"/>
-      </a:schemeClr>
-    </dgm:fillClrLst>
-    <dgm:linClrLst>
-      <a:schemeClr val="accent5"/>
-    </dgm:linClrLst>
-    <dgm:effectClrLst/>
-    <dgm:txLinClrLst/>
-    <dgm:txFillClrLst meth="repeat">
-      <a:schemeClr val="dk1"/>
-    </dgm:txFillClrLst>
-    <dgm:txEffectClrLst/>
-  </dgm:styleLbl>
-  <dgm:styleLbl name="bgShp">
-    <dgm:fillClrLst meth="repeat">
-      <a:schemeClr val="accent2">
-        <a:tint val="40000"/>
-      </a:schemeClr>
-    </dgm:fillClrLst>
-    <dgm:linClrLst meth="repeat">
-      <a:schemeClr val="dk1"/>
-    </dgm:linClrLst>
-    <dgm:effectClrLst/>
-    <dgm:txLinClrLst/>
-    <dgm:txFillClrLst meth="repeat">
-      <a:schemeClr val="dk1"/>
-    </dgm:txFillClrLst>
-    <dgm:txEffectClrLst/>
-  </dgm:styleLbl>
-  <dgm:styleLbl name="dkBgShp">
-    <dgm:fillClrLst meth="repeat">
-      <a:schemeClr val="accent2">
-        <a:shade val="90000"/>
-      </a:schemeClr>
-    </dgm:fillClrLst>
-    <dgm:linClrLst meth="repeat">
-      <a:schemeClr val="dk1"/>
-    </dgm:linClrLst>
-    <dgm:effectClrLst/>
-    <dgm:txLinClrLst/>
-    <dgm:txFillClrLst meth="repeat">
-      <a:schemeClr val="lt1"/>
-    </dgm:txFillClrLst>
-    <dgm:txEffectClrLst/>
-  </dgm:styleLbl>
-  <dgm:styleLbl name="trBgShp">
-    <dgm:fillClrLst meth="repeat">
-      <a:schemeClr val="accent2">
-        <a:tint val="50000"/>
-        <a:alpha val="40000"/>
-      </a:schemeClr>
-    </dgm:fillClrLst>
-    <dgm:linClrLst meth="repeat">
-      <a:schemeClr val="accent2"/>
-    </dgm:linClrLst>
-    <dgm:effectClrLst/>
-    <dgm:txLinClrLst/>
-    <dgm:txFillClrLst meth="repeat">
-      <a:schemeClr val="lt1"/>
-    </dgm:txFillClrLst>
-    <dgm:txEffectClrLst/>
-  </dgm:styleLbl>
-  <dgm:styleLbl name="fgShp">
-    <dgm:fillClrLst meth="repeat">
-      <a:schemeClr val="accent2">
-        <a:tint val="40000"/>
-      </a:schemeClr>
-    </dgm:fillClrLst>
-    <dgm:linClrLst meth="repeat">
-      <a:schemeClr val="lt1"/>
-    </dgm:linClrLst>
-    <dgm:effectClrLst/>
-    <dgm:txLinClrLst/>
-    <dgm:txFillClrLst meth="repeat">
-      <a:schemeClr val="dk1"/>
-    </dgm:txFillClrLst>
-    <dgm:txEffectClrLst/>
-  </dgm:styleLbl>
-  <dgm:styleLbl name="revTx">
-    <dgm:fillClrLst meth="repeat">
-      <a:schemeClr val="lt1">
-        <a:alpha val="0"/>
-      </a:schemeClr>
-    </dgm:fillClrLst>
-    <dgm:linClrLst meth="repeat">
-      <a:schemeClr val="dk1">
-        <a:alpha val="0"/>
-      </a:schemeClr>
-    </dgm:linClrLst>
-    <dgm:effectClrLst/>
-    <dgm:txLinClrLst/>
-    <dgm:txFillClrLst meth="repeat">
-      <a:schemeClr val="tx1"/>
-    </dgm:txFillClrLst>
-    <dgm:txEffectClrLst/>
-  </dgm:styleLbl>
-</dgm:colorsDef>
-</file>
-
-<file path=ppt/diagrams/data1.xml><?xml version="1.0" encoding="utf-8"?>
-<dgm:dataModel xmlns:dgm="http://schemas.openxmlformats.org/drawingml/2006/diagram" xmlns:a="http://schemas.openxmlformats.org/drawingml/2006/main">
-  <dgm:ptLst>
-    <dgm:pt modelId="{72598095-CB29-43A7-BBE3-FA96596FC635}" type="doc">
-      <dgm:prSet loTypeId="urn:microsoft.com/office/officeart/2005/8/layout/vList2" loCatId="list" qsTypeId="urn:microsoft.com/office/officeart/2005/8/quickstyle/simple1" qsCatId="simple" csTypeId="urn:microsoft.com/office/officeart/2005/8/colors/colorful2" csCatId="colorful" phldr="1"/>
-      <dgm:spPr/>
-      <dgm:t>
-        <a:bodyPr/>
-        <a:lstStyle/>
-        <a:p>
-          <a:endParaRPr lang="en-US"/>
-        </a:p>
-      </dgm:t>
-    </dgm:pt>
-    <dgm:pt modelId="{32F6C656-D562-49B7-B3F9-C1FA3C2CA71B}">
-      <dgm:prSet/>
-      <dgm:spPr/>
-      <dgm:t>
-        <a:bodyPr/>
-        <a:lstStyle/>
-        <a:p>
-          <a:r>
-            <a:rPr lang="sk-SK"/>
-            <a:t>Vlastnosti:</a:t>
-          </a:r>
-          <a:endParaRPr lang="en-US"/>
-        </a:p>
-      </dgm:t>
-    </dgm:pt>
-    <dgm:pt modelId="{49FA5E65-42FF-44DF-9AF9-193B14E1CD68}" type="parTrans" cxnId="{A75CC747-30A2-41F9-83B9-4D59CF626DA6}">
-      <dgm:prSet/>
-      <dgm:spPr/>
-      <dgm:t>
-        <a:bodyPr/>
-        <a:lstStyle/>
-        <a:p>
-          <a:endParaRPr lang="en-US"/>
-        </a:p>
-      </dgm:t>
-    </dgm:pt>
-    <dgm:pt modelId="{7B9EA521-DA43-41B2-A92F-2063B92CDE2A}" type="sibTrans" cxnId="{A75CC747-30A2-41F9-83B9-4D59CF626DA6}">
-      <dgm:prSet/>
-      <dgm:spPr/>
-      <dgm:t>
-        <a:bodyPr/>
-        <a:lstStyle/>
-        <a:p>
-          <a:endParaRPr lang="en-US"/>
-        </a:p>
-      </dgm:t>
-    </dgm:pt>
-    <dgm:pt modelId="{4E79B89A-9E31-4D6F-8F3E-1F5EB1A80D3A}">
-      <dgm:prSet/>
-      <dgm:spPr/>
-      <dgm:t>
-        <a:bodyPr/>
-        <a:lstStyle/>
-        <a:p>
-          <a:r>
-            <a:rPr lang="sk-SK"/>
-            <a:t>generované automaticky z textu</a:t>
-          </a:r>
-          <a:endParaRPr lang="en-US"/>
-        </a:p>
-      </dgm:t>
-    </dgm:pt>
-    <dgm:pt modelId="{574B8DEF-F1D0-4CE6-B259-1140C92314AF}" type="parTrans" cxnId="{01CA552A-4D8B-4250-A255-E925F8B9B981}">
-      <dgm:prSet/>
-      <dgm:spPr/>
-      <dgm:t>
-        <a:bodyPr/>
-        <a:lstStyle/>
-        <a:p>
-          <a:endParaRPr lang="en-US"/>
-        </a:p>
-      </dgm:t>
-    </dgm:pt>
-    <dgm:pt modelId="{0312333B-7AA9-445A-8346-1A0A92AD944C}" type="sibTrans" cxnId="{01CA552A-4D8B-4250-A255-E925F8B9B981}">
-      <dgm:prSet/>
-      <dgm:spPr/>
-      <dgm:t>
-        <a:bodyPr/>
-        <a:lstStyle/>
-        <a:p>
-          <a:endParaRPr lang="en-US"/>
-        </a:p>
-      </dgm:t>
-    </dgm:pt>
-    <dgm:pt modelId="{EFCE1C44-B1E7-4E7F-BBE3-2B75CC31B5EA}">
-      <dgm:prSet/>
-      <dgm:spPr/>
-      <dgm:t>
-        <a:bodyPr/>
-        <a:lstStyle/>
-        <a:p>
-          <a:r>
-            <a:rPr lang="sk-SK"/>
-            <a:t>ľahšie sa udržiava aktuálny</a:t>
-          </a:r>
-          <a:endParaRPr lang="en-US"/>
-        </a:p>
-      </dgm:t>
-    </dgm:pt>
-    <dgm:pt modelId="{DF0BEEFD-2EBA-4688-8FA0-ED214C0ADD9D}" type="parTrans" cxnId="{0FA56D61-4344-475B-BBB2-B27DED19B7B4}">
-      <dgm:prSet/>
-      <dgm:spPr/>
-      <dgm:t>
-        <a:bodyPr/>
-        <a:lstStyle/>
-        <a:p>
-          <a:endParaRPr lang="en-US"/>
-        </a:p>
-      </dgm:t>
-    </dgm:pt>
-    <dgm:pt modelId="{7C92F8FB-EA2B-42F8-A10E-99E79EA6ABED}" type="sibTrans" cxnId="{0FA56D61-4344-475B-BBB2-B27DED19B7B4}">
-      <dgm:prSet/>
-      <dgm:spPr/>
-      <dgm:t>
-        <a:bodyPr/>
-        <a:lstStyle/>
-        <a:p>
-          <a:endParaRPr lang="en-US"/>
-        </a:p>
-      </dgm:t>
-    </dgm:pt>
-    <dgm:pt modelId="{9CF33D9F-7741-4310-8A3B-000644AE63DD}">
-      <dgm:prSet/>
-      <dgm:spPr/>
-      <dgm:t>
-        <a:bodyPr/>
-        <a:lstStyle/>
-        <a:p>
-          <a:r>
-            <a:rPr lang="sk-SK"/>
-            <a:t>vie ho vytvárať a meniť AI</a:t>
-          </a:r>
-          <a:endParaRPr lang="en-US"/>
-        </a:p>
-      </dgm:t>
-    </dgm:pt>
-    <dgm:pt modelId="{126DEB94-5D96-42BD-BDF4-54C6C7977C9C}" type="parTrans" cxnId="{19E45E04-3B7E-4444-96A7-2EC42360AC80}">
-      <dgm:prSet/>
-      <dgm:spPr/>
-      <dgm:t>
-        <a:bodyPr/>
-        <a:lstStyle/>
-        <a:p>
-          <a:endParaRPr lang="en-US"/>
-        </a:p>
-      </dgm:t>
-    </dgm:pt>
-    <dgm:pt modelId="{B602F572-FA14-4027-8507-66391A29156F}" type="sibTrans" cxnId="{19E45E04-3B7E-4444-96A7-2EC42360AC80}">
-      <dgm:prSet/>
-      <dgm:spPr/>
-      <dgm:t>
-        <a:bodyPr/>
-        <a:lstStyle/>
-        <a:p>
-          <a:endParaRPr lang="en-US"/>
-        </a:p>
-      </dgm:t>
-    </dgm:pt>
-    <dgm:pt modelId="{18ACDFEA-0892-4DB9-ADA4-D54D427D6A6C}">
-      <dgm:prSet/>
-      <dgm:spPr/>
-      <dgm:t>
-        <a:bodyPr/>
-        <a:lstStyle/>
-        <a:p>
-          <a:r>
-            <a:rPr lang="sk-SK"/>
-            <a:t>Nevýhody:</a:t>
-          </a:r>
-          <a:endParaRPr lang="en-US"/>
-        </a:p>
-      </dgm:t>
-    </dgm:pt>
-    <dgm:pt modelId="{1E3B4D67-760B-473C-80C7-7EDF19CD632A}" type="parTrans" cxnId="{B184C811-3AFD-4599-89B6-D0816329E0F3}">
-      <dgm:prSet/>
-      <dgm:spPr/>
-      <dgm:t>
-        <a:bodyPr/>
-        <a:lstStyle/>
-        <a:p>
-          <a:endParaRPr lang="en-US"/>
-        </a:p>
-      </dgm:t>
-    </dgm:pt>
-    <dgm:pt modelId="{E245EAEE-9A2F-4BB0-840B-770CAF2162D1}" type="sibTrans" cxnId="{B184C811-3AFD-4599-89B6-D0816329E0F3}">
-      <dgm:prSet/>
-      <dgm:spPr/>
-      <dgm:t>
-        <a:bodyPr/>
-        <a:lstStyle/>
-        <a:p>
-          <a:endParaRPr lang="en-US"/>
-        </a:p>
-      </dgm:t>
-    </dgm:pt>
-    <dgm:pt modelId="{52E99387-5E1B-408F-BC56-2E4E43633FCB}">
-      <dgm:prSet/>
-      <dgm:spPr/>
-      <dgm:t>
-        <a:bodyPr/>
-        <a:lstStyle/>
-        <a:p>
-          <a:r>
-            <a:rPr lang="sk-SK"/>
-            <a:t>nezrelosť nástrojov</a:t>
-          </a:r>
-          <a:endParaRPr lang="en-US"/>
-        </a:p>
-      </dgm:t>
-    </dgm:pt>
-    <dgm:pt modelId="{8E23D592-4D79-4167-ACA1-3D115687E3BA}" type="parTrans" cxnId="{415CC353-1947-4A03-A5C4-02F6234B357C}">
-      <dgm:prSet/>
-      <dgm:spPr/>
-      <dgm:t>
-        <a:bodyPr/>
-        <a:lstStyle/>
-        <a:p>
-          <a:endParaRPr lang="en-US"/>
-        </a:p>
-      </dgm:t>
-    </dgm:pt>
-    <dgm:pt modelId="{1B83E550-4632-466B-9D35-ED5C59E546D5}" type="sibTrans" cxnId="{415CC353-1947-4A03-A5C4-02F6234B357C}">
-      <dgm:prSet/>
-      <dgm:spPr/>
-      <dgm:t>
-        <a:bodyPr/>
-        <a:lstStyle/>
-        <a:p>
-          <a:endParaRPr lang="en-US"/>
-        </a:p>
-      </dgm:t>
-    </dgm:pt>
-    <dgm:pt modelId="{D36A448B-9296-4A6C-AF4D-0CF18F67BC23}">
-      <dgm:prSet/>
-      <dgm:spPr/>
-      <dgm:t>
-        <a:bodyPr/>
-        <a:lstStyle/>
-        <a:p>
-          <a:r>
-            <a:rPr lang="sk-SK"/>
-            <a:t>musíte vedieť špecifickú syntax</a:t>
-          </a:r>
-          <a:endParaRPr lang="en-US"/>
-        </a:p>
-      </dgm:t>
-    </dgm:pt>
-    <dgm:pt modelId="{3752D537-C703-4EB8-9D1A-FFD14DC4A3B9}" type="parTrans" cxnId="{690171BD-C613-4099-B574-6CE178EFF56E}">
-      <dgm:prSet/>
-      <dgm:spPr/>
-      <dgm:t>
-        <a:bodyPr/>
-        <a:lstStyle/>
-        <a:p>
-          <a:endParaRPr lang="en-US"/>
-        </a:p>
-      </dgm:t>
-    </dgm:pt>
-    <dgm:pt modelId="{40FBE054-04B7-4FC0-A984-96364B25BC3A}" type="sibTrans" cxnId="{690171BD-C613-4099-B574-6CE178EFF56E}">
-      <dgm:prSet/>
-      <dgm:spPr/>
-      <dgm:t>
-        <a:bodyPr/>
-        <a:lstStyle/>
-        <a:p>
-          <a:endParaRPr lang="en-US"/>
-        </a:p>
-      </dgm:t>
-    </dgm:pt>
-    <dgm:pt modelId="{8B466E1C-B1E3-4AA7-A1DF-7A04047DAE6A}">
-      <dgm:prSet/>
-      <dgm:spPr/>
-      <dgm:t>
-        <a:bodyPr/>
-        <a:lstStyle/>
-        <a:p>
-          <a:r>
-            <a:rPr lang="sk-SK"/>
-            <a:t>strata precíznej kontroly vizuálu</a:t>
-          </a:r>
-          <a:endParaRPr lang="en-US"/>
-        </a:p>
-      </dgm:t>
-    </dgm:pt>
-    <dgm:pt modelId="{370A6777-864F-4160-AA27-620360BF9ED0}" type="parTrans" cxnId="{BBB1D8A5-EABF-4E0B-9C10-5D75198B3E31}">
-      <dgm:prSet/>
-      <dgm:spPr/>
-      <dgm:t>
-        <a:bodyPr/>
-        <a:lstStyle/>
-        <a:p>
-          <a:endParaRPr lang="en-US"/>
-        </a:p>
-      </dgm:t>
-    </dgm:pt>
-    <dgm:pt modelId="{E4615BC5-3785-4793-9B05-406E1F0F80AD}" type="sibTrans" cxnId="{BBB1D8A5-EABF-4E0B-9C10-5D75198B3E31}">
-      <dgm:prSet/>
-      <dgm:spPr/>
-      <dgm:t>
-        <a:bodyPr/>
-        <a:lstStyle/>
-        <a:p>
-          <a:endParaRPr lang="en-US"/>
-        </a:p>
-      </dgm:t>
-    </dgm:pt>
-    <dgm:pt modelId="{95730480-664C-4F5F-A632-26213F4FDB8A}">
-      <dgm:prSet/>
-      <dgm:spPr/>
-      <dgm:t>
-        <a:bodyPr/>
-        <a:lstStyle/>
-        <a:p>
-          <a:endParaRPr lang="en-US"/>
-        </a:p>
-      </dgm:t>
-    </dgm:pt>
-    <dgm:pt modelId="{13CD7FF1-1693-435E-A09A-F1BCF4894DFC}" type="parTrans" cxnId="{95910B88-E443-4699-95D7-2E2A5A6AA60A}">
-      <dgm:prSet/>
-      <dgm:spPr/>
-      <dgm:t>
-        <a:bodyPr/>
-        <a:lstStyle/>
-        <a:p>
-          <a:endParaRPr lang="sk-SK"/>
-        </a:p>
-      </dgm:t>
-    </dgm:pt>
-    <dgm:pt modelId="{A0BB9AF0-219E-4770-89EA-C9E1EB99029F}" type="sibTrans" cxnId="{95910B88-E443-4699-95D7-2E2A5A6AA60A}">
-      <dgm:prSet/>
-      <dgm:spPr/>
-      <dgm:t>
-        <a:bodyPr/>
-        <a:lstStyle/>
-        <a:p>
-          <a:endParaRPr lang="sk-SK"/>
-        </a:p>
-      </dgm:t>
-    </dgm:pt>
-    <dgm:pt modelId="{3E095645-9A47-4E07-9826-0E572C7B782C}" type="pres">
-      <dgm:prSet presAssocID="{72598095-CB29-43A7-BBE3-FA96596FC635}" presName="linear" presStyleCnt="0">
-        <dgm:presLayoutVars>
-          <dgm:animLvl val="lvl"/>
-          <dgm:resizeHandles val="exact"/>
-        </dgm:presLayoutVars>
-      </dgm:prSet>
-      <dgm:spPr/>
-    </dgm:pt>
-    <dgm:pt modelId="{27732E2D-600D-4E87-8F81-31A8FBA242B0}" type="pres">
-      <dgm:prSet presAssocID="{32F6C656-D562-49B7-B3F9-C1FA3C2CA71B}" presName="parentText" presStyleLbl="node1" presStyleIdx="0" presStyleCnt="2">
-        <dgm:presLayoutVars>
-          <dgm:chMax val="0"/>
-          <dgm:bulletEnabled val="1"/>
-        </dgm:presLayoutVars>
-      </dgm:prSet>
-      <dgm:spPr/>
-    </dgm:pt>
-    <dgm:pt modelId="{B0573B96-FD25-47BE-B008-5CD9B7353CEA}" type="pres">
-      <dgm:prSet presAssocID="{32F6C656-D562-49B7-B3F9-C1FA3C2CA71B}" presName="childText" presStyleLbl="revTx" presStyleIdx="0" presStyleCnt="2">
-        <dgm:presLayoutVars>
-          <dgm:bulletEnabled val="1"/>
-        </dgm:presLayoutVars>
-      </dgm:prSet>
-      <dgm:spPr/>
-    </dgm:pt>
-    <dgm:pt modelId="{2879E01D-D955-4FDC-A1EF-A2FAE79AB701}" type="pres">
-      <dgm:prSet presAssocID="{18ACDFEA-0892-4DB9-ADA4-D54D427D6A6C}" presName="parentText" presStyleLbl="node1" presStyleIdx="1" presStyleCnt="2">
-        <dgm:presLayoutVars>
-          <dgm:chMax val="0"/>
-          <dgm:bulletEnabled val="1"/>
-        </dgm:presLayoutVars>
-      </dgm:prSet>
-      <dgm:spPr/>
-    </dgm:pt>
-    <dgm:pt modelId="{BD45B450-AE10-41F0-93A9-83C5178E39E5}" type="pres">
-      <dgm:prSet presAssocID="{18ACDFEA-0892-4DB9-ADA4-D54D427D6A6C}" presName="childText" presStyleLbl="revTx" presStyleIdx="1" presStyleCnt="2">
-        <dgm:presLayoutVars>
-          <dgm:bulletEnabled val="1"/>
-        </dgm:presLayoutVars>
-      </dgm:prSet>
-      <dgm:spPr/>
-    </dgm:pt>
-  </dgm:ptLst>
-  <dgm:cxnLst>
-    <dgm:cxn modelId="{19E45E04-3B7E-4444-96A7-2EC42360AC80}" srcId="{32F6C656-D562-49B7-B3F9-C1FA3C2CA71B}" destId="{9CF33D9F-7741-4310-8A3B-000644AE63DD}" srcOrd="2" destOrd="0" parTransId="{126DEB94-5D96-42BD-BDF4-54C6C7977C9C}" sibTransId="{B602F572-FA14-4027-8507-66391A29156F}"/>
-    <dgm:cxn modelId="{C0D8B607-5E29-4901-91C7-08E64515F096}" type="presOf" srcId="{52E99387-5E1B-408F-BC56-2E4E43633FCB}" destId="{BD45B450-AE10-41F0-93A9-83C5178E39E5}" srcOrd="0" destOrd="0" presId="urn:microsoft.com/office/officeart/2005/8/layout/vList2"/>
-    <dgm:cxn modelId="{B184C811-3AFD-4599-89B6-D0816329E0F3}" srcId="{72598095-CB29-43A7-BBE3-FA96596FC635}" destId="{18ACDFEA-0892-4DB9-ADA4-D54D427D6A6C}" srcOrd="1" destOrd="0" parTransId="{1E3B4D67-760B-473C-80C7-7EDF19CD632A}" sibTransId="{E245EAEE-9A2F-4BB0-840B-770CAF2162D1}"/>
-    <dgm:cxn modelId="{0AAD6326-8FD5-44B7-8D3B-D74C6EAF7CFA}" type="presOf" srcId="{D36A448B-9296-4A6C-AF4D-0CF18F67BC23}" destId="{BD45B450-AE10-41F0-93A9-83C5178E39E5}" srcOrd="0" destOrd="1" presId="urn:microsoft.com/office/officeart/2005/8/layout/vList2"/>
-    <dgm:cxn modelId="{01CA552A-4D8B-4250-A255-E925F8B9B981}" srcId="{32F6C656-D562-49B7-B3F9-C1FA3C2CA71B}" destId="{4E79B89A-9E31-4D6F-8F3E-1F5EB1A80D3A}" srcOrd="0" destOrd="0" parTransId="{574B8DEF-F1D0-4CE6-B259-1140C92314AF}" sibTransId="{0312333B-7AA9-445A-8346-1A0A92AD944C}"/>
-    <dgm:cxn modelId="{07B1B736-7F45-4B03-99DE-9ED2C4A249D0}" type="presOf" srcId="{8B466E1C-B1E3-4AA7-A1DF-7A04047DAE6A}" destId="{BD45B450-AE10-41F0-93A9-83C5178E39E5}" srcOrd="0" destOrd="2" presId="urn:microsoft.com/office/officeart/2005/8/layout/vList2"/>
-    <dgm:cxn modelId="{0FA56D61-4344-475B-BBB2-B27DED19B7B4}" srcId="{32F6C656-D562-49B7-B3F9-C1FA3C2CA71B}" destId="{EFCE1C44-B1E7-4E7F-BBE3-2B75CC31B5EA}" srcOrd="1" destOrd="0" parTransId="{DF0BEEFD-2EBA-4688-8FA0-ED214C0ADD9D}" sibTransId="{7C92F8FB-EA2B-42F8-A10E-99E79EA6ABED}"/>
-    <dgm:cxn modelId="{A75CC747-30A2-41F9-83B9-4D59CF626DA6}" srcId="{72598095-CB29-43A7-BBE3-FA96596FC635}" destId="{32F6C656-D562-49B7-B3F9-C1FA3C2CA71B}" srcOrd="0" destOrd="0" parTransId="{49FA5E65-42FF-44DF-9AF9-193B14E1CD68}" sibTransId="{7B9EA521-DA43-41B2-A92F-2063B92CDE2A}"/>
-    <dgm:cxn modelId="{415CC353-1947-4A03-A5C4-02F6234B357C}" srcId="{18ACDFEA-0892-4DB9-ADA4-D54D427D6A6C}" destId="{52E99387-5E1B-408F-BC56-2E4E43633FCB}" srcOrd="0" destOrd="0" parTransId="{8E23D592-4D79-4167-ACA1-3D115687E3BA}" sibTransId="{1B83E550-4632-466B-9D35-ED5C59E546D5}"/>
-    <dgm:cxn modelId="{9FA89359-2280-4349-96DE-20D506BF8A78}" type="presOf" srcId="{EFCE1C44-B1E7-4E7F-BBE3-2B75CC31B5EA}" destId="{B0573B96-FD25-47BE-B008-5CD9B7353CEA}" srcOrd="0" destOrd="1" presId="urn:microsoft.com/office/officeart/2005/8/layout/vList2"/>
-    <dgm:cxn modelId="{0C92CA81-8A6C-4B19-98C7-3D92A3BAC34E}" type="presOf" srcId="{32F6C656-D562-49B7-B3F9-C1FA3C2CA71B}" destId="{27732E2D-600D-4E87-8F81-31A8FBA242B0}" srcOrd="0" destOrd="0" presId="urn:microsoft.com/office/officeart/2005/8/layout/vList2"/>
-    <dgm:cxn modelId="{95910B88-E443-4699-95D7-2E2A5A6AA60A}" srcId="{32F6C656-D562-49B7-B3F9-C1FA3C2CA71B}" destId="{95730480-664C-4F5F-A632-26213F4FDB8A}" srcOrd="3" destOrd="0" parTransId="{13CD7FF1-1693-435E-A09A-F1BCF4894DFC}" sibTransId="{A0BB9AF0-219E-4770-89EA-C9E1EB99029F}"/>
-    <dgm:cxn modelId="{FF1CBB94-70D7-48F7-BEB0-B0CEC7E9148C}" type="presOf" srcId="{18ACDFEA-0892-4DB9-ADA4-D54D427D6A6C}" destId="{2879E01D-D955-4FDC-A1EF-A2FAE79AB701}" srcOrd="0" destOrd="0" presId="urn:microsoft.com/office/officeart/2005/8/layout/vList2"/>
-    <dgm:cxn modelId="{F15080A3-E4CF-4B48-9914-4577331BB726}" type="presOf" srcId="{4E79B89A-9E31-4D6F-8F3E-1F5EB1A80D3A}" destId="{B0573B96-FD25-47BE-B008-5CD9B7353CEA}" srcOrd="0" destOrd="0" presId="urn:microsoft.com/office/officeart/2005/8/layout/vList2"/>
-    <dgm:cxn modelId="{BBB1D8A5-EABF-4E0B-9C10-5D75198B3E31}" srcId="{18ACDFEA-0892-4DB9-ADA4-D54D427D6A6C}" destId="{8B466E1C-B1E3-4AA7-A1DF-7A04047DAE6A}" srcOrd="2" destOrd="0" parTransId="{370A6777-864F-4160-AA27-620360BF9ED0}" sibTransId="{E4615BC5-3785-4793-9B05-406E1F0F80AD}"/>
-    <dgm:cxn modelId="{A1C43BA6-C570-4171-9C2E-8328135D0A2F}" type="presOf" srcId="{95730480-664C-4F5F-A632-26213F4FDB8A}" destId="{B0573B96-FD25-47BE-B008-5CD9B7353CEA}" srcOrd="0" destOrd="3" presId="urn:microsoft.com/office/officeart/2005/8/layout/vList2"/>
-    <dgm:cxn modelId="{690171BD-C613-4099-B574-6CE178EFF56E}" srcId="{18ACDFEA-0892-4DB9-ADA4-D54D427D6A6C}" destId="{D36A448B-9296-4A6C-AF4D-0CF18F67BC23}" srcOrd="1" destOrd="0" parTransId="{3752D537-C703-4EB8-9D1A-FFD14DC4A3B9}" sibTransId="{40FBE054-04B7-4FC0-A984-96364B25BC3A}"/>
-    <dgm:cxn modelId="{47BEDCD3-13A8-48DA-9933-EAD326956BC5}" type="presOf" srcId="{72598095-CB29-43A7-BBE3-FA96596FC635}" destId="{3E095645-9A47-4E07-9826-0E572C7B782C}" srcOrd="0" destOrd="0" presId="urn:microsoft.com/office/officeart/2005/8/layout/vList2"/>
-    <dgm:cxn modelId="{2F173DE5-4E93-435A-9E89-BA57915447F6}" type="presOf" srcId="{9CF33D9F-7741-4310-8A3B-000644AE63DD}" destId="{B0573B96-FD25-47BE-B008-5CD9B7353CEA}" srcOrd="0" destOrd="2" presId="urn:microsoft.com/office/officeart/2005/8/layout/vList2"/>
-    <dgm:cxn modelId="{8BED3588-D1A1-4592-BC97-3668B21BD7B0}" type="presParOf" srcId="{3E095645-9A47-4E07-9826-0E572C7B782C}" destId="{27732E2D-600D-4E87-8F81-31A8FBA242B0}" srcOrd="0" destOrd="0" presId="urn:microsoft.com/office/officeart/2005/8/layout/vList2"/>
-    <dgm:cxn modelId="{BFE583B0-89C2-4219-B21F-E0EDB0615CC9}" type="presParOf" srcId="{3E095645-9A47-4E07-9826-0E572C7B782C}" destId="{B0573B96-FD25-47BE-B008-5CD9B7353CEA}" srcOrd="1" destOrd="0" presId="urn:microsoft.com/office/officeart/2005/8/layout/vList2"/>
-    <dgm:cxn modelId="{653F80BA-AD7A-44ED-A663-D02D34D6A64B}" type="presParOf" srcId="{3E095645-9A47-4E07-9826-0E572C7B782C}" destId="{2879E01D-D955-4FDC-A1EF-A2FAE79AB701}" srcOrd="2" destOrd="0" presId="urn:microsoft.com/office/officeart/2005/8/layout/vList2"/>
-    <dgm:cxn modelId="{74BC3433-9759-4737-A81F-1F1ED7AACEC6}" type="presParOf" srcId="{3E095645-9A47-4E07-9826-0E572C7B782C}" destId="{BD45B450-AE10-41F0-93A9-83C5178E39E5}" srcOrd="3" destOrd="0" presId="urn:microsoft.com/office/officeart/2005/8/layout/vList2"/>
-  </dgm:cxnLst>
-  <dgm:bg/>
-  <dgm:whole/>
-  <dgm:extLst>
-    <a:ext uri="http://schemas.microsoft.com/office/drawing/2008/diagram">
-      <dsp:dataModelExt xmlns:dsp="http://schemas.microsoft.com/office/drawing/2008/diagram" relId="rId6" minVer="http://schemas.openxmlformats.org/drawingml/2006/diagram"/>
-    </a:ext>
-  </dgm:extLst>
-</dgm:dataModel>
-</file>
-
-<file path=ppt/diagrams/drawing1.xml><?xml version="1.0" encoding="utf-8"?>
-<dsp:drawing xmlns:dgm="http://schemas.openxmlformats.org/drawingml/2006/diagram" xmlns:dsp="http://schemas.microsoft.com/office/drawing/2008/diagram" xmlns:a="http://schemas.openxmlformats.org/drawingml/2006/main">
-  <dsp:spTree>
-    <dsp:nvGrpSpPr>
-      <dsp:cNvPr id="0" name=""/>
-      <dsp:cNvGrpSpPr/>
-    </dsp:nvGrpSpPr>
-    <dsp:grpSpPr/>
-    <dsp:sp modelId="{27732E2D-600D-4E87-8F81-31A8FBA242B0}">
-      <dsp:nvSpPr>
-        <dsp:cNvPr id="0" name=""/>
-        <dsp:cNvSpPr/>
-      </dsp:nvSpPr>
-      <dsp:spPr>
-        <a:xfrm>
-          <a:off x="0" y="100831"/>
-          <a:ext cx="6263640" cy="909090"/>
-        </a:xfrm>
-        <a:prstGeom prst="roundRect">
-          <a:avLst/>
-        </a:prstGeom>
-        <a:solidFill>
-          <a:schemeClr val="accent2">
-            <a:hueOff val="0"/>
-            <a:satOff val="0"/>
-            <a:lumOff val="0"/>
-            <a:alphaOff val="0"/>
-          </a:schemeClr>
-        </a:solidFill>
-        <a:ln w="19050" cap="flat" cmpd="sng" algn="ctr">
-          <a:solidFill>
-            <a:schemeClr val="lt1">
-              <a:hueOff val="0"/>
-              <a:satOff val="0"/>
-              <a:lumOff val="0"/>
-              <a:alphaOff val="0"/>
-            </a:schemeClr>
-          </a:solidFill>
-          <a:prstDash val="solid"/>
-          <a:miter lim="800000"/>
-        </a:ln>
-        <a:effectLst/>
-      </dsp:spPr>
-      <dsp:style>
-        <a:lnRef idx="2">
-          <a:scrgbClr r="0" g="0" b="0"/>
-        </a:lnRef>
-        <a:fillRef idx="1">
-          <a:scrgbClr r="0" g="0" b="0"/>
-        </a:fillRef>
-        <a:effectRef idx="0">
-          <a:scrgbClr r="0" g="0" b="0"/>
-        </a:effectRef>
-        <a:fontRef idx="minor">
-          <a:schemeClr val="lt1"/>
-        </a:fontRef>
-      </dsp:style>
-      <dsp:txBody>
-        <a:bodyPr spcFirstLastPara="0" vert="horz" wrap="square" lIns="140970" tIns="140970" rIns="140970" bIns="140970" numCol="1" spcCol="1270" anchor="ctr" anchorCtr="0">
-          <a:noAutofit/>
-        </a:bodyPr>
-        <a:lstStyle/>
-        <a:p>
-          <a:pPr marL="0" lvl="0" indent="0" algn="l" defTabSz="1644650">
-            <a:lnSpc>
-              <a:spcPct val="90000"/>
-            </a:lnSpc>
-            <a:spcBef>
-              <a:spcPct val="0"/>
-            </a:spcBef>
-            <a:spcAft>
-              <a:spcPct val="35000"/>
-            </a:spcAft>
-            <a:buNone/>
-          </a:pPr>
-          <a:r>
-            <a:rPr lang="sk-SK" sz="3700" kern="1200"/>
-            <a:t>Vlastnosti:</a:t>
-          </a:r>
-          <a:endParaRPr lang="en-US" sz="3700" kern="1200"/>
-        </a:p>
-      </dsp:txBody>
-      <dsp:txXfrm>
-        <a:off x="44378" y="145209"/>
-        <a:ext cx="6174884" cy="820334"/>
-      </dsp:txXfrm>
-    </dsp:sp>
-    <dsp:sp modelId="{B0573B96-FD25-47BE-B008-5CD9B7353CEA}">
-      <dsp:nvSpPr>
-        <dsp:cNvPr id="0" name=""/>
-        <dsp:cNvSpPr/>
-      </dsp:nvSpPr>
-      <dsp:spPr>
-        <a:xfrm>
-          <a:off x="0" y="1009921"/>
-          <a:ext cx="6263640" cy="1991340"/>
-        </a:xfrm>
-        <a:prstGeom prst="rect">
-          <a:avLst/>
-        </a:prstGeom>
-        <a:noFill/>
-        <a:ln>
-          <a:noFill/>
-        </a:ln>
-        <a:effectLst/>
-      </dsp:spPr>
-      <dsp:style>
-        <a:lnRef idx="0">
-          <a:scrgbClr r="0" g="0" b="0"/>
-        </a:lnRef>
-        <a:fillRef idx="0">
-          <a:scrgbClr r="0" g="0" b="0"/>
-        </a:fillRef>
-        <a:effectRef idx="0">
-          <a:scrgbClr r="0" g="0" b="0"/>
-        </a:effectRef>
-        <a:fontRef idx="minor"/>
-      </dsp:style>
-      <dsp:txBody>
-        <a:bodyPr spcFirstLastPara="0" vert="horz" wrap="square" lIns="198871" tIns="46990" rIns="263144" bIns="46990" numCol="1" spcCol="1270" anchor="t" anchorCtr="0">
-          <a:noAutofit/>
-        </a:bodyPr>
-        <a:lstStyle/>
-        <a:p>
-          <a:pPr marL="285750" lvl="1" indent="-285750" algn="l" defTabSz="1289050">
-            <a:lnSpc>
-              <a:spcPct val="90000"/>
-            </a:lnSpc>
-            <a:spcBef>
-              <a:spcPct val="0"/>
-            </a:spcBef>
-            <a:spcAft>
-              <a:spcPct val="20000"/>
-            </a:spcAft>
-            <a:buChar char="•"/>
-          </a:pPr>
-          <a:r>
-            <a:rPr lang="sk-SK" sz="2900" kern="1200"/>
-            <a:t>generované automaticky z textu</a:t>
-          </a:r>
-          <a:endParaRPr lang="en-US" sz="2900" kern="1200"/>
-        </a:p>
-        <a:p>
-          <a:pPr marL="285750" lvl="1" indent="-285750" algn="l" defTabSz="1289050">
-            <a:lnSpc>
-              <a:spcPct val="90000"/>
-            </a:lnSpc>
-            <a:spcBef>
-              <a:spcPct val="0"/>
-            </a:spcBef>
-            <a:spcAft>
-              <a:spcPct val="20000"/>
-            </a:spcAft>
-            <a:buChar char="•"/>
-          </a:pPr>
-          <a:r>
-            <a:rPr lang="sk-SK" sz="2900" kern="1200"/>
-            <a:t>ľahšie sa udržiava aktuálny</a:t>
-          </a:r>
-          <a:endParaRPr lang="en-US" sz="2900" kern="1200"/>
-        </a:p>
-        <a:p>
-          <a:pPr marL="285750" lvl="1" indent="-285750" algn="l" defTabSz="1289050">
-            <a:lnSpc>
-              <a:spcPct val="90000"/>
-            </a:lnSpc>
-            <a:spcBef>
-              <a:spcPct val="0"/>
-            </a:spcBef>
-            <a:spcAft>
-              <a:spcPct val="20000"/>
-            </a:spcAft>
-            <a:buChar char="•"/>
-          </a:pPr>
-          <a:r>
-            <a:rPr lang="sk-SK" sz="2900" kern="1200"/>
-            <a:t>vie ho vytvárať a meniť AI</a:t>
-          </a:r>
-          <a:endParaRPr lang="en-US" sz="2900" kern="1200"/>
-        </a:p>
-        <a:p>
-          <a:pPr marL="285750" lvl="1" indent="-285750" algn="l" defTabSz="1289050">
-            <a:lnSpc>
-              <a:spcPct val="90000"/>
-            </a:lnSpc>
-            <a:spcBef>
-              <a:spcPct val="0"/>
-            </a:spcBef>
-            <a:spcAft>
-              <a:spcPct val="20000"/>
-            </a:spcAft>
-            <a:buChar char="•"/>
-          </a:pPr>
-          <a:endParaRPr lang="en-US" sz="2900" kern="1200"/>
-        </a:p>
-      </dsp:txBody>
-      <dsp:txXfrm>
-        <a:off x="0" y="1009921"/>
-        <a:ext cx="6263640" cy="1991340"/>
-      </dsp:txXfrm>
-    </dsp:sp>
-    <dsp:sp modelId="{2879E01D-D955-4FDC-A1EF-A2FAE79AB701}">
-      <dsp:nvSpPr>
-        <dsp:cNvPr id="0" name=""/>
-        <dsp:cNvSpPr/>
-      </dsp:nvSpPr>
-      <dsp:spPr>
-        <a:xfrm>
-          <a:off x="0" y="3001261"/>
-          <a:ext cx="6263640" cy="909090"/>
-        </a:xfrm>
-        <a:prstGeom prst="roundRect">
-          <a:avLst/>
-        </a:prstGeom>
-        <a:solidFill>
-          <a:schemeClr val="accent2">
-            <a:hueOff val="6443614"/>
-            <a:satOff val="-18493"/>
-            <a:lumOff val="-29609"/>
-            <a:alphaOff val="0"/>
-          </a:schemeClr>
-        </a:solidFill>
-        <a:ln w="19050" cap="flat" cmpd="sng" algn="ctr">
-          <a:solidFill>
-            <a:schemeClr val="lt1">
-              <a:hueOff val="0"/>
-              <a:satOff val="0"/>
-              <a:lumOff val="0"/>
-              <a:alphaOff val="0"/>
-            </a:schemeClr>
-          </a:solidFill>
-          <a:prstDash val="solid"/>
-          <a:miter lim="800000"/>
-        </a:ln>
-        <a:effectLst/>
-      </dsp:spPr>
-      <dsp:style>
-        <a:lnRef idx="2">
-          <a:scrgbClr r="0" g="0" b="0"/>
-        </a:lnRef>
-        <a:fillRef idx="1">
-          <a:scrgbClr r="0" g="0" b="0"/>
-        </a:fillRef>
-        <a:effectRef idx="0">
-          <a:scrgbClr r="0" g="0" b="0"/>
-        </a:effectRef>
-        <a:fontRef idx="minor">
-          <a:schemeClr val="lt1"/>
-        </a:fontRef>
-      </dsp:style>
-      <dsp:txBody>
-        <a:bodyPr spcFirstLastPara="0" vert="horz" wrap="square" lIns="140970" tIns="140970" rIns="140970" bIns="140970" numCol="1" spcCol="1270" anchor="ctr" anchorCtr="0">
-          <a:noAutofit/>
-        </a:bodyPr>
-        <a:lstStyle/>
-        <a:p>
-          <a:pPr marL="0" lvl="0" indent="0" algn="l" defTabSz="1644650">
-            <a:lnSpc>
-              <a:spcPct val="90000"/>
-            </a:lnSpc>
-            <a:spcBef>
-              <a:spcPct val="0"/>
-            </a:spcBef>
-            <a:spcAft>
-              <a:spcPct val="35000"/>
-            </a:spcAft>
-            <a:buNone/>
-          </a:pPr>
-          <a:r>
-            <a:rPr lang="sk-SK" sz="3700" kern="1200"/>
-            <a:t>Nevýhody:</a:t>
-          </a:r>
-          <a:endParaRPr lang="en-US" sz="3700" kern="1200"/>
-        </a:p>
-      </dsp:txBody>
-      <dsp:txXfrm>
-        <a:off x="44378" y="3045639"/>
-        <a:ext cx="6174884" cy="820334"/>
-      </dsp:txXfrm>
-    </dsp:sp>
-    <dsp:sp modelId="{BD45B450-AE10-41F0-93A9-83C5178E39E5}">
-      <dsp:nvSpPr>
-        <dsp:cNvPr id="0" name=""/>
-        <dsp:cNvSpPr/>
-      </dsp:nvSpPr>
-      <dsp:spPr>
-        <a:xfrm>
-          <a:off x="0" y="3910351"/>
-          <a:ext cx="6263640" cy="1493505"/>
-        </a:xfrm>
-        <a:prstGeom prst="rect">
-          <a:avLst/>
-        </a:prstGeom>
-        <a:noFill/>
-        <a:ln>
-          <a:noFill/>
-        </a:ln>
-        <a:effectLst/>
-      </dsp:spPr>
-      <dsp:style>
-        <a:lnRef idx="0">
-          <a:scrgbClr r="0" g="0" b="0"/>
-        </a:lnRef>
-        <a:fillRef idx="0">
-          <a:scrgbClr r="0" g="0" b="0"/>
-        </a:fillRef>
-        <a:effectRef idx="0">
-          <a:scrgbClr r="0" g="0" b="0"/>
-        </a:effectRef>
-        <a:fontRef idx="minor"/>
-      </dsp:style>
-      <dsp:txBody>
-        <a:bodyPr spcFirstLastPara="0" vert="horz" wrap="square" lIns="198871" tIns="46990" rIns="263144" bIns="46990" numCol="1" spcCol="1270" anchor="t" anchorCtr="0">
-          <a:noAutofit/>
-        </a:bodyPr>
-        <a:lstStyle/>
-        <a:p>
-          <a:pPr marL="285750" lvl="1" indent="-285750" algn="l" defTabSz="1289050">
-            <a:lnSpc>
-              <a:spcPct val="90000"/>
-            </a:lnSpc>
-            <a:spcBef>
-              <a:spcPct val="0"/>
-            </a:spcBef>
-            <a:spcAft>
-              <a:spcPct val="20000"/>
-            </a:spcAft>
-            <a:buChar char="•"/>
-          </a:pPr>
-          <a:r>
-            <a:rPr lang="sk-SK" sz="2900" kern="1200"/>
-            <a:t>nezrelosť nástrojov</a:t>
-          </a:r>
-          <a:endParaRPr lang="en-US" sz="2900" kern="1200"/>
-        </a:p>
-        <a:p>
-          <a:pPr marL="285750" lvl="1" indent="-285750" algn="l" defTabSz="1289050">
-            <a:lnSpc>
-              <a:spcPct val="90000"/>
-            </a:lnSpc>
-            <a:spcBef>
-              <a:spcPct val="0"/>
-            </a:spcBef>
-            <a:spcAft>
-              <a:spcPct val="20000"/>
-            </a:spcAft>
-            <a:buChar char="•"/>
-          </a:pPr>
-          <a:r>
-            <a:rPr lang="sk-SK" sz="2900" kern="1200"/>
-            <a:t>musíte vedieť špecifickú syntax</a:t>
-          </a:r>
-          <a:endParaRPr lang="en-US" sz="2900" kern="1200"/>
-        </a:p>
-        <a:p>
-          <a:pPr marL="285750" lvl="1" indent="-285750" algn="l" defTabSz="1289050">
-            <a:lnSpc>
-              <a:spcPct val="90000"/>
-            </a:lnSpc>
-            <a:spcBef>
-              <a:spcPct val="0"/>
-            </a:spcBef>
-            <a:spcAft>
-              <a:spcPct val="20000"/>
-            </a:spcAft>
-            <a:buChar char="•"/>
-          </a:pPr>
-          <a:r>
-            <a:rPr lang="sk-SK" sz="2900" kern="1200"/>
-            <a:t>strata precíznej kontroly vizuálu</a:t>
-          </a:r>
-          <a:endParaRPr lang="en-US" sz="2900" kern="1200"/>
-        </a:p>
-      </dsp:txBody>
-      <dsp:txXfrm>
-        <a:off x="0" y="3910351"/>
-        <a:ext cx="6263640" cy="1493505"/>
-      </dsp:txXfrm>
-    </dsp:sp>
-  </dsp:spTree>
-</dsp:drawing>
-</file>
-
-<file path=ppt/diagrams/layout1.xml><?xml version="1.0" encoding="utf-8"?>
-<dgm:layoutDef xmlns:dgm="http://schemas.openxmlformats.org/drawingml/2006/diagram" xmlns:a="http://schemas.openxmlformats.org/drawingml/2006/main" uniqueId="urn:microsoft.com/office/officeart/2005/8/layout/vList2">
-  <dgm:title val=""/>
-  <dgm:desc val=""/>
-  <dgm:catLst>
-    <dgm:cat type="list" pri="3000"/>
-    <dgm:cat type="convert" pri="1000"/>
-  </dgm:catLst>
-  <dgm:sampData>
-    <dgm:dataModel>
-      <dgm:ptLst>
-        <dgm:pt modelId="0" type="doc"/>
-        <dgm:pt modelId="1">
-          <dgm:prSet phldr="1"/>
-        </dgm:pt>
-        <dgm:pt modelId="11">
-          <dgm:prSet phldr="1"/>
-        </dgm:pt>
-        <dgm:pt modelId="2">
-          <dgm:prSet phldr="1"/>
-        </dgm:pt>
-        <dgm:pt modelId="21">
-          <dgm:prSet phldr="1"/>
-        </dgm:pt>
-      </dgm:ptLst>
-      <dgm:cxnLst>
-        <dgm:cxn modelId="4" srcId="0" destId="1" srcOrd="0" destOrd="0"/>
-        <dgm:cxn modelId="5" srcId="0" destId="2" srcOrd="1" destOrd="0"/>
-        <dgm:cxn modelId="12" srcId="1" destId="11" srcOrd="0" destOrd="0"/>
-        <dgm:cxn modelId="23" srcId="2" destId="21" srcOrd="0" destOrd="0"/>
-      </dgm:cxnLst>
-      <dgm:bg/>
-      <dgm:whole/>
-    </dgm:dataModel>
-  </dgm:sampData>
-  <dgm:styleData>
-    <dgm:dataModel>
-      <dgm:ptLst>
-        <dgm:pt modelId="0" type="doc"/>
-        <dgm:pt modelId="1"/>
-        <dgm:pt modelId="2"/>
-      </dgm:ptLst>
-      <dgm:cxnLst>
-        <dgm:cxn modelId="3" srcId="0" destId="1" srcOrd="0" destOrd="0"/>
-        <dgm:cxn modelId="4" srcId="0" destId="2" srcOrd="1" destOrd="0"/>
-      </dgm:cxnLst>
-      <dgm:bg/>
-      <dgm:whole/>
-    </dgm:dataModel>
-  </dgm:styleData>
-  <dgm:clrData>
-    <dgm:dataModel>
-      <dgm:ptLst>
-        <dgm:pt modelId="0" type="doc"/>
-        <dgm:pt modelId="1"/>
-        <dgm:pt modelId="2"/>
-        <dgm:pt modelId="3"/>
-        <dgm:pt modelId="4"/>
-      </dgm:ptLst>
-      <dgm:cxnLst>
-        <dgm:cxn modelId="5" srcId="0" destId="1" srcOrd="0" destOrd="0"/>
-        <dgm:cxn modelId="6" srcId="0" destId="2" srcOrd="1" destOrd="0"/>
-        <dgm:cxn modelId="7" srcId="0" destId="3" srcOrd="2" destOrd="0"/>
-        <dgm:cxn modelId="8" srcId="0" destId="4" srcOrd="3" destOrd="0"/>
-      </dgm:cxnLst>
-      <dgm:bg/>
-      <dgm:whole/>
-    </dgm:dataModel>
-  </dgm:clrData>
-  <dgm:layoutNode name="linear">
-    <dgm:varLst>
-      <dgm:animLvl val="lvl"/>
-      <dgm:resizeHandles val="exact"/>
-    </dgm:varLst>
-    <dgm:alg type="lin">
-      <dgm:param type="linDir" val="fromT"/>
-      <dgm:param type="vertAlign" val="mid"/>
-    </dgm:alg>
-    <dgm:shape xmlns:r="http://schemas.openxmlformats.org/officeDocument/2006/relationships" r:blip="">
-      <dgm:adjLst/>
-    </dgm:shape>
-    <dgm:presOf/>
-    <dgm:constrLst>
-      <dgm:constr type="w" for="ch" forName="parentText" refType="w"/>
-      <dgm:constr type="h" for="ch" forName="parentText" refType="primFontSz" refFor="ch" refForName="parentText" fact="0.52"/>
-      <dgm:constr type="w" for="ch" forName="childText" refType="w"/>
-      <dgm:constr type="h" for="ch" forName="childText" refType="primFontSz" refFor="ch" refForName="parentText" fact="0.46"/>
-      <dgm:constr type="h" for="ch" forName="parentText" op="equ"/>
-      <dgm:constr type="primFontSz" for="ch" forName="parentText" op="equ" val="65"/>
-      <dgm:constr type="primFontSz" for="ch" forName="childText" refType="primFontSz" refFor="ch" refForName="parentText" op="equ"/>
-      <dgm:constr type="h" for="ch" forName="spacer" refType="primFontSz" refFor="ch" refForName="parentText" fact="0.08"/>
-    </dgm:constrLst>
-    <dgm:ruleLst>
-      <dgm:rule type="primFontSz" for="ch" forName="parentText" val="5" fact="NaN" max="NaN"/>
-    </dgm:ruleLst>
-    <dgm:forEach name="Name0" axis="ch" ptType="node">
-      <dgm:layoutNode name="parentText" styleLbl="node1">
-        <dgm:varLst>
-          <dgm:chMax val="0"/>
-          <dgm:bulletEnabled val="1"/>
-        </dgm:varLst>
-        <dgm:alg type="tx">
-          <dgm:param type="parTxLTRAlign" val="l"/>
-          <dgm:param type="parTxRTLAlign" val="r"/>
-        </dgm:alg>
-        <dgm:shape xmlns:r="http://schemas.openxmlformats.org/officeDocument/2006/relationships" type="roundRect" r:blip="">
-          <dgm:adjLst/>
-        </dgm:shape>
-        <dgm:presOf axis="self"/>
-        <dgm:constrLst>
-          <dgm:constr type="tMarg" refType="primFontSz" fact="0.3"/>
-          <dgm:constr type="bMarg" refType="primFontSz" fact="0.3"/>
-          <dgm:constr type="lMarg" refType="primFontSz" fact="0.3"/>
-          <dgm:constr type="rMarg" refType="primFontSz" fact="0.3"/>
-        </dgm:constrLst>
-        <dgm:ruleLst>
-          <dgm:rule type="h" val="INF" fact="NaN" max="NaN"/>
-        </dgm:ruleLst>
-      </dgm:layoutNode>
-      <dgm:choose name="Name1">
-        <dgm:if name="Name2" axis="ch" ptType="node" func="cnt" op="gte" val="1">
-          <dgm:layoutNode name="childText" styleLbl="revTx">
-            <dgm:varLst>
-              <dgm:bulletEnabled val="1"/>
-            </dgm:varLst>
-            <dgm:alg type="tx">
-              <dgm:param type="stBulletLvl" val="1"/>
-              <dgm:param type="lnSpAfChP" val="20"/>
-            </dgm:alg>
-            <dgm:shape xmlns:r="http://schemas.openxmlformats.org/officeDocument/2006/relationships" type="rect" r:blip="">
-              <dgm:adjLst/>
-            </dgm:shape>
-            <dgm:presOf axis="des" ptType="node"/>
-            <dgm:constrLst>
-              <dgm:constr type="tMarg" refType="primFontSz" fact="0.1"/>
-              <dgm:constr type="bMarg" refType="primFontSz" fact="0.1"/>
-              <dgm:constr type="lMarg" refType="w" fact="0.09"/>
-            </dgm:constrLst>
-            <dgm:ruleLst>
-              <dgm:rule type="h" val="INF" fact="NaN" max="NaN"/>
-            </dgm:ruleLst>
-          </dgm:layoutNode>
-        </dgm:if>
-        <dgm:else name="Name3">
-          <dgm:choose name="Name4">
-            <dgm:if name="Name5" axis="par ch" ptType="doc node" func="cnt" op="gte" val="2">
-              <dgm:forEach name="Name6" axis="followSib" ptType="sibTrans" cnt="1">
-                <dgm:layoutNode name="spacer">
-                  <dgm:alg type="sp"/>
-                  <dgm:shape xmlns:r="http://schemas.openxmlformats.org/officeDocument/2006/relationships" r:blip="">
-                    <dgm:adjLst/>
-                  </dgm:shape>
-                  <dgm:presOf/>
-                  <dgm:constrLst/>
-                  <dgm:ruleLst/>
-                </dgm:layoutNode>
-              </dgm:forEach>
-            </dgm:if>
-            <dgm:else name="Name7"/>
-          </dgm:choose>
-        </dgm:else>
-      </dgm:choose>
-    </dgm:forEach>
-  </dgm:layoutNode>
-</dgm:layoutDef>
-</file>
-
-<file path=ppt/diagrams/quickStyle1.xml><?xml version="1.0" encoding="utf-8"?>
-<dgm:styleDef xmlns:dgm="http://schemas.openxmlformats.org/drawingml/2006/diagram" xmlns:a="http://schemas.openxmlformats.org/drawingml/2006/main" uniqueId="urn:microsoft.com/office/officeart/2005/8/quickstyle/simple1">
-  <dgm:title val=""/>
-  <dgm:desc val=""/>
-  <dgm:catLst>
-    <dgm:cat type="simple" pri="10100"/>
-  </dgm:catLst>
-  <dgm:scene3d>
-    <a:camera prst="orthographicFront"/>
-    <a:lightRig rig="threePt" dir="t"/>
-  </dgm:scene3d>
-  <dgm:styleLbl name="node0">
-    <dgm:scene3d>
-      <a:camera prst="orthographicFront"/>
-      <a:lightRig rig="threePt" dir="t"/>
-    </dgm:scene3d>
-    <dgm:sp3d/>
-    <dgm:txPr/>
-    <dgm:style>
-      <a:lnRef idx="2">
-        <a:scrgbClr r="0" g="0" b="0"/>
-      </a:lnRef>
-      <a:fillRef idx="1">
-        <a:scrgbClr r="0" g="0" b="0"/>
-      </a:fillRef>
-      <a:effectRef idx="0">
-        <a:scrgbClr r="0" g="0" b="0"/>
-      </a:effectRef>
-      <a:fontRef idx="minor">
-        <a:schemeClr val="lt1"/>
-      </a:fontRef>
-    </dgm:style>
-  </dgm:styleLbl>
-  <dgm:styleLbl name="lnNode1">
-    <dgm:scene3d>
-      <a:camera prst="orthographicFront"/>
-      <a:lightRig rig="threePt" dir="t"/>
-    </dgm:scene3d>
-    <dgm:sp3d/>
-    <dgm:txPr/>
-    <dgm:style>
-      <a:lnRef idx="2">
-        <a:scrgbClr r="0" g="0" b="0"/>
-      </a:lnRef>
-      <a:fillRef idx="1">
-        <a:scrgbClr r="0" g="0" b="0"/>
-      </a:fillRef>
-      <a:effectRef idx="0">
-        <a:scrgbClr r="0" g="0" b="0"/>
-      </a:effectRef>
-      <a:fontRef idx="minor">
-        <a:schemeClr val="lt1"/>
-      </a:fontRef>
-    </dgm:style>
-  </dgm:styleLbl>
-  <dgm:styleLbl name="vennNode1">
-    <dgm:scene3d>
-      <a:camera prst="orthographicFront"/>
-      <a:lightRig rig="threePt" dir="t"/>
-    </dgm:scene3d>
-    <dgm:sp3d/>
-    <dgm:txPr/>
-    <dgm:style>
-      <a:lnRef idx="2">
-        <a:scrgbClr r="0" g="0" b="0"/>
-      </a:lnRef>
-      <a:fillRef idx="1">
-        <a:scrgbClr r="0" g="0" b="0"/>
-      </a:fillRef>
-      <a:effectRef idx="0">
-        <a:scrgbClr r="0" g="0" b="0"/>
-      </a:effectRef>
-      <a:fontRef idx="minor">
-        <a:schemeClr val="tx1"/>
-      </a:fontRef>
-    </dgm:style>
-  </dgm:styleLbl>
-  <dgm:styleLbl name="alignNode1">
-    <dgm:scene3d>
-      <a:camera prst="orthographicFront"/>
-      <a:lightRig rig="threePt" dir="t"/>
-    </dgm:scene3d>
-    <dgm:sp3d/>
-    <dgm:txPr/>
-    <dgm:style>
-      <a:lnRef idx="2">
-        <a:scrgbClr r="0" g="0" b="0"/>
-      </a:lnRef>
-      <a:fillRef idx="1">
-        <a:scrgbClr r="0" g="0" b="0"/>
-      </a:fillRef>
-      <a:effectRef idx="0">
-        <a:scrgbClr r="0" g="0" b="0"/>
-      </a:effectRef>
-      <a:fontRef idx="minor">
-        <a:schemeClr val="lt1"/>
-      </a:fontRef>
-    </dgm:style>
-  </dgm:styleLbl>
-  <dgm:styleLbl name="node1">
-    <dgm:scene3d>
-      <a:camera prst="orthographicFront"/>
-      <a:lightRig rig="threePt" dir="t"/>
-    </dgm:scene3d>
-    <dgm:sp3d/>
-    <dgm:txPr/>
-    <dgm:style>
-      <a:lnRef idx="2">
-        <a:scrgbClr r="0" g="0" b="0"/>
-      </a:lnRef>
-      <a:fillRef idx="1">
-        <a:scrgbClr r="0" g="0" b="0"/>
-      </a:fillRef>
-      <a:effectRef idx="0">
-        <a:scrgbClr r="0" g="0" b="0"/>
-      </a:effectRef>
-      <a:fontRef idx="minor">
-        <a:schemeClr val="lt1"/>
-      </a:fontRef>
-    </dgm:style>
-  </dgm:styleLbl>
-  <dgm:styleLbl name="node2">
-    <dgm:scene3d>
-      <a:camera prst="orthographicFront"/>
-      <a:lightRig rig="threePt" dir="t"/>
-    </dgm:scene3d>
-    <dgm:sp3d/>
-    <dgm:txPr/>
-    <dgm:style>
-      <a:lnRef idx="2">
-        <a:scrgbClr r="0" g="0" b="0"/>
-      </a:lnRef>
-      <a:fillRef idx="1">
-        <a:scrgbClr r="0" g="0" b="0"/>
-      </a:fillRef>
-      <a:effectRef idx="0">
-        <a:scrgbClr r="0" g="0" b="0"/>
-      </a:effectRef>
-      <a:fontRef idx="minor">
-        <a:schemeClr val="lt1"/>
-      </a:fontRef>
-    </dgm:style>
-  </dgm:styleLbl>
-  <dgm:styleLbl name="node3">
-    <dgm:scene3d>
-      <a:camera prst="orthographicFront"/>
-      <a:lightRig rig="threePt" dir="t"/>
-    </dgm:scene3d>
-    <dgm:sp3d/>
-    <dgm:txPr/>
-    <dgm:style>
-      <a:lnRef idx="2">
-        <a:scrgbClr r="0" g="0" b="0"/>
-      </a:lnRef>
-      <a:fillRef idx="1">
-        <a:scrgbClr r="0" g="0" b="0"/>
-      </a:fillRef>
-      <a:effectRef idx="0">
-        <a:scrgbClr r="0" g="0" b="0"/>
-      </a:effectRef>
-      <a:fontRef idx="minor">
-        <a:schemeClr val="lt1"/>
-      </a:fontRef>
-    </dgm:style>
-  </dgm:styleLbl>
-  <dgm:styleLbl name="node4">
-    <dgm:scene3d>
-      <a:camera prst="orthographicFront"/>
-      <a:lightRig rig="threePt" dir="t"/>
-    </dgm:scene3d>
-    <dgm:sp3d/>
-    <dgm:txPr/>
-    <dgm:style>
-      <a:lnRef idx="2">
-        <a:scrgbClr r="0" g="0" b="0"/>
-      </a:lnRef>
-      <a:fillRef idx="1">
-        <a:scrgbClr r="0" g="0" b="0"/>
-      </a:fillRef>
-      <a:effectRef idx="0">
-        <a:scrgbClr r="0" g="0" b="0"/>
-      </a:effectRef>
-      <a:fontRef idx="minor">
-        <a:schemeClr val="lt1"/>
-      </a:fontRef>
-    </dgm:style>
-  </dgm:styleLbl>
-  <dgm:styleLbl name="fgImgPlace1">
-    <dgm:scene3d>
-      <a:camera prst="orthographicFront"/>
-      <a:lightRig rig="threePt" dir="t"/>
-    </dgm:scene3d>
-    <dgm:sp3d/>
-    <dgm:txPr/>
-    <dgm:style>
-      <a:lnRef idx="2">
-        <a:scrgbClr r="0" g="0" b="0"/>
-      </a:lnRef>
-      <a:fillRef idx="1">
-        <a:scrgbClr r="0" g="0" b="0"/>
-      </a:fillRef>
-      <a:effectRef idx="0">
-        <a:scrgbClr r="0" g="0" b="0"/>
-      </a:effectRef>
-      <a:fontRef idx="minor"/>
-    </dgm:style>
-  </dgm:styleLbl>
-  <dgm:styleLbl name="alignImgPlace1">
-    <dgm:scene3d>
-      <a:camera prst="orthographicFront"/>
-      <a:lightRig rig="threePt" dir="t"/>
-    </dgm:scene3d>
-    <dgm:sp3d/>
-    <dgm:txPr/>
-    <dgm:style>
-      <a:lnRef idx="2">
-        <a:scrgbClr r="0" g="0" b="0"/>
-      </a:lnRef>
-      <a:fillRef idx="1">
-        <a:scrgbClr r="0" g="0" b="0"/>
-      </a:fillRef>
-      <a:effectRef idx="0">
-        <a:scrgbClr r="0" g="0" b="0"/>
-      </a:effectRef>
-      <a:fontRef idx="minor"/>
-    </dgm:style>
-  </dgm:styleLbl>
-  <dgm:styleLbl name="bgImgPlace1">
-    <dgm:scene3d>
-      <a:camera prst="orthographicFront"/>
-      <a:lightRig rig="threePt" dir="t"/>
-    </dgm:scene3d>
-    <dgm:sp3d/>
-    <dgm:txPr/>
-    <dgm:style>
-      <a:lnRef idx="2">
-        <a:scrgbClr r="0" g="0" b="0"/>
-      </a:lnRef>
-      <a:fillRef idx="1">
-        <a:scrgbClr r="0" g="0" b="0"/>
-      </a:fillRef>
-      <a:effectRef idx="0">
-        <a:scrgbClr r="0" g="0" b="0"/>
-      </a:effectRef>
-      <a:fontRef idx="minor"/>
-    </dgm:style>
-  </dgm:styleLbl>
-  <dgm:styleLbl name="sibTrans2D1">
-    <dgm:scene3d>
-      <a:camera prst="orthographicFront"/>
-      <a:lightRig rig="threePt" dir="t"/>
-    </dgm:scene3d>
-    <dgm:sp3d/>
-    <dgm:txPr/>
-    <dgm:style>
-      <a:lnRef idx="0">
-        <a:scrgbClr r="0" g="0" b="0"/>
-      </a:lnRef>
-      <a:fillRef idx="1">
-        <a:scrgbClr r="0" g="0" b="0"/>
-      </a:fillRef>
-      <a:effectRef idx="0">
-        <a:scrgbClr r="0" g="0" b="0"/>
-      </a:effectRef>
-      <a:fontRef idx="minor">
-        <a:schemeClr val="lt1"/>
-      </a:fontRef>
-    </dgm:style>
-  </dgm:styleLbl>
-  <dgm:styleLbl name="fgSibTrans2D1">
-    <dgm:scene3d>
-      <a:camera prst="orthographicFront"/>
-      <a:lightRig rig="threePt" dir="t"/>
-    </dgm:scene3d>
-    <dgm:sp3d/>
-    <dgm:txPr/>
-    <dgm:style>
-      <a:lnRef idx="0">
-        <a:scrgbClr r="0" g="0" b="0"/>
-      </a:lnRef>
-      <a:fillRef idx="1">
-        <a:scrgbClr r="0" g="0" b="0"/>
-      </a:fillRef>
-      <a:effectRef idx="0">
-        <a:scrgbClr r="0" g="0" b="0"/>
-      </a:effectRef>
-      <a:fontRef idx="minor">
-        <a:schemeClr val="lt1"/>
-      </a:fontRef>
-    </dgm:style>
-  </dgm:styleLbl>
-  <dgm:styleLbl name="bgSibTrans2D1">
-    <dgm:scene3d>
-      <a:camera prst="orthographicFront"/>
-      <a:lightRig rig="threePt" dir="t"/>
-    </dgm:scene3d>
-    <dgm:sp3d/>
-    <dgm:txPr/>
-    <dgm:style>
-      <a:lnRef idx="0">
-        <a:scrgbClr r="0" g="0" b="0"/>
-      </a:lnRef>
-      <a:fillRef idx="1">
-        <a:scrgbClr r="0" g="0" b="0"/>
-      </a:fillRef>
-      <a:effectRef idx="0">
-        <a:scrgbClr r="0" g="0" b="0"/>
-      </a:effectRef>
-      <a:fontRef idx="minor">
-        <a:schemeClr val="lt1"/>
-      </a:fontRef>
-    </dgm:style>
-  </dgm:styleLbl>
-  <dgm:styleLbl name="sibTrans1D1">
-    <dgm:scene3d>
-      <a:camera prst="orthographicFront"/>
-      <a:lightRig rig="threePt" dir="t"/>
-    </dgm:scene3d>
-    <dgm:sp3d/>
-    <dgm:txPr/>
-    <dgm:style>
-      <a:lnRef idx="1">
-        <a:scrgbClr r="0" g="0" b="0"/>
-      </a:lnRef>
-      <a:fillRef idx="0">
-        <a:scrgbClr r="0" g="0" b="0"/>
-      </a:fillRef>
-      <a:effectRef idx="0">
-        <a:scrgbClr r="0" g="0" b="0"/>
-      </a:effectRef>
-      <a:fontRef idx="minor"/>
-    </dgm:style>
-  </dgm:styleLbl>
-  <dgm:styleLbl name="callout">
-    <dgm:scene3d>
-      <a:camera prst="orthographicFront"/>
-      <a:lightRig rig="threePt" dir="t"/>
-    </dgm:scene3d>
-    <dgm:sp3d/>
-    <dgm:txPr/>
-    <dgm:style>
-      <a:lnRef idx="2">
-        <a:scrgbClr r="0" g="0" b="0"/>
-      </a:lnRef>
-      <a:fillRef idx="1">
-        <a:scrgbClr r="0" g="0" b="0"/>
-      </a:fillRef>
-      <a:effectRef idx="0">
-        <a:scrgbClr r="0" g="0" b="0"/>
-      </a:effectRef>
-      <a:fontRef idx="minor"/>
-    </dgm:style>
-  </dgm:styleLbl>
-  <dgm:styleLbl name="asst0">
-    <dgm:scene3d>
-      <a:camera prst="orthographicFront"/>
-      <a:lightRig rig="threePt" dir="t"/>
-    </dgm:scene3d>
-    <dgm:sp3d/>
-    <dgm:txPr/>
-    <dgm:style>
-      <a:lnRef idx="2">
-        <a:scrgbClr r="0" g="0" b="0"/>
-      </a:lnRef>
-      <a:fillRef idx="1">
-        <a:scrgbClr r="0" g="0" b="0"/>
-      </a:fillRef>
-      <a:effectRef idx="0">
-        <a:scrgbClr r="0" g="0" b="0"/>
-      </a:effectRef>
-      <a:fontRef idx="minor">
-        <a:schemeClr val="lt1"/>
-      </a:fontRef>
-    </dgm:style>
-  </dgm:styleLbl>
-  <dgm:styleLbl name="asst1">
-    <dgm:scene3d>
-      <a:camera prst="orthographicFront"/>
-      <a:lightRig rig="threePt" dir="t"/>
-    </dgm:scene3d>
-    <dgm:sp3d/>
-    <dgm:txPr/>
-    <dgm:style>
-      <a:lnRef idx="2">
-        <a:scrgbClr r="0" g="0" b="0"/>
-      </a:lnRef>
-      <a:fillRef idx="1">
-        <a:scrgbClr r="0" g="0" b="0"/>
-      </a:fillRef>
-      <a:effectRef idx="0">
-        <a:scrgbClr r="0" g="0" b="0"/>
-      </a:effectRef>
-      <a:fontRef idx="minor">
-        <a:schemeClr val="lt1"/>
-      </a:fontRef>
-    </dgm:style>
-  </dgm:styleLbl>
-  <dgm:styleLbl name="asst2">
-    <dgm:scene3d>
-      <a:camera prst="orthographicFront"/>
-      <a:lightRig rig="threePt" dir="t"/>
-    </dgm:scene3d>
-    <dgm:sp3d/>
-    <dgm:txPr/>
-    <dgm:style>
-      <a:lnRef idx="2">
-        <a:scrgbClr r="0" g="0" b="0"/>
-      </a:lnRef>
-      <a:fillRef idx="1">
-        <a:scrgbClr r="0" g="0" b="0"/>
-      </a:fillRef>
-      <a:effectRef idx="0">
-        <a:scrgbClr r="0" g="0" b="0"/>
-      </a:effectRef>
-      <a:fontRef idx="minor">
-        <a:schemeClr val="lt1"/>
-      </a:fontRef>
-    </dgm:style>
-  </dgm:styleLbl>
-  <dgm:styleLbl name="asst3">
-    <dgm:scene3d>
-      <a:camera prst="orthographicFront"/>
-      <a:lightRig rig="threePt" dir="t"/>
-    </dgm:scene3d>
-    <dgm:sp3d/>
-    <dgm:txPr/>
-    <dgm:style>
-      <a:lnRef idx="2">
-        <a:scrgbClr r="0" g="0" b="0"/>
-      </a:lnRef>
-      <a:fillRef idx="1">
-        <a:scrgbClr r="0" g="0" b="0"/>
-      </a:fillRef>
-      <a:effectRef idx="0">
-        <a:scrgbClr r="0" g="0" b="0"/>
-      </a:effectRef>
-      <a:fontRef idx="minor">
-        <a:schemeClr val="lt1"/>
-      </a:fontRef>
-    </dgm:style>
-  </dgm:styleLbl>
-  <dgm:styleLbl name="asst4">
-    <dgm:scene3d>
-      <a:camera prst="orthographicFront"/>
-      <a:lightRig rig="threePt" dir="t"/>
-    </dgm:scene3d>
-    <dgm:sp3d/>
-    <dgm:txPr/>
-    <dgm:style>
-      <a:lnRef idx="2">
-        <a:scrgbClr r="0" g="0" b="0"/>
-      </a:lnRef>
-      <a:fillRef idx="1">
-        <a:scrgbClr r="0" g="0" b="0"/>
-      </a:fillRef>
-      <a:effectRef idx="0">
-        <a:scrgbClr r="0" g="0" b="0"/>
-      </a:effectRef>
-      <a:fontRef idx="minor">
-        <a:schemeClr val="lt1"/>
-      </a:fontRef>
-    </dgm:style>
-  </dgm:styleLbl>
-  <dgm:styleLbl name="parChTrans2D1">
-    <dgm:scene3d>
-      <a:camera prst="orthographicFront"/>
-      <a:lightRig rig="threePt" dir="t"/>
-    </dgm:scene3d>
-    <dgm:sp3d/>
-    <dgm:txPr/>
-    <dgm:style>
-      <a:lnRef idx="2">
-        <a:scrgbClr r="0" g="0" b="0"/>
-      </a:lnRef>
-      <a:fillRef idx="1">
-        <a:scrgbClr r="0" g="0" b="0"/>
-      </a:fillRef>
-      <a:effectRef idx="0">
-        <a:scrgbClr r="0" g="0" b="0"/>
-      </a:effectRef>
-      <a:fontRef idx="minor">
-        <a:schemeClr val="lt1"/>
-      </a:fontRef>
-    </dgm:style>
-  </dgm:styleLbl>
-  <dgm:styleLbl name="parChTrans2D2">
-    <dgm:scene3d>
-      <a:camera prst="orthographicFront"/>
-      <a:lightRig rig="threePt" dir="t"/>
-    </dgm:scene3d>
-    <dgm:sp3d/>
-    <dgm:txPr/>
-    <dgm:style>
-      <a:lnRef idx="2">
-        <a:scrgbClr r="0" g="0" b="0"/>
-      </a:lnRef>
-      <a:fillRef idx="1">
-        <a:scrgbClr r="0" g="0" b="0"/>
-      </a:fillRef>
-      <a:effectRef idx="0">
-        <a:scrgbClr r="0" g="0" b="0"/>
-      </a:effectRef>
-      <a:fontRef idx="minor">
-        <a:schemeClr val="lt1"/>
-      </a:fontRef>
-    </dgm:style>
-  </dgm:styleLbl>
-  <dgm:styleLbl name="parChTrans2D3">
-    <dgm:scene3d>
-      <a:camera prst="orthographicFront"/>
-      <a:lightRig rig="threePt" dir="t"/>
-    </dgm:scene3d>
-    <dgm:sp3d/>
-    <dgm:txPr/>
-    <dgm:style>
-      <a:lnRef idx="2">
-        <a:scrgbClr r="0" g="0" b="0"/>
-      </a:lnRef>
-      <a:fillRef idx="1">
-        <a:scrgbClr r="0" g="0" b="0"/>
-      </a:fillRef>
-      <a:effectRef idx="0">
-        <a:scrgbClr r="0" g="0" b="0"/>
-      </a:effectRef>
-      <a:fontRef idx="minor">
-        <a:schemeClr val="lt1"/>
-      </a:fontRef>
-    </dgm:style>
-  </dgm:styleLbl>
-  <dgm:styleLbl name="parChTrans2D4">
-    <dgm:scene3d>
-      <a:camera prst="orthographicFront"/>
-      <a:lightRig rig="threePt" dir="t"/>
-    </dgm:scene3d>
-    <dgm:sp3d/>
-    <dgm:txPr/>
-    <dgm:style>
-      <a:lnRef idx="2">
-        <a:scrgbClr r="0" g="0" b="0"/>
-      </a:lnRef>
-      <a:fillRef idx="1">
-        <a:scrgbClr r="0" g="0" b="0"/>
-      </a:fillRef>
-      <a:effectRef idx="0">
-        <a:scrgbClr r="0" g="0" b="0"/>
-      </a:effectRef>
-      <a:fontRef idx="minor">
-        <a:schemeClr val="lt1"/>
-      </a:fontRef>
-    </dgm:style>
-  </dgm:styleLbl>
-  <dgm:styleLbl name="parChTrans1D1">
-    <dgm:scene3d>
-      <a:camera prst="orthographicFront"/>
-      <a:lightRig rig="threePt" dir="t"/>
-    </dgm:scene3d>
-    <dgm:sp3d/>
-    <dgm:txPr/>
-    <dgm:style>
-      <a:lnRef idx="2">
-        <a:scrgbClr r="0" g="0" b="0"/>
-      </a:lnRef>
-      <a:fillRef idx="0">
-        <a:scrgbClr r="0" g="0" b="0"/>
-      </a:fillRef>
-      <a:effectRef idx="0">
-        <a:scrgbClr r="0" g="0" b="0"/>
-      </a:effectRef>
-      <a:fontRef idx="minor"/>
-    </dgm:style>
-  </dgm:styleLbl>
-  <dgm:styleLbl name="parChTrans1D2">
-    <dgm:scene3d>
-      <a:camera prst="orthographicFront"/>
-      <a:lightRig rig="threePt" dir="t"/>
-    </dgm:scene3d>
-    <dgm:sp3d/>
-    <dgm:txPr/>
-    <dgm:style>
-      <a:lnRef idx="2">
-        <a:scrgbClr r="0" g="0" b="0"/>
-      </a:lnRef>
-      <a:fillRef idx="0">
-        <a:scrgbClr r="0" g="0" b="0"/>
-      </a:fillRef>
-      <a:effectRef idx="0">
-        <a:scrgbClr r="0" g="0" b="0"/>
-      </a:effectRef>
-      <a:fontRef idx="minor"/>
-    </dgm:style>
-  </dgm:styleLbl>
-  <dgm:styleLbl name="parChTrans1D3">
-    <dgm:scene3d>
-      <a:camera prst="orthographicFront"/>
-      <a:lightRig rig="threePt" dir="t"/>
-    </dgm:scene3d>
-    <dgm:sp3d/>
-    <dgm:txPr/>
-    <dgm:style>
-      <a:lnRef idx="2">
-        <a:scrgbClr r="0" g="0" b="0"/>
-      </a:lnRef>
-      <a:fillRef idx="0">
-        <a:scrgbClr r="0" g="0" b="0"/>
-      </a:fillRef>
-      <a:effectRef idx="0">
-        <a:scrgbClr r="0" g="0" b="0"/>
-      </a:effectRef>
-      <a:fontRef idx="minor"/>
-    </dgm:style>
-  </dgm:styleLbl>
-  <dgm:styleLbl name="parChTrans1D4">
-    <dgm:scene3d>
-      <a:camera prst="orthographicFront"/>
-      <a:lightRig rig="threePt" dir="t"/>
-    </dgm:scene3d>
-    <dgm:sp3d/>
-    <dgm:txPr/>
-    <dgm:style>
-      <a:lnRef idx="2">
-        <a:scrgbClr r="0" g="0" b="0"/>
-      </a:lnRef>
-      <a:fillRef idx="0">
-        <a:scrgbClr r="0" g="0" b="0"/>
-      </a:fillRef>
-      <a:effectRef idx="0">
-        <a:scrgbClr r="0" g="0" b="0"/>
-      </a:effectRef>
-      <a:fontRef idx="minor"/>
-    </dgm:style>
-  </dgm:styleLbl>
-  <dgm:styleLbl name="fgAcc1">
-    <dgm:scene3d>
-      <a:camera prst="orthographicFront"/>
-      <a:lightRig rig="threePt" dir="t"/>
-    </dgm:scene3d>
-    <dgm:sp3d/>
-    <dgm:txPr/>
-    <dgm:style>
-      <a:lnRef idx="2">
-        <a:scrgbClr r="0" g="0" b="0"/>
-      </a:lnRef>
-      <a:fillRef idx="1">
-        <a:scrgbClr r="0" g="0" b="0"/>
-      </a:fillRef>
-      <a:effectRef idx="0">
-        <a:scrgbClr r="0" g="0" b="0"/>
-      </a:effectRef>
-      <a:fontRef idx="minor"/>
-    </dgm:style>
-  </dgm:styleLbl>
-  <dgm:styleLbl name="conFgAcc1">
-    <dgm:scene3d>
-      <a:camera prst="orthographicFront"/>
-      <a:lightRig rig="threePt" dir="t"/>
-    </dgm:scene3d>
-    <dgm:sp3d/>
-    <dgm:txPr/>
-    <dgm:style>
-      <a:lnRef idx="2">
-        <a:scrgbClr r="0" g="0" b="0"/>
-      </a:lnRef>
-      <a:fillRef idx="1">
-        <a:scrgbClr r="0" g="0" b="0"/>
-      </a:fillRef>
-      <a:effectRef idx="0">
-        <a:scrgbClr r="0" g="0" b="0"/>
-      </a:effectRef>
-      <a:fontRef idx="minor"/>
-    </dgm:style>
-  </dgm:styleLbl>
-  <dgm:styleLbl name="alignAcc1">
-    <dgm:scene3d>
-      <a:camera prst="orthographicFront"/>
-      <a:lightRig rig="threePt" dir="t"/>
-    </dgm:scene3d>
-    <dgm:sp3d/>
-    <dgm:txPr/>
-    <dgm:style>
-      <a:lnRef idx="2">
-        <a:scrgbClr r="0" g="0" b="0"/>
-      </a:lnRef>
-      <a:fillRef idx="1">
-        <a:scrgbClr r="0" g="0" b="0"/>
-      </a:fillRef>
-      <a:effectRef idx="0">
-        <a:scrgbClr r="0" g="0" b="0"/>
-      </a:effectRef>
-      <a:fontRef idx="minor"/>
-    </dgm:style>
-  </dgm:styleLbl>
-  <dgm:styleLbl name="trAlignAcc1">
-    <dgm:scene3d>
-      <a:camera prst="orthographicFront"/>
-      <a:lightRig rig="threePt" dir="t"/>
-    </dgm:scene3d>
-    <dgm:sp3d/>
-    <dgm:txPr/>
-    <dgm:style>
-      <a:lnRef idx="1">
-        <a:scrgbClr r="0" g="0" b="0"/>
-      </a:lnRef>
-      <a:fillRef idx="1">
-        <a:scrgbClr r="0" g="0" b="0"/>
-      </a:fillRef>
-      <a:effectRef idx="0">
-        <a:scrgbClr r="0" g="0" b="0"/>
-      </a:effectRef>
-      <a:fontRef idx="minor"/>
-    </dgm:style>
-  </dgm:styleLbl>
-  <dgm:styleLbl name="bgAcc1">
-    <dgm:scene3d>
-      <a:camera prst="orthographicFront"/>
-      <a:lightRig rig="threePt" dir="t"/>
-    </dgm:scene3d>
-    <dgm:sp3d/>
-    <dgm:txPr/>
-    <dgm:style>
-      <a:lnRef idx="2">
-        <a:scrgbClr r="0" g="0" b="0"/>
-      </a:lnRef>
-      <a:fillRef idx="1">
-        <a:scrgbClr r="0" g="0" b="0"/>
-      </a:fillRef>
-      <a:effectRef idx="0">
-        <a:scrgbClr r="0" g="0" b="0"/>
-      </a:effectRef>
-      <a:fontRef idx="minor"/>
-    </dgm:style>
-  </dgm:styleLbl>
-  <dgm:styleLbl name="solidFgAcc1">
-    <dgm:scene3d>
-      <a:camera prst="orthographicFront"/>
-      <a:lightRig rig="threePt" dir="t"/>
-    </dgm:scene3d>
-    <dgm:sp3d/>
-    <dgm:txPr/>
-    <dgm:style>
-      <a:lnRef idx="2">
-        <a:scrgbClr r="0" g="0" b="0"/>
-      </a:lnRef>
-      <a:fillRef idx="1">
-        <a:scrgbClr r="0" g="0" b="0"/>
-      </a:fillRef>
-      <a:effectRef idx="0">
-        <a:scrgbClr r="0" g="0" b="0"/>
-      </a:effectRef>
-      <a:fontRef idx="minor"/>
-    </dgm:style>
-  </dgm:styleLbl>
-  <dgm:styleLbl name="solidAlignAcc1">
-    <dgm:scene3d>
-      <a:camera prst="orthographicFront"/>
-      <a:lightRig rig="threePt" dir="t"/>
-    </dgm:scene3d>
-    <dgm:sp3d/>
-    <dgm:txPr/>
-    <dgm:style>
-      <a:lnRef idx="2">
-        <a:scrgbClr r="0" g="0" b="0"/>
-      </a:lnRef>
-      <a:fillRef idx="1">
-        <a:scrgbClr r="0" g="0" b="0"/>
-      </a:fillRef>
-      <a:effectRef idx="0">
-        <a:scrgbClr r="0" g="0" b="0"/>
-      </a:effectRef>
-      <a:fontRef idx="minor"/>
-    </dgm:style>
-  </dgm:styleLbl>
-  <dgm:styleLbl name="solidBgAcc1">
-    <dgm:scene3d>
-      <a:camera prst="orthographicFront"/>
-      <a:lightRig rig="threePt" dir="t"/>
-    </dgm:scene3d>
-    <dgm:sp3d/>
-    <dgm:txPr/>
-    <dgm:style>
-      <a:lnRef idx="2">
-        <a:scrgbClr r="0" g="0" b="0"/>
-      </a:lnRef>
-      <a:fillRef idx="1">
-        <a:scrgbClr r="0" g="0" b="0"/>
-      </a:fillRef>
-      <a:effectRef idx="0">
-        <a:scrgbClr r="0" g="0" b="0"/>
-      </a:effectRef>
-      <a:fontRef idx="minor"/>
-    </dgm:style>
-  </dgm:styleLbl>
-  <dgm:styleLbl name="fgAccFollowNode1">
-    <dgm:scene3d>
-      <a:camera prst="orthographicFront"/>
-      <a:lightRig rig="threePt" dir="t"/>
-    </dgm:scene3d>
-    <dgm:sp3d/>
-    <dgm:txPr/>
-    <dgm:style>
-      <a:lnRef idx="2">
-        <a:scrgbClr r="0" g="0" b="0"/>
-      </a:lnRef>
-      <a:fillRef idx="1">
-        <a:scrgbClr r="0" g="0" b="0"/>
-      </a:fillRef>
-      <a:effectRef idx="0">
-        <a:scrgbClr r="0" g="0" b="0"/>
-      </a:effectRef>
-      <a:fontRef idx="minor"/>
-    </dgm:style>
-  </dgm:styleLbl>
-  <dgm:styleLbl name="alignAccFollowNode1">
-    <dgm:scene3d>
-      <a:camera prst="orthographicFront"/>
-      <a:lightRig rig="threePt" dir="t"/>
-    </dgm:scene3d>
-    <dgm:sp3d/>
-    <dgm:txPr/>
-    <dgm:style>
-      <a:lnRef idx="2">
-        <a:scrgbClr r="0" g="0" b="0"/>
-      </a:lnRef>
-      <a:fillRef idx="1">
-        <a:scrgbClr r="0" g="0" b="0"/>
-      </a:fillRef>
-      <a:effectRef idx="0">
-        <a:scrgbClr r="0" g="0" b="0"/>
-      </a:effectRef>
-      <a:fontRef idx="minor"/>
-    </dgm:style>
-  </dgm:styleLbl>
-  <dgm:styleLbl name="bgAccFollowNode1">
-    <dgm:scene3d>
-      <a:camera prst="orthographicFront"/>
-      <a:lightRig rig="threePt" dir="t"/>
-    </dgm:scene3d>
-    <dgm:sp3d/>
-    <dgm:txPr/>
-    <dgm:style>
-      <a:lnRef idx="2">
-        <a:scrgbClr r="0" g="0" b="0"/>
-      </a:lnRef>
-      <a:fillRef idx="1">
-        <a:scrgbClr r="0" g="0" b="0"/>
-      </a:fillRef>
-      <a:effectRef idx="0">
-        <a:scrgbClr r="0" g="0" b="0"/>
-      </a:effectRef>
-      <a:fontRef idx="minor"/>
-    </dgm:style>
-  </dgm:styleLbl>
-  <dgm:styleLbl name="fgAcc0">
-    <dgm:scene3d>
-      <a:camera prst="orthographicFront"/>
-      <a:lightRig rig="threePt" dir="t"/>
-    </dgm:scene3d>
-    <dgm:sp3d/>
-    <dgm:txPr/>
-    <dgm:style>
-      <a:lnRef idx="2">
-        <a:scrgbClr r="0" g="0" b="0"/>
-      </a:lnRef>
-      <a:fillRef idx="1">
-        <a:scrgbClr r="0" g="0" b="0"/>
-      </a:fillRef>
-      <a:effectRef idx="0">
-        <a:scrgbClr r="0" g="0" b="0"/>
-      </a:effectRef>
-      <a:fontRef idx="minor"/>
-    </dgm:style>
-  </dgm:styleLbl>
-  <dgm:styleLbl name="fgAcc2">
-    <dgm:scene3d>
-      <a:camera prst="orthographicFront"/>
-      <a:lightRig rig="threePt" dir="t"/>
-    </dgm:scene3d>
-    <dgm:sp3d/>
-    <dgm:txPr/>
-    <dgm:style>
-      <a:lnRef idx="2">
-        <a:scrgbClr r="0" g="0" b="0"/>
-      </a:lnRef>
-      <a:fillRef idx="1">
-        <a:scrgbClr r="0" g="0" b="0"/>
-      </a:fillRef>
-      <a:effectRef idx="0">
-        <a:scrgbClr r="0" g="0" b="0"/>
-      </a:effectRef>
-      <a:fontRef idx="minor"/>
-    </dgm:style>
-  </dgm:styleLbl>
-  <dgm:styleLbl name="fgAcc3">
-    <dgm:scene3d>
-      <a:camera prst="orthographicFront"/>
-      <a:lightRig rig="threePt" dir="t"/>
-    </dgm:scene3d>
-    <dgm:sp3d/>
-    <dgm:txPr/>
-    <dgm:style>
-      <a:lnRef idx="2">
-        <a:scrgbClr r="0" g="0" b="0"/>
-      </a:lnRef>
-      <a:fillRef idx="1">
-        <a:scrgbClr r="0" g="0" b="0"/>
-      </a:fillRef>
-      <a:effectRef idx="0">
-        <a:scrgbClr r="0" g="0" b="0"/>
-      </a:effectRef>
-      <a:fontRef idx="minor"/>
-    </dgm:style>
-  </dgm:styleLbl>
-  <dgm:styleLbl name="fgAcc4">
-    <dgm:scene3d>
-      <a:camera prst="orthographicFront"/>
-      <a:lightRig rig="threePt" dir="t"/>
-    </dgm:scene3d>
-    <dgm:sp3d/>
-    <dgm:txPr/>
-    <dgm:style>
-      <a:lnRef idx="2">
-        <a:scrgbClr r="0" g="0" b="0"/>
-      </a:lnRef>
-      <a:fillRef idx="1">
-        <a:scrgbClr r="0" g="0" b="0"/>
-      </a:fillRef>
-      <a:effectRef idx="0">
-        <a:scrgbClr r="0" g="0" b="0"/>
-      </a:effectRef>
-      <a:fontRef idx="minor"/>
-    </dgm:style>
-  </dgm:styleLbl>
-  <dgm:styleLbl name="bgShp">
-    <dgm:scene3d>
-      <a:camera prst="orthographicFront"/>
-      <a:lightRig rig="threePt" dir="t"/>
-    </dgm:scene3d>
-    <dgm:sp3d/>
-    <dgm:txPr/>
-    <dgm:style>
-      <a:lnRef idx="0">
-        <a:scrgbClr r="0" g="0" b="0"/>
-      </a:lnRef>
-      <a:fillRef idx="1">
-        <a:scrgbClr r="0" g="0" b="0"/>
-      </a:fillRef>
-      <a:effectRef idx="0">
-        <a:scrgbClr r="0" g="0" b="0"/>
-      </a:effectRef>
-      <a:fontRef idx="minor"/>
-    </dgm:style>
-  </dgm:styleLbl>
-  <dgm:styleLbl name="dkBgShp">
-    <dgm:scene3d>
-      <a:camera prst="orthographicFront"/>
-      <a:lightRig rig="threePt" dir="t"/>
-    </dgm:scene3d>
-    <dgm:sp3d/>
-    <dgm:txPr/>
-    <dgm:style>
-      <a:lnRef idx="0">
-        <a:scrgbClr r="0" g="0" b="0"/>
-      </a:lnRef>
-      <a:fillRef idx="1">
-        <a:scrgbClr r="0" g="0" b="0"/>
-      </a:fillRef>
-      <a:effectRef idx="0">
-        <a:scrgbClr r="0" g="0" b="0"/>
-      </a:effectRef>
-      <a:fontRef idx="minor"/>
-    </dgm:style>
-  </dgm:styleLbl>
-  <dgm:styleLbl name="trBgShp">
-    <dgm:scene3d>
-      <a:camera prst="orthographicFront"/>
-      <a:lightRig rig="threePt" dir="t"/>
-    </dgm:scene3d>
-    <dgm:sp3d/>
-    <dgm:txPr/>
-    <dgm:style>
-      <a:lnRef idx="0">
-        <a:scrgbClr r="0" g="0" b="0"/>
-      </a:lnRef>
-      <a:fillRef idx="1">
-        <a:scrgbClr r="0" g="0" b="0"/>
-      </a:fillRef>
-      <a:effectRef idx="0">
-        <a:scrgbClr r="0" g="0" b="0"/>
-      </a:effectRef>
-      <a:fontRef idx="minor"/>
-    </dgm:style>
-  </dgm:styleLbl>
-  <dgm:styleLbl name="fgShp">
-    <dgm:scene3d>
-      <a:camera prst="orthographicFront"/>
-      <a:lightRig rig="threePt" dir="t"/>
-    </dgm:scene3d>
-    <dgm:sp3d/>
-    <dgm:txPr/>
-    <dgm:style>
-      <a:lnRef idx="2">
-        <a:scrgbClr r="0" g="0" b="0"/>
-      </a:lnRef>
-      <a:fillRef idx="1">
-        <a:scrgbClr r="0" g="0" b="0"/>
-      </a:fillRef>
-      <a:effectRef idx="0">
-        <a:scrgbClr r="0" g="0" b="0"/>
-      </a:effectRef>
-      <a:fontRef idx="minor"/>
-    </dgm:style>
-  </dgm:styleLbl>
-  <dgm:styleLbl name="revTx">
-    <dgm:scene3d>
-      <a:camera prst="orthographicFront"/>
-      <a:lightRig rig="threePt" dir="t"/>
-    </dgm:scene3d>
-    <dgm:sp3d/>
-    <dgm:txPr/>
-    <dgm:style>
-      <a:lnRef idx="0">
-        <a:scrgbClr r="0" g="0" b="0"/>
-      </a:lnRef>
-      <a:fillRef idx="0">
-        <a:scrgbClr r="0" g="0" b="0"/>
-      </a:fillRef>
-      <a:effectRef idx="0">
-        <a:scrgbClr r="0" g="0" b="0"/>
-      </a:effectRef>
-      <a:fontRef idx="minor"/>
-    </dgm:style>
-  </dgm:styleLbl>
-</dgm:styleDef>
-</file>
-
 <file path=ppt/slideLayouts/slideLayout1.xml><?xml version="1.0" encoding="utf-8"?>
 <p:sldLayout xmlns:a="http://schemas.openxmlformats.org/drawingml/2006/main" xmlns:r="http://schemas.openxmlformats.org/officeDocument/2006/relationships" xmlns:p="http://schemas.openxmlformats.org/presentationml/2006/main" type="title" preserve="1">
   <p:cSld name="Úvodná snímka">
@@ -3041,7 +254,7 @@
           <a:p>
             <a:fld id="{10052495-8BC8-4CFB-94B1-B0429F101A0D}" type="datetimeFigureOut">
               <a:rPr lang="sk-SK" smtClean="0"/>
-              <a:t>6. 9. 2025</a:t>
+              <a:t>2. 9. 2026</a:t>
             </a:fld>
             <a:endParaRPr lang="sk-SK"/>
           </a:p>
@@ -3211,7 +424,7 @@
           <a:p>
             <a:fld id="{10052495-8BC8-4CFB-94B1-B0429F101A0D}" type="datetimeFigureOut">
               <a:rPr lang="sk-SK" smtClean="0"/>
-              <a:t>6. 9. 2025</a:t>
+              <a:t>2. 9. 2026</a:t>
             </a:fld>
             <a:endParaRPr lang="sk-SK"/>
           </a:p>
@@ -3391,7 +604,7 @@
           <a:p>
             <a:fld id="{10052495-8BC8-4CFB-94B1-B0429F101A0D}" type="datetimeFigureOut">
               <a:rPr lang="sk-SK" smtClean="0"/>
-              <a:t>6. 9. 2025</a:t>
+              <a:t>2. 9. 2026</a:t>
             </a:fld>
             <a:endParaRPr lang="sk-SK"/>
           </a:p>
@@ -3561,7 +774,7 @@
           <a:p>
             <a:fld id="{10052495-8BC8-4CFB-94B1-B0429F101A0D}" type="datetimeFigureOut">
               <a:rPr lang="sk-SK" smtClean="0"/>
-              <a:t>6. 9. 2025</a:t>
+              <a:t>2. 9. 2026</a:t>
             </a:fld>
             <a:endParaRPr lang="sk-SK"/>
           </a:p>
@@ -3807,7 +1020,7 @@
           <a:p>
             <a:fld id="{10052495-8BC8-4CFB-94B1-B0429F101A0D}" type="datetimeFigureOut">
               <a:rPr lang="sk-SK" smtClean="0"/>
-              <a:t>6. 9. 2025</a:t>
+              <a:t>2. 9. 2026</a:t>
             </a:fld>
             <a:endParaRPr lang="sk-SK"/>
           </a:p>
@@ -4039,7 +1252,7 @@
           <a:p>
             <a:fld id="{10052495-8BC8-4CFB-94B1-B0429F101A0D}" type="datetimeFigureOut">
               <a:rPr lang="sk-SK" smtClean="0"/>
-              <a:t>6. 9. 2025</a:t>
+              <a:t>2. 9. 2026</a:t>
             </a:fld>
             <a:endParaRPr lang="sk-SK"/>
           </a:p>
@@ -4406,7 +1619,7 @@
           <a:p>
             <a:fld id="{10052495-8BC8-4CFB-94B1-B0429F101A0D}" type="datetimeFigureOut">
               <a:rPr lang="sk-SK" smtClean="0"/>
-              <a:t>6. 9. 2025</a:t>
+              <a:t>2. 9. 2026</a:t>
             </a:fld>
             <a:endParaRPr lang="sk-SK"/>
           </a:p>
@@ -4524,7 +1737,7 @@
           <a:p>
             <a:fld id="{10052495-8BC8-4CFB-94B1-B0429F101A0D}" type="datetimeFigureOut">
               <a:rPr lang="sk-SK" smtClean="0"/>
-              <a:t>6. 9. 2025</a:t>
+              <a:t>2. 9. 2026</a:t>
             </a:fld>
             <a:endParaRPr lang="sk-SK"/>
           </a:p>
@@ -4619,7 +1832,7 @@
           <a:p>
             <a:fld id="{10052495-8BC8-4CFB-94B1-B0429F101A0D}" type="datetimeFigureOut">
               <a:rPr lang="sk-SK" smtClean="0"/>
-              <a:t>6. 9. 2025</a:t>
+              <a:t>2. 9. 2026</a:t>
             </a:fld>
             <a:endParaRPr lang="sk-SK"/>
           </a:p>
@@ -4896,7 +2109,7 @@
           <a:p>
             <a:fld id="{10052495-8BC8-4CFB-94B1-B0429F101A0D}" type="datetimeFigureOut">
               <a:rPr lang="sk-SK" smtClean="0"/>
-              <a:t>6. 9. 2025</a:t>
+              <a:t>2. 9. 2026</a:t>
             </a:fld>
             <a:endParaRPr lang="sk-SK"/>
           </a:p>
@@ -5153,7 +2366,7 @@
           <a:p>
             <a:fld id="{10052495-8BC8-4CFB-94B1-B0429F101A0D}" type="datetimeFigureOut">
               <a:rPr lang="sk-SK" smtClean="0"/>
-              <a:t>6. 9. 2025</a:t>
+              <a:t>2. 9. 2026</a:t>
             </a:fld>
             <a:endParaRPr lang="sk-SK"/>
           </a:p>
@@ -5366,7 +2579,7 @@
           <a:p>
             <a:fld id="{10052495-8BC8-4CFB-94B1-B0429F101A0D}" type="datetimeFigureOut">
               <a:rPr lang="sk-SK" smtClean="0"/>
-              <a:t>6. 9. 2025</a:t>
+              <a:t>2. 9. 2026</a:t>
             </a:fld>
             <a:endParaRPr lang="sk-SK"/>
           </a:p>
@@ -6292,7 +3505,15 @@
             </a:br>
             <a:r>
               <a:rPr lang="sk-SK" b="1" dirty="0"/>
-              <a:t>Ing. Jozef Wagner PhD.</a:t>
+              <a:t>Ing. Jozef Wagner</a:t>
+            </a:r>
+            <a:r>
+              <a:rPr lang="en-US" b="1" dirty="0"/>
+              <a:t>,</a:t>
+            </a:r>
+            <a:r>
+              <a:rPr lang="sk-SK" b="1" dirty="0"/>
+              <a:t> PhD.</a:t>
             </a:r>
           </a:p>
           <a:p>
@@ -6345,370 +3566,6 @@
 </file>
 
 <file path=ppt/slides/slide10.xml><?xml version="1.0" encoding="utf-8"?>
-<p:sld xmlns:a="http://schemas.openxmlformats.org/drawingml/2006/main" xmlns:r="http://schemas.openxmlformats.org/officeDocument/2006/relationships" xmlns:p="http://schemas.openxmlformats.org/presentationml/2006/main">
-  <p:cSld>
-    <p:bg>
-      <p:bgPr>
-        <a:solidFill>
-          <a:schemeClr val="bg1"/>
-        </a:solidFill>
-        <a:effectLst/>
-      </p:bgPr>
-    </p:bg>
-    <p:spTree>
-      <p:nvGrpSpPr>
-        <p:cNvPr id="1" name="">
-          <a:extLst>
-            <a:ext uri="{FF2B5EF4-FFF2-40B4-BE49-F238E27FC236}">
-              <a16:creationId xmlns:a16="http://schemas.microsoft.com/office/drawing/2014/main" id="{B684782F-AC63-FC25-8304-A3E19CFA4248}"/>
-            </a:ext>
-          </a:extLst>
-        </p:cNvPr>
-        <p:cNvGrpSpPr/>
-        <p:nvPr/>
-      </p:nvGrpSpPr>
-      <p:grpSpPr>
-        <a:xfrm>
-          <a:off x="0" y="0"/>
-          <a:ext cx="0" cy="0"/>
-          <a:chOff x="0" y="0"/>
-          <a:chExt cx="0" cy="0"/>
-        </a:xfrm>
-      </p:grpSpPr>
-      <p:sp useBgFill="1">
-        <p:nvSpPr>
-          <p:cNvPr id="20" name="Rectangle 19">
-            <a:extLst>
-              <a:ext uri="{FF2B5EF4-FFF2-40B4-BE49-F238E27FC236}">
-                <a16:creationId xmlns:a16="http://schemas.microsoft.com/office/drawing/2014/main" id="{DCC231C8-C761-4B31-9B1C-C6D19248C6B3}"/>
-              </a:ext>
-              <a:ext uri="{C183D7F6-B498-43B3-948B-1728B52AA6E4}">
-                <adec:decorative xmlns:adec="http://schemas.microsoft.com/office/drawing/2017/decorative" val="1"/>
-              </a:ext>
-            </a:extLst>
-          </p:cNvPr>
-          <p:cNvSpPr>
-            <a:spLocks noGrp="1" noRot="1" noChangeAspect="1" noMove="1" noResize="1" noEditPoints="1" noAdjustHandles="1" noChangeArrowheads="1" noChangeShapeType="1" noTextEdit="1"/>
-          </p:cNvSpPr>
-          <p:nvPr>
-            <p:extLst>
-              <p:ext uri="{386F3935-93C4-4BCD-93E2-E3B085C9AB24}">
-                <p16:designElem xmlns:p16="http://schemas.microsoft.com/office/powerpoint/2015/main" val="1"/>
-              </p:ext>
-            </p:extLst>
-          </p:nvPr>
-        </p:nvSpPr>
-        <p:spPr>
-          <a:xfrm>
-            <a:off x="-1" y="0"/>
-            <a:ext cx="12188952" cy="6858000"/>
-          </a:xfrm>
-          <a:prstGeom prst="rect">
-            <a:avLst/>
-          </a:prstGeom>
-          <a:ln>
-            <a:noFill/>
-          </a:ln>
-        </p:spPr>
-        <p:style>
-          <a:lnRef idx="2">
-            <a:schemeClr val="accent1">
-              <a:shade val="50000"/>
-            </a:schemeClr>
-          </a:lnRef>
-          <a:fillRef idx="1">
-            <a:schemeClr val="accent1"/>
-          </a:fillRef>
-          <a:effectRef idx="0">
-            <a:schemeClr val="accent1"/>
-          </a:effectRef>
-          <a:fontRef idx="minor">
-            <a:schemeClr val="lt1"/>
-          </a:fontRef>
-        </p:style>
-        <p:txBody>
-          <a:bodyPr rtlCol="0" anchor="ctr"/>
-          <a:lstStyle/>
-          <a:p>
-            <a:pPr algn="ctr"/>
-            <a:endParaRPr lang="en-US"/>
-          </a:p>
-        </p:txBody>
-      </p:sp>
-      <p:sp>
-        <p:nvSpPr>
-          <p:cNvPr id="5" name="Nadpis 4">
-            <a:extLst>
-              <a:ext uri="{FF2B5EF4-FFF2-40B4-BE49-F238E27FC236}">
-                <a16:creationId xmlns:a16="http://schemas.microsoft.com/office/drawing/2014/main" id="{38539CCF-AB13-831F-66A9-7CB081855473}"/>
-              </a:ext>
-            </a:extLst>
-          </p:cNvPr>
-          <p:cNvSpPr>
-            <a:spLocks noGrp="1"/>
-          </p:cNvSpPr>
-          <p:nvPr>
-            <p:ph type="title"/>
-          </p:nvPr>
-        </p:nvSpPr>
-        <p:spPr>
-          <a:xfrm>
-            <a:off x="838200" y="557189"/>
-            <a:ext cx="3374136" cy="5567891"/>
-          </a:xfrm>
-        </p:spPr>
-        <p:txBody>
-          <a:bodyPr>
-            <a:normAutofit/>
-          </a:bodyPr>
-          <a:lstStyle/>
-          <a:p>
-            <a:r>
-              <a:rPr lang="sk-SK" sz="5200"/>
-              <a:t>Diagramy ako kód</a:t>
-            </a:r>
-          </a:p>
-        </p:txBody>
-      </p:sp>
-      <p:graphicFrame>
-        <p:nvGraphicFramePr>
-          <p:cNvPr id="8" name="Zástupný objekt pre obsah 2">
-            <a:extLst>
-              <a:ext uri="{FF2B5EF4-FFF2-40B4-BE49-F238E27FC236}">
-                <a16:creationId xmlns:a16="http://schemas.microsoft.com/office/drawing/2014/main" id="{F17B6D54-C40A-B7CC-185A-3F76CE2E2AA5}"/>
-              </a:ext>
-            </a:extLst>
-          </p:cNvPr>
-          <p:cNvGraphicFramePr>
-            <a:graphicFrameLocks noGrp="1"/>
-          </p:cNvGraphicFramePr>
-          <p:nvPr>
-            <p:ph idx="1"/>
-            <p:extLst>
-              <p:ext uri="{D42A27DB-BD31-4B8C-83A1-F6EECF244321}">
-                <p14:modId xmlns:p14="http://schemas.microsoft.com/office/powerpoint/2010/main" val="1413360781"/>
-              </p:ext>
-            </p:extLst>
-          </p:nvPr>
-        </p:nvGraphicFramePr>
-        <p:xfrm>
-          <a:off x="5093208" y="620392"/>
-          <a:ext cx="6263640" cy="5504688"/>
-        </p:xfrm>
-        <a:graphic>
-          <a:graphicData uri="http://schemas.openxmlformats.org/drawingml/2006/diagram">
-            <dgm:relIds xmlns:dgm="http://schemas.openxmlformats.org/drawingml/2006/diagram" xmlns:r="http://schemas.openxmlformats.org/officeDocument/2006/relationships" r:dm="rId2" r:lo="rId3" r:qs="rId4" r:cs="rId5"/>
-          </a:graphicData>
-        </a:graphic>
-      </p:graphicFrame>
-    </p:spTree>
-    <p:extLst>
-      <p:ext uri="{BB962C8B-B14F-4D97-AF65-F5344CB8AC3E}">
-        <p14:creationId xmlns:p14="http://schemas.microsoft.com/office/powerpoint/2010/main" val="4193598175"/>
-      </p:ext>
-    </p:extLst>
-  </p:cSld>
-  <p:clrMapOvr>
-    <a:masterClrMapping/>
-  </p:clrMapOvr>
-</p:sld>
-</file>
-
-<file path=ppt/slides/slide11.xml><?xml version="1.0" encoding="utf-8"?>
-<p:sld xmlns:a="http://schemas.openxmlformats.org/drawingml/2006/main" xmlns:r="http://schemas.openxmlformats.org/officeDocument/2006/relationships" xmlns:p="http://schemas.openxmlformats.org/presentationml/2006/main">
-  <p:cSld>
-    <p:spTree>
-      <p:nvGrpSpPr>
-        <p:cNvPr id="1" name=""/>
-        <p:cNvGrpSpPr/>
-        <p:nvPr/>
-      </p:nvGrpSpPr>
-      <p:grpSpPr>
-        <a:xfrm>
-          <a:off x="0" y="0"/>
-          <a:ext cx="0" cy="0"/>
-          <a:chOff x="0" y="0"/>
-          <a:chExt cx="0" cy="0"/>
-        </a:xfrm>
-      </p:grpSpPr>
-      <p:sp>
-        <p:nvSpPr>
-          <p:cNvPr id="2" name="Nadpis 1">
-            <a:extLst>
-              <a:ext uri="{FF2B5EF4-FFF2-40B4-BE49-F238E27FC236}">
-                <a16:creationId xmlns:a16="http://schemas.microsoft.com/office/drawing/2014/main" id="{497ACFD1-9ADA-CBAF-F800-5D5950EC32B2}"/>
-              </a:ext>
-            </a:extLst>
-          </p:cNvPr>
-          <p:cNvSpPr>
-            <a:spLocks noGrp="1"/>
-          </p:cNvSpPr>
-          <p:nvPr>
-            <p:ph type="title"/>
-          </p:nvPr>
-        </p:nvSpPr>
-        <p:spPr/>
-        <p:txBody>
-          <a:bodyPr>
-            <a:normAutofit/>
-          </a:bodyPr>
-          <a:lstStyle/>
-          <a:p>
-            <a:r>
-              <a:rPr lang="sk-SK" sz="4000" dirty="0" err="1"/>
-              <a:t>Pseudokód</a:t>
-            </a:r>
-            <a:endParaRPr lang="sk-SK" sz="4000" dirty="0"/>
-          </a:p>
-        </p:txBody>
-      </p:sp>
-      <p:sp>
-        <p:nvSpPr>
-          <p:cNvPr id="3" name="Zástupný objekt pre obsah 2">
-            <a:extLst>
-              <a:ext uri="{FF2B5EF4-FFF2-40B4-BE49-F238E27FC236}">
-                <a16:creationId xmlns:a16="http://schemas.microsoft.com/office/drawing/2014/main" id="{C323853C-4467-FEE0-62F1-68A68DD64A32}"/>
-              </a:ext>
-            </a:extLst>
-          </p:cNvPr>
-          <p:cNvSpPr>
-            <a:spLocks noGrp="1"/>
-          </p:cNvSpPr>
-          <p:nvPr>
-            <p:ph idx="1"/>
-          </p:nvPr>
-        </p:nvSpPr>
-        <p:spPr>
-          <a:xfrm>
-            <a:off x="2152650" y="1825625"/>
-            <a:ext cx="7886700" cy="4825546"/>
-          </a:xfrm>
-        </p:spPr>
-        <p:txBody>
-          <a:bodyPr>
-            <a:normAutofit/>
-          </a:bodyPr>
-          <a:lstStyle/>
-          <a:p>
-            <a:pPr marL="0" indent="0">
-              <a:buNone/>
-            </a:pPr>
-            <a:r>
-              <a:rPr lang="sk-SK" sz="2800" dirty="0" err="1"/>
-              <a:t>Pseudokód</a:t>
-            </a:r>
-            <a:r>
-              <a:rPr lang="sk-SK" sz="2800" dirty="0"/>
-              <a:t> je zápis algoritmu v prirodzenom jazyku, bez pravidiel. Pomáha nám vysvetliť algoritmus a plánovať kód.</a:t>
-            </a:r>
-          </a:p>
-          <a:p>
-            <a:pPr marL="0" indent="0">
-              <a:buNone/>
-            </a:pPr>
-            <a:r>
-              <a:rPr lang="sk-SK" sz="2800" dirty="0"/>
-              <a:t>Príklad </a:t>
-            </a:r>
-            <a:r>
-              <a:rPr lang="sk-SK" sz="2800" dirty="0" err="1"/>
-              <a:t>pseudokódu</a:t>
-            </a:r>
-            <a:r>
-              <a:rPr lang="sk-SK" sz="2800" dirty="0"/>
-              <a:t> pre súčet dvoch čísel:</a:t>
-            </a:r>
-          </a:p>
-          <a:p>
-            <a:pPr marL="457200" lvl="1" indent="0">
-              <a:buNone/>
-            </a:pPr>
-            <a:endParaRPr lang="sk-SK" sz="1000" dirty="0">
-              <a:latin typeface="Consolas" panose="020B0609020204030204" pitchFamily="49" charset="0"/>
-            </a:endParaRPr>
-          </a:p>
-          <a:p>
-            <a:pPr marL="457200" lvl="1" indent="0">
-              <a:buNone/>
-            </a:pPr>
-            <a:r>
-              <a:rPr lang="sk-SK" sz="2400" dirty="0">
-                <a:latin typeface="Consolas" panose="020B0609020204030204" pitchFamily="49" charset="0"/>
-              </a:rPr>
-              <a:t>Začať</a:t>
-            </a:r>
-          </a:p>
-          <a:p>
-            <a:pPr marL="457200" lvl="1" indent="0">
-              <a:buNone/>
-            </a:pPr>
-            <a:r>
-              <a:rPr lang="sk-SK" sz="2400" dirty="0">
-                <a:latin typeface="Consolas" panose="020B0609020204030204" pitchFamily="49" charset="0"/>
-              </a:rPr>
-              <a:t>Prečítať číslo1</a:t>
-            </a:r>
-          </a:p>
-          <a:p>
-            <a:pPr marL="457200" lvl="1" indent="0">
-              <a:buNone/>
-            </a:pPr>
-            <a:r>
-              <a:rPr lang="sk-SK" sz="2400" dirty="0">
-                <a:latin typeface="Consolas" panose="020B0609020204030204" pitchFamily="49" charset="0"/>
-              </a:rPr>
-              <a:t>Prečítať číslo2</a:t>
-            </a:r>
-          </a:p>
-          <a:p>
-            <a:pPr marL="457200" lvl="1" indent="0">
-              <a:buNone/>
-            </a:pPr>
-            <a:r>
-              <a:rPr lang="sk-SK" sz="2400" dirty="0">
-                <a:latin typeface="Consolas" panose="020B0609020204030204" pitchFamily="49" charset="0"/>
-              </a:rPr>
-              <a:t>súčet = číslo1 + číslo2</a:t>
-            </a:r>
-          </a:p>
-          <a:p>
-            <a:pPr marL="457200" lvl="1" indent="0">
-              <a:buNone/>
-            </a:pPr>
-            <a:r>
-              <a:rPr lang="sk-SK" sz="2400" dirty="0">
-                <a:latin typeface="Consolas" panose="020B0609020204030204" pitchFamily="49" charset="0"/>
-              </a:rPr>
-              <a:t>Vypísať súčet</a:t>
-            </a:r>
-          </a:p>
-          <a:p>
-            <a:pPr marL="457200" lvl="1" indent="0">
-              <a:buNone/>
-            </a:pPr>
-            <a:r>
-              <a:rPr lang="sk-SK" sz="2400" dirty="0">
-                <a:latin typeface="Consolas" panose="020B0609020204030204" pitchFamily="49" charset="0"/>
-              </a:rPr>
-              <a:t>Koniec</a:t>
-            </a:r>
-          </a:p>
-        </p:txBody>
-      </p:sp>
-    </p:spTree>
-    <p:extLst>
-      <p:ext uri="{BB962C8B-B14F-4D97-AF65-F5344CB8AC3E}">
-        <p14:creationId xmlns:p14="http://schemas.microsoft.com/office/powerpoint/2010/main" val="2707637133"/>
-      </p:ext>
-    </p:extLst>
-  </p:cSld>
-  <p:clrMapOvr>
-    <a:masterClrMapping/>
-  </p:clrMapOvr>
-</p:sld>
-</file>
-
-<file path=ppt/slides/slide2.xml><?xml version="1.0" encoding="utf-8"?>
 <p:sld xmlns:a="http://schemas.openxmlformats.org/drawingml/2006/main" xmlns:r="http://schemas.openxmlformats.org/officeDocument/2006/relationships" xmlns:p="http://schemas.openxmlformats.org/presentationml/2006/main">
   <p:cSld>
     <p:bg>
@@ -7114,7 +3971,7 @@
           <p:cNvPr id="2" name="Nadpis 1">
             <a:extLst>
               <a:ext uri="{FF2B5EF4-FFF2-40B4-BE49-F238E27FC236}">
-                <a16:creationId xmlns:a16="http://schemas.microsoft.com/office/drawing/2014/main" id="{B3680000-8E97-7BCD-0373-6D09E72013D1}"/>
+                <a16:creationId xmlns:a16="http://schemas.microsoft.com/office/drawing/2014/main" id="{DFC83381-CAF0-FCB2-EBA8-B78020AF4E6F}"/>
               </a:ext>
             </a:extLst>
           </p:cNvPr>
@@ -7127,8 +3984,8 @@
         </p:nvSpPr>
         <p:spPr>
           <a:xfrm>
-            <a:off x="1006900" y="1188637"/>
-            <a:ext cx="3141430" cy="4480726"/>
+            <a:off x="964674" y="2044044"/>
+            <a:ext cx="3484552" cy="1672550"/>
           </a:xfrm>
         </p:spPr>
         <p:txBody>
@@ -7139,15 +3996,12 @@
           <a:p>
             <a:pPr algn="r"/>
             <a:r>
-              <a:rPr lang="sk-SK" sz="4000" dirty="0"/>
-              <a:t>OPG  </a:t>
-            </a:r>
-            <a:br>
-              <a:rPr lang="sk-SK" sz="4000" dirty="0"/>
-            </a:br>
-            <a:r>
-              <a:rPr lang="sk-SK" sz="4000" dirty="0"/>
-              <a:t>Cvičenie 1</a:t>
+              <a:rPr lang="sk-SK" sz="4000" b="1" dirty="0">
+                <a:highlight>
+                  <a:srgbClr val="00FFFF"/>
+                </a:highlight>
+              </a:rPr>
+              <a:t>Diagramy ako kód</a:t>
             </a:r>
           </a:p>
         </p:txBody>
@@ -7212,7 +4066,7 @@
           <p:cNvPr id="3" name="Zástupný objekt pre obsah 2">
             <a:extLst>
               <a:ext uri="{FF2B5EF4-FFF2-40B4-BE49-F238E27FC236}">
-                <a16:creationId xmlns:a16="http://schemas.microsoft.com/office/drawing/2014/main" id="{19A88E58-5472-E350-E606-D7A492AB529E}"/>
+                <a16:creationId xmlns:a16="http://schemas.microsoft.com/office/drawing/2014/main" id="{33C65C32-1305-CFFD-8C8E-396D551DD2B3}"/>
               </a:ext>
             </a:extLst>
           </p:cNvPr>
@@ -7225,8 +4079,8 @@
         </p:nvSpPr>
         <p:spPr>
           <a:xfrm>
-            <a:off x="5138928" y="1338729"/>
-            <a:ext cx="4795584" cy="4180542"/>
+            <a:off x="4974339" y="1338729"/>
+            <a:ext cx="5703491" cy="4180542"/>
           </a:xfrm>
         </p:spPr>
         <p:txBody>
@@ -7235,54 +4089,61 @@
           </a:bodyPr>
           <a:lstStyle/>
           <a:p>
-            <a:pPr marL="514350" indent="-514350">
-              <a:buFont typeface="+mj-lt"/>
-              <a:buAutoNum type="arabicPeriod"/>
+            <a:pPr marL="0" indent="0">
+              <a:buNone/>
             </a:pPr>
             <a:r>
-              <a:rPr lang="sk-SK" dirty="0"/>
-              <a:t>Inštalácia JDK</a:t>
-            </a:r>
-          </a:p>
-          <a:p>
-            <a:pPr marL="514350" indent="-514350">
-              <a:buFont typeface="+mj-lt"/>
-              <a:buAutoNum type="arabicPeriod"/>
+              <a:rPr lang="sk-SK" dirty="0">
+                <a:solidFill>
+                  <a:srgbClr val="FF0000"/>
+                </a:solidFill>
+                <a:highlight>
+                  <a:srgbClr val="00FFFF"/>
+                </a:highlight>
+              </a:rPr>
+              <a:t>Diagramy vo forme textu, vkladáme ich do dokumentácie alebo zdrojového kódu.</a:t>
+            </a:r>
+            <a:endParaRPr lang="en-US" dirty="0">
+              <a:solidFill>
+                <a:srgbClr val="FF0000"/>
+              </a:solidFill>
+              <a:highlight>
+                <a:srgbClr val="00FFFF"/>
+              </a:highlight>
+            </a:endParaRPr>
+          </a:p>
+          <a:p>
+            <a:pPr marL="0" indent="0">
+              <a:buNone/>
             </a:pPr>
             <a:r>
-              <a:rPr lang="sk-SK" dirty="0"/>
-              <a:t>Inštalácia IDE</a:t>
-            </a:r>
-          </a:p>
-          <a:p>
-            <a:pPr marL="514350" indent="-514350">
-              <a:buFont typeface="+mj-lt"/>
-              <a:buAutoNum type="arabicPeriod"/>
-            </a:pPr>
-            <a:r>
-              <a:rPr lang="sk-SK" dirty="0"/>
-              <a:t>Vývojový diagram</a:t>
-            </a:r>
-          </a:p>
-          <a:p>
-            <a:pPr marL="514350" indent="-514350">
-              <a:buFont typeface="+mj-lt"/>
-              <a:buAutoNum type="arabicPeriod"/>
-            </a:pPr>
-            <a:r>
-              <a:rPr lang="sk-SK" dirty="0"/>
-              <a:t>Diagramy ako kód</a:t>
-            </a:r>
-          </a:p>
-          <a:p>
-            <a:pPr marL="514350" indent="-514350">
-              <a:buFont typeface="+mj-lt"/>
-              <a:buAutoNum type="arabicPeriod"/>
-            </a:pPr>
-            <a:r>
-              <a:rPr lang="sk-SK" dirty="0" err="1"/>
-              <a:t>Pseudokód</a:t>
-            </a:r>
+              <a:rPr lang="sk-SK" dirty="0">
+                <a:solidFill>
+                  <a:srgbClr val="FF0000"/>
+                </a:solidFill>
+                <a:highlight>
+                  <a:srgbClr val="00FFFF"/>
+                </a:highlight>
+                <a:hlinkClick r:id="rId2">
+                  <a:extLst>
+                    <a:ext uri="{A12FA001-AC4F-418D-AE19-62706E023703}">
+                      <ahyp:hlinkClr xmlns:ahyp="http://schemas.microsoft.com/office/drawing/2018/hyperlinkcolor" val="tx"/>
+                    </a:ext>
+                  </a:extLst>
+                </a:hlinkClick>
+              </a:rPr>
+              <a:t>http://mermaid.live</a:t>
+            </a:r>
+            <a:endParaRPr lang="sk-SK" dirty="0">
+              <a:solidFill>
+                <a:srgbClr val="FF0000"/>
+              </a:solidFill>
+              <a:highlight>
+                <a:srgbClr val="00FFFF"/>
+              </a:highlight>
+            </a:endParaRPr>
+          </a:p>
+          <a:p>
             <a:endParaRPr lang="sk-SK" dirty="0"/>
           </a:p>
         </p:txBody>
@@ -7290,7 +4151,7 @@
     </p:spTree>
     <p:extLst>
       <p:ext uri="{BB962C8B-B14F-4D97-AF65-F5344CB8AC3E}">
-        <p14:creationId xmlns:p14="http://schemas.microsoft.com/office/powerpoint/2010/main" val="2991288343"/>
+        <p14:creationId xmlns:p14="http://schemas.microsoft.com/office/powerpoint/2010/main" val="1230554443"/>
       </p:ext>
     </p:extLst>
   </p:cSld>
@@ -7300,17 +4161,9 @@
 </p:sld>
 </file>
 
-<file path=ppt/slides/slide3.xml><?xml version="1.0" encoding="utf-8"?>
+<file path=ppt/slides/slide11.xml><?xml version="1.0" encoding="utf-8"?>
 <p:sld xmlns:a="http://schemas.openxmlformats.org/drawingml/2006/main" xmlns:r="http://schemas.openxmlformats.org/officeDocument/2006/relationships" xmlns:p="http://schemas.openxmlformats.org/presentationml/2006/main">
   <p:cSld>
-    <p:bg>
-      <p:bgPr>
-        <a:solidFill>
-          <a:schemeClr val="bg1"/>
-        </a:solidFill>
-        <a:effectLst/>
-      </p:bgPr>
-    </p:bg>
     <p:spTree>
       <p:nvGrpSpPr>
         <p:cNvPr id="1" name=""/>
@@ -7327,10 +4180,10 @@
       </p:grpSpPr>
       <p:sp>
         <p:nvSpPr>
-          <p:cNvPr id="2" name="Nadpis 1">
+          <p:cNvPr id="3" name="Zástupný objekt pre obsah 2">
             <a:extLst>
               <a:ext uri="{FF2B5EF4-FFF2-40B4-BE49-F238E27FC236}">
-                <a16:creationId xmlns:a16="http://schemas.microsoft.com/office/drawing/2014/main" id="{46D5FFFD-949C-5777-368D-7616CC67C53B}"/>
+                <a16:creationId xmlns:a16="http://schemas.microsoft.com/office/drawing/2014/main" id="{E2868FFB-94A8-6B2E-B21C-40560B1F38A9}"/>
               </a:ext>
             </a:extLst>
           </p:cNvPr>
@@ -7338,43 +4191,13 @@
             <a:spLocks noGrp="1"/>
           </p:cNvSpPr>
           <p:nvPr>
-            <p:ph type="title"/>
-          </p:nvPr>
-        </p:nvSpPr>
-        <p:spPr/>
-        <p:txBody>
-          <a:bodyPr>
-            <a:normAutofit/>
-          </a:bodyPr>
-          <a:lstStyle/>
-          <a:p>
-            <a:r>
-              <a:rPr lang="sk-SK" sz="4000" dirty="0"/>
-              <a:t>Príprava</a:t>
-            </a:r>
-          </a:p>
-        </p:txBody>
-      </p:sp>
-      <p:sp>
-        <p:nvSpPr>
-          <p:cNvPr id="3" name="Zástupný objekt pre obsah 2">
-            <a:extLst>
-              <a:ext uri="{FF2B5EF4-FFF2-40B4-BE49-F238E27FC236}">
-                <a16:creationId xmlns:a16="http://schemas.microsoft.com/office/drawing/2014/main" id="{F834EA18-2911-E0AA-A6B4-7AC44110B2A1}"/>
-              </a:ext>
-            </a:extLst>
-          </p:cNvPr>
-          <p:cNvSpPr>
-            <a:spLocks noGrp="1"/>
-          </p:cNvSpPr>
-          <p:nvPr>
             <p:ph idx="1"/>
           </p:nvPr>
         </p:nvSpPr>
         <p:spPr>
           <a:xfrm>
-            <a:off x="2346958" y="1845734"/>
-            <a:ext cx="5909141" cy="4217609"/>
+            <a:off x="2152650" y="478971"/>
+            <a:ext cx="7886700" cy="5697992"/>
           </a:xfrm>
         </p:spPr>
         <p:txBody>
@@ -7387,234 +4210,227 @@
               <a:buNone/>
             </a:pPr>
             <a:r>
-              <a:rPr lang="fr-FR" sz="3000" dirty="0"/>
-              <a:t>Pre </a:t>
-            </a:r>
-            <a:r>
-              <a:rPr lang="fr-FR" sz="3000" dirty="0" err="1"/>
-              <a:t>programovanie</a:t>
-            </a:r>
-            <a:r>
-              <a:rPr lang="fr-FR" sz="3000" dirty="0"/>
-              <a:t> je </a:t>
-            </a:r>
-            <a:r>
-              <a:rPr lang="fr-FR" sz="3000" dirty="0" err="1"/>
-              <a:t>potrebné</a:t>
-            </a:r>
-            <a:r>
-              <a:rPr lang="fr-FR" sz="3000" dirty="0"/>
-              <a:t> </a:t>
-            </a:r>
-            <a:r>
-              <a:rPr lang="fr-FR" sz="3000" dirty="0" err="1"/>
-              <a:t>mať</a:t>
-            </a:r>
-            <a:r>
-              <a:rPr lang="fr-FR" sz="3000" dirty="0"/>
-              <a:t> </a:t>
-            </a:r>
-            <a:r>
-              <a:rPr lang="fr-FR" sz="3000" dirty="0" err="1"/>
-              <a:t>Javu</a:t>
-            </a:r>
-            <a:r>
-              <a:rPr lang="fr-FR" sz="3000" dirty="0"/>
-              <a:t> JDK </a:t>
-            </a:r>
-            <a:r>
-              <a:rPr lang="fr-FR" sz="3000" i="1" dirty="0"/>
-              <a:t>(Java </a:t>
-            </a:r>
-            <a:r>
-              <a:rPr lang="fr-FR" sz="3000" i="1" dirty="0" err="1"/>
-              <a:t>Development</a:t>
-            </a:r>
-            <a:r>
-              <a:rPr lang="fr-FR" sz="3000" i="1" dirty="0"/>
-              <a:t> Kit)</a:t>
-            </a:r>
-            <a:r>
-              <a:rPr lang="fr-FR" sz="3000" dirty="0"/>
-              <a:t>. </a:t>
-            </a:r>
-            <a:endParaRPr lang="sk-SK" sz="3000" dirty="0"/>
+              <a:rPr lang="sk-SK" sz="2800" dirty="0"/>
+              <a:t>Príklad vývojového diagramu v jazyku </a:t>
+            </a:r>
+            <a:r>
+              <a:rPr lang="sk-SK" sz="2800" dirty="0" err="1"/>
+              <a:t>Mermaid</a:t>
+            </a:r>
+            <a:r>
+              <a:rPr lang="sk-SK" sz="2800" dirty="0"/>
+              <a:t>:</a:t>
+            </a:r>
           </a:p>
           <a:p>
             <a:pPr marL="0" indent="0">
               <a:buNone/>
             </a:pPr>
-            <a:r>
-              <a:rPr lang="fr-FR" sz="3000" dirty="0" err="1"/>
-              <a:t>Odporúčaná</a:t>
-            </a:r>
-            <a:r>
-              <a:rPr lang="fr-FR" sz="3000" dirty="0"/>
-              <a:t> je </a:t>
-            </a:r>
-            <a:r>
-              <a:rPr lang="fr-FR" sz="3000" dirty="0" err="1"/>
-              <a:t>distribúcia</a:t>
-            </a:r>
-            <a:r>
-              <a:rPr lang="fr-FR" sz="3000" dirty="0"/>
-              <a:t> </a:t>
-            </a:r>
-            <a:r>
-              <a:rPr lang="fr-FR" sz="3000" b="1" dirty="0" err="1"/>
-              <a:t>Temurin</a:t>
-            </a:r>
-            <a:r>
-              <a:rPr lang="fr-FR" sz="3000" dirty="0"/>
-              <a:t>.</a:t>
-            </a:r>
-            <a:endParaRPr lang="sk-SK" sz="3000" dirty="0"/>
+            <a:endParaRPr lang="sk-SK" dirty="0">
+              <a:latin typeface="Consolas" panose="020B0609020204030204" pitchFamily="49" charset="0"/>
+            </a:endParaRPr>
           </a:p>
           <a:p>
             <a:pPr marL="0" indent="0">
               <a:buNone/>
             </a:pPr>
-            <a:br>
-              <a:rPr lang="sk-SK" sz="3000" dirty="0">
-                <a:hlinkClick r:id="rId2"/>
-              </a:rPr>
-            </a:br>
-            <a:r>
-              <a:rPr lang="sk-SK" sz="3000" dirty="0">
-                <a:hlinkClick r:id="rId2"/>
-              </a:rPr>
-              <a:t>https://adoptium.net/temurin</a:t>
-            </a:r>
-            <a:r>
-              <a:rPr lang="sk-SK" sz="3000" dirty="0"/>
-              <a:t> </a:t>
-            </a:r>
-          </a:p>
-          <a:p>
-            <a:pPr marL="0" indent="0">
-              <a:buNone/>
-            </a:pPr>
-            <a:endParaRPr lang="sk-SK" sz="1700" dirty="0"/>
-          </a:p>
-          <a:p>
-            <a:pPr marL="0" indent="0">
-              <a:buNone/>
-            </a:pPr>
-            <a:r>
-              <a:rPr lang="sk-SK" sz="3000" dirty="0"/>
-              <a:t>Akú Javu máme:</a:t>
-            </a:r>
-          </a:p>
-          <a:p>
-            <a:pPr lvl="1"/>
-            <a:r>
-              <a:rPr lang="sk-SK" sz="2600" dirty="0"/>
-              <a:t>príkaz: </a:t>
-            </a:r>
-            <a:r>
-              <a:rPr lang="sk-SK" sz="2600" dirty="0" err="1">
-                <a:highlight>
-                  <a:srgbClr val="FFFF00"/>
-                </a:highlight>
+            <a:r>
+              <a:rPr lang="sk-SK" dirty="0" err="1">
                 <a:latin typeface="Consolas" panose="020B0609020204030204" pitchFamily="49" charset="0"/>
               </a:rPr>
-              <a:t>java</a:t>
-            </a:r>
-            <a:r>
-              <a:rPr lang="sk-SK" sz="2600" dirty="0">
-                <a:highlight>
-                  <a:srgbClr val="FFFF00"/>
-                </a:highlight>
+              <a:t>flowchart</a:t>
+            </a:r>
+            <a:r>
+              <a:rPr lang="sk-SK" dirty="0">
                 <a:latin typeface="Consolas" panose="020B0609020204030204" pitchFamily="49" charset="0"/>
               </a:rPr>
-              <a:t> –</a:t>
-            </a:r>
-            <a:r>
-              <a:rPr lang="sk-SK" sz="2600" dirty="0" err="1">
-                <a:highlight>
-                  <a:srgbClr val="FFFF00"/>
-                </a:highlight>
+              <a:t> TD</a:t>
+            </a:r>
+          </a:p>
+          <a:p>
+            <a:pPr marL="0" indent="0">
+              <a:buNone/>
+            </a:pPr>
+            <a:r>
+              <a:rPr lang="sk-SK" dirty="0">
                 <a:latin typeface="Consolas" panose="020B0609020204030204" pitchFamily="49" charset="0"/>
               </a:rPr>
-              <a:t>version</a:t>
-            </a:r>
-            <a:endParaRPr lang="sk-SK" sz="2600" dirty="0">
-              <a:highlight>
-                <a:srgbClr val="FFFF00"/>
-              </a:highlight>
+              <a:t>    </a:t>
+            </a:r>
+            <a:r>
+              <a:rPr lang="sk-SK" dirty="0" err="1">
+                <a:latin typeface="Consolas" panose="020B0609020204030204" pitchFamily="49" charset="0"/>
+              </a:rPr>
+              <a:t>Start</a:t>
+            </a:r>
+            <a:r>
+              <a:rPr lang="sk-SK" dirty="0">
+                <a:latin typeface="Consolas" panose="020B0609020204030204" pitchFamily="49" charset="0"/>
+              </a:rPr>
+              <a:t>([Štart])</a:t>
+            </a:r>
+          </a:p>
+          <a:p>
+            <a:pPr marL="0" indent="0">
+              <a:buNone/>
+            </a:pPr>
+            <a:r>
+              <a:rPr lang="sk-SK" dirty="0">
+                <a:latin typeface="Consolas" panose="020B0609020204030204" pitchFamily="49" charset="0"/>
+              </a:rPr>
+              <a:t>    Input1[/Prečítať číslo1/]</a:t>
+            </a:r>
+          </a:p>
+          <a:p>
+            <a:pPr marL="0" indent="0">
+              <a:buNone/>
+            </a:pPr>
+            <a:r>
+              <a:rPr lang="sk-SK" dirty="0">
+                <a:latin typeface="Consolas" panose="020B0609020204030204" pitchFamily="49" charset="0"/>
+              </a:rPr>
+              <a:t>    Input2[/Prečítať číslo2/]</a:t>
+            </a:r>
+          </a:p>
+          <a:p>
+            <a:pPr marL="0" indent="0">
+              <a:buNone/>
+            </a:pPr>
+            <a:r>
+              <a:rPr lang="sk-SK" dirty="0">
+                <a:latin typeface="Consolas" panose="020B0609020204030204" pitchFamily="49" charset="0"/>
+              </a:rPr>
+              <a:t>    </a:t>
+            </a:r>
+            <a:r>
+              <a:rPr lang="sk-SK" dirty="0" err="1">
+                <a:latin typeface="Consolas" panose="020B0609020204030204" pitchFamily="49" charset="0"/>
+              </a:rPr>
+              <a:t>Sum</a:t>
+            </a:r>
+            <a:r>
+              <a:rPr lang="sk-SK" dirty="0">
+                <a:latin typeface="Consolas" panose="020B0609020204030204" pitchFamily="49" charset="0"/>
+              </a:rPr>
+              <a:t>[súčet = číslo1 + číslo2]</a:t>
+            </a:r>
+          </a:p>
+          <a:p>
+            <a:pPr marL="0" indent="0">
+              <a:buNone/>
+            </a:pPr>
+            <a:r>
+              <a:rPr lang="sk-SK" dirty="0">
+                <a:latin typeface="Consolas" panose="020B0609020204030204" pitchFamily="49" charset="0"/>
+              </a:rPr>
+              <a:t>    Output[/Vypísať súčet/]</a:t>
+            </a:r>
+          </a:p>
+          <a:p>
+            <a:pPr marL="0" indent="0">
+              <a:buNone/>
+            </a:pPr>
+            <a:r>
+              <a:rPr lang="sk-SK" dirty="0">
+                <a:latin typeface="Consolas" panose="020B0609020204030204" pitchFamily="49" charset="0"/>
+              </a:rPr>
+              <a:t>    End([Koniec])</a:t>
+            </a:r>
+          </a:p>
+          <a:p>
+            <a:pPr marL="0" indent="0">
+              <a:buNone/>
+            </a:pPr>
+            <a:r>
+              <a:rPr lang="sk-SK" dirty="0">
+                <a:latin typeface="Consolas" panose="020B0609020204030204" pitchFamily="49" charset="0"/>
+              </a:rPr>
+              <a:t>    </a:t>
+            </a:r>
+            <a:r>
+              <a:rPr lang="sk-SK" dirty="0" err="1">
+                <a:latin typeface="Consolas" panose="020B0609020204030204" pitchFamily="49" charset="0"/>
+              </a:rPr>
+              <a:t>Start</a:t>
+            </a:r>
+            <a:r>
+              <a:rPr lang="sk-SK" dirty="0">
+                <a:latin typeface="Consolas" panose="020B0609020204030204" pitchFamily="49" charset="0"/>
+              </a:rPr>
+              <a:t> --&gt; Input1</a:t>
+            </a:r>
+          </a:p>
+          <a:p>
+            <a:pPr marL="0" indent="0">
+              <a:buNone/>
+            </a:pPr>
+            <a:r>
+              <a:rPr lang="sk-SK" dirty="0">
+                <a:latin typeface="Consolas" panose="020B0609020204030204" pitchFamily="49" charset="0"/>
+              </a:rPr>
+              <a:t>    Input1 --&gt; Input2</a:t>
+            </a:r>
+          </a:p>
+          <a:p>
+            <a:pPr marL="0" indent="0">
+              <a:buNone/>
+            </a:pPr>
+            <a:r>
+              <a:rPr lang="sk-SK" dirty="0">
+                <a:latin typeface="Consolas" panose="020B0609020204030204" pitchFamily="49" charset="0"/>
+              </a:rPr>
+              <a:t>    Input2 --&gt; </a:t>
+            </a:r>
+            <a:r>
+              <a:rPr lang="sk-SK" dirty="0" err="1">
+                <a:latin typeface="Consolas" panose="020B0609020204030204" pitchFamily="49" charset="0"/>
+              </a:rPr>
+              <a:t>Sum</a:t>
+            </a:r>
+            <a:endParaRPr lang="sk-SK" dirty="0">
               <a:latin typeface="Consolas" panose="020B0609020204030204" pitchFamily="49" charset="0"/>
             </a:endParaRPr>
           </a:p>
           <a:p>
-            <a:pPr lvl="1"/>
-            <a:r>
-              <a:rPr lang="sk-SK" sz="2600" dirty="0"/>
-              <a:t>nová verzia vychádza </a:t>
-            </a:r>
-            <a:br>
-              <a:rPr lang="sk-SK" sz="2600" dirty="0"/>
-            </a:br>
-            <a:r>
-              <a:rPr lang="sk-SK" sz="2600" dirty="0"/>
-              <a:t>každých 6 mesiacov</a:t>
-            </a:r>
-          </a:p>
-          <a:p>
-            <a:pPr lvl="1"/>
-            <a:r>
-              <a:rPr lang="sk-SK" sz="2600" dirty="0"/>
-              <a:t>posledné stabilné verzie </a:t>
-            </a:r>
-            <a:br>
-              <a:rPr lang="sk-SK" sz="2600" dirty="0"/>
-            </a:br>
-            <a:r>
-              <a:rPr lang="sk-SK" sz="2600" dirty="0"/>
-              <a:t>Javy sú 17, 21 a 25</a:t>
-            </a:r>
-          </a:p>
-        </p:txBody>
-      </p:sp>
-      <p:pic>
-        <p:nvPicPr>
-          <p:cNvPr id="5" name="Grafický objekt 4">
-            <a:extLst>
-              <a:ext uri="{FF2B5EF4-FFF2-40B4-BE49-F238E27FC236}">
-                <a16:creationId xmlns:a16="http://schemas.microsoft.com/office/drawing/2014/main" id="{FBD4D2E2-AB48-3A75-D1E3-1F682472EAEF}"/>
-              </a:ext>
-            </a:extLst>
-          </p:cNvPr>
-          <p:cNvPicPr>
-            <a:picLocks noChangeAspect="1"/>
-          </p:cNvPicPr>
-          <p:nvPr/>
-        </p:nvPicPr>
-        <p:blipFill>
-          <a:blip r:embed="rId3">
-            <a:extLst>
-              <a:ext uri="{96DAC541-7B7A-43D3-8B79-37D633B846F1}">
-                <asvg:svgBlip xmlns:asvg="http://schemas.microsoft.com/office/drawing/2016/SVG/main" r:embed="rId4"/>
-              </a:ext>
-            </a:extLst>
-          </a:blip>
-          <a:stretch>
-            <a:fillRect/>
-          </a:stretch>
-        </p:blipFill>
-        <p:spPr>
-          <a:xfrm>
-            <a:off x="8256099" y="1916318"/>
-            <a:ext cx="1897702" cy="3471012"/>
-          </a:xfrm>
-          <a:prstGeom prst="rect">
-            <a:avLst/>
-          </a:prstGeom>
-        </p:spPr>
-      </p:pic>
+            <a:pPr marL="0" indent="0">
+              <a:buNone/>
+            </a:pPr>
+            <a:r>
+              <a:rPr lang="sk-SK" dirty="0">
+                <a:latin typeface="Consolas" panose="020B0609020204030204" pitchFamily="49" charset="0"/>
+              </a:rPr>
+              <a:t>    </a:t>
+            </a:r>
+            <a:r>
+              <a:rPr lang="sk-SK" dirty="0" err="1">
+                <a:latin typeface="Consolas" panose="020B0609020204030204" pitchFamily="49" charset="0"/>
+              </a:rPr>
+              <a:t>Sum</a:t>
+            </a:r>
+            <a:r>
+              <a:rPr lang="sk-SK" dirty="0">
+                <a:latin typeface="Consolas" panose="020B0609020204030204" pitchFamily="49" charset="0"/>
+              </a:rPr>
+              <a:t> --&gt; Output</a:t>
+            </a:r>
+          </a:p>
+          <a:p>
+            <a:pPr marL="0" indent="0">
+              <a:buNone/>
+            </a:pPr>
+            <a:r>
+              <a:rPr lang="sk-SK" dirty="0">
+                <a:latin typeface="Consolas" panose="020B0609020204030204" pitchFamily="49" charset="0"/>
+              </a:rPr>
+              <a:t>    Output --&gt; End</a:t>
+            </a:r>
+          </a:p>
+        </p:txBody>
+      </p:sp>
     </p:spTree>
     <p:extLst>
       <p:ext uri="{BB962C8B-B14F-4D97-AF65-F5344CB8AC3E}">
-        <p14:creationId xmlns:p14="http://schemas.microsoft.com/office/powerpoint/2010/main" val="4278490673"/>
+        <p14:creationId xmlns:p14="http://schemas.microsoft.com/office/powerpoint/2010/main" val="1464798716"/>
       </p:ext>
     </p:extLst>
   </p:cSld>
@@ -7624,7 +4440,7 @@
 </p:sld>
 </file>
 
-<file path=ppt/slides/slide4.xml><?xml version="1.0" encoding="utf-8"?>
+<file path=ppt/slides/slide12.xml><?xml version="1.0" encoding="utf-8"?>
 <p:sld xmlns:a="http://schemas.openxmlformats.org/drawingml/2006/main" xmlns:r="http://schemas.openxmlformats.org/officeDocument/2006/relationships" xmlns:p="http://schemas.openxmlformats.org/presentationml/2006/main">
   <p:cSld>
     <p:bg>
@@ -7635,6 +4451,301 @@
         <a:effectLst/>
       </p:bgPr>
     </p:bg>
+    <p:spTree>
+      <p:nvGrpSpPr>
+        <p:cNvPr id="1" name="">
+          <a:extLst>
+            <a:ext uri="{FF2B5EF4-FFF2-40B4-BE49-F238E27FC236}">
+              <a16:creationId xmlns:a16="http://schemas.microsoft.com/office/drawing/2014/main" id="{B684782F-AC63-FC25-8304-A3E19CFA4248}"/>
+            </a:ext>
+          </a:extLst>
+        </p:cNvPr>
+        <p:cNvGrpSpPr/>
+        <p:nvPr/>
+      </p:nvGrpSpPr>
+      <p:grpSpPr>
+        <a:xfrm>
+          <a:off x="0" y="0"/>
+          <a:ext cx="0" cy="0"/>
+          <a:chOff x="0" y="0"/>
+          <a:chExt cx="0" cy="0"/>
+        </a:xfrm>
+      </p:grpSpPr>
+      <p:sp useBgFill="1">
+        <p:nvSpPr>
+          <p:cNvPr id="20" name="Rectangle 19">
+            <a:extLst>
+              <a:ext uri="{FF2B5EF4-FFF2-40B4-BE49-F238E27FC236}">
+                <a16:creationId xmlns:a16="http://schemas.microsoft.com/office/drawing/2014/main" id="{DCC231C8-C761-4B31-9B1C-C6D19248C6B3}"/>
+              </a:ext>
+              <a:ext uri="{C183D7F6-B498-43B3-948B-1728B52AA6E4}">
+                <adec:decorative xmlns:adec="http://schemas.microsoft.com/office/drawing/2017/decorative" val="1"/>
+              </a:ext>
+            </a:extLst>
+          </p:cNvPr>
+          <p:cNvSpPr>
+            <a:spLocks noGrp="1" noRot="1" noChangeAspect="1" noMove="1" noResize="1" noEditPoints="1" noAdjustHandles="1" noChangeArrowheads="1" noChangeShapeType="1" noTextEdit="1"/>
+          </p:cNvSpPr>
+          <p:nvPr>
+            <p:extLst>
+              <p:ext uri="{386F3935-93C4-4BCD-93E2-E3B085C9AB24}">
+                <p16:designElem xmlns:p16="http://schemas.microsoft.com/office/powerpoint/2015/main" val="1"/>
+              </p:ext>
+            </p:extLst>
+          </p:nvPr>
+        </p:nvSpPr>
+        <p:spPr>
+          <a:xfrm>
+            <a:off x="-1" y="0"/>
+            <a:ext cx="12188952" cy="6858000"/>
+          </a:xfrm>
+          <a:prstGeom prst="rect">
+            <a:avLst/>
+          </a:prstGeom>
+          <a:ln>
+            <a:noFill/>
+          </a:ln>
+        </p:spPr>
+        <p:style>
+          <a:lnRef idx="2">
+            <a:schemeClr val="accent1">
+              <a:shade val="50000"/>
+            </a:schemeClr>
+          </a:lnRef>
+          <a:fillRef idx="1">
+            <a:schemeClr val="accent1"/>
+          </a:fillRef>
+          <a:effectRef idx="0">
+            <a:schemeClr val="accent1"/>
+          </a:effectRef>
+          <a:fontRef idx="minor">
+            <a:schemeClr val="lt1"/>
+          </a:fontRef>
+        </p:style>
+        <p:txBody>
+          <a:bodyPr rtlCol="0" anchor="ctr"/>
+          <a:lstStyle/>
+          <a:p>
+            <a:pPr algn="ctr"/>
+            <a:endParaRPr lang="en-US"/>
+          </a:p>
+        </p:txBody>
+      </p:sp>
+      <p:sp>
+        <p:nvSpPr>
+          <p:cNvPr id="5" name="Nadpis 4">
+            <a:extLst>
+              <a:ext uri="{FF2B5EF4-FFF2-40B4-BE49-F238E27FC236}">
+                <a16:creationId xmlns:a16="http://schemas.microsoft.com/office/drawing/2014/main" id="{38539CCF-AB13-831F-66A9-7CB081855473}"/>
+              </a:ext>
+            </a:extLst>
+          </p:cNvPr>
+          <p:cNvSpPr>
+            <a:spLocks noGrp="1"/>
+          </p:cNvSpPr>
+          <p:nvPr>
+            <p:ph type="title"/>
+          </p:nvPr>
+        </p:nvSpPr>
+        <p:spPr>
+          <a:xfrm>
+            <a:off x="838199" y="557190"/>
+            <a:ext cx="8944897" cy="1084798"/>
+          </a:xfrm>
+        </p:spPr>
+        <p:txBody>
+          <a:bodyPr>
+            <a:normAutofit/>
+          </a:bodyPr>
+          <a:lstStyle/>
+          <a:p>
+            <a:r>
+              <a:rPr lang="sk-SK" sz="5200" dirty="0"/>
+              <a:t>Diagramy ako kód</a:t>
+            </a:r>
+          </a:p>
+        </p:txBody>
+      </p:sp>
+      <p:sp>
+        <p:nvSpPr>
+          <p:cNvPr id="2" name="Zástupný objekt pre obsah 1">
+            <a:extLst>
+              <a:ext uri="{FF2B5EF4-FFF2-40B4-BE49-F238E27FC236}">
+                <a16:creationId xmlns:a16="http://schemas.microsoft.com/office/drawing/2014/main" id="{6B2997C3-D466-44BB-DA0F-C46008BEDDE0}"/>
+              </a:ext>
+            </a:extLst>
+          </p:cNvPr>
+          <p:cNvSpPr>
+            <a:spLocks noGrp="1"/>
+          </p:cNvSpPr>
+          <p:nvPr>
+            <p:ph idx="1"/>
+          </p:nvPr>
+        </p:nvSpPr>
+        <p:spPr>
+          <a:xfrm>
+            <a:off x="838200" y="2015613"/>
+            <a:ext cx="10515600" cy="4161350"/>
+          </a:xfrm>
+        </p:spPr>
+        <p:txBody>
+          <a:bodyPr>
+            <a:normAutofit/>
+          </a:bodyPr>
+          <a:lstStyle/>
+          <a:p>
+            <a:pPr lvl="0"/>
+            <a:r>
+              <a:rPr lang="sk-SK" dirty="0">
+                <a:solidFill>
+                  <a:srgbClr val="FF0000"/>
+                </a:solidFill>
+                <a:highlight>
+                  <a:srgbClr val="00FFFF"/>
+                </a:highlight>
+              </a:rPr>
+              <a:t>Vlastnosti:</a:t>
+            </a:r>
+            <a:endParaRPr lang="en-US" dirty="0">
+              <a:solidFill>
+                <a:srgbClr val="FF0000"/>
+              </a:solidFill>
+              <a:highlight>
+                <a:srgbClr val="00FFFF"/>
+              </a:highlight>
+            </a:endParaRPr>
+          </a:p>
+          <a:p>
+            <a:pPr lvl="1"/>
+            <a:r>
+              <a:rPr lang="sk-SK" sz="2800" dirty="0">
+                <a:solidFill>
+                  <a:srgbClr val="FF0000"/>
+                </a:solidFill>
+                <a:highlight>
+                  <a:srgbClr val="00FFFF"/>
+                </a:highlight>
+              </a:rPr>
+              <a:t>generované automaticky z textu</a:t>
+            </a:r>
+            <a:r>
+              <a:rPr lang="en-US" sz="2800" dirty="0">
+                <a:solidFill>
+                  <a:srgbClr val="FF0000"/>
+                </a:solidFill>
+                <a:highlight>
+                  <a:srgbClr val="00FFFF"/>
+                </a:highlight>
+              </a:rPr>
+              <a:t>, AI friendly</a:t>
+            </a:r>
+          </a:p>
+          <a:p>
+            <a:pPr lvl="1"/>
+            <a:r>
+              <a:rPr lang="sk-SK" sz="2800" dirty="0">
+                <a:solidFill>
+                  <a:srgbClr val="FF0000"/>
+                </a:solidFill>
+                <a:highlight>
+                  <a:srgbClr val="00FFFF"/>
+                </a:highlight>
+              </a:rPr>
+              <a:t>ľahšie sa udržiava aktuálny</a:t>
+            </a:r>
+            <a:endParaRPr lang="en-US" sz="2800" dirty="0">
+              <a:solidFill>
+                <a:srgbClr val="FF0000"/>
+              </a:solidFill>
+              <a:highlight>
+                <a:srgbClr val="00FFFF"/>
+              </a:highlight>
+            </a:endParaRPr>
+          </a:p>
+          <a:p>
+            <a:pPr lvl="0"/>
+            <a:r>
+              <a:rPr lang="sk-SK" dirty="0">
+                <a:solidFill>
+                  <a:srgbClr val="FF0000"/>
+                </a:solidFill>
+                <a:highlight>
+                  <a:srgbClr val="00FFFF"/>
+                </a:highlight>
+              </a:rPr>
+              <a:t>Nevýhody:</a:t>
+            </a:r>
+            <a:endParaRPr lang="en-US" dirty="0">
+              <a:solidFill>
+                <a:srgbClr val="FF0000"/>
+              </a:solidFill>
+              <a:highlight>
+                <a:srgbClr val="00FFFF"/>
+              </a:highlight>
+            </a:endParaRPr>
+          </a:p>
+          <a:p>
+            <a:pPr lvl="1"/>
+            <a:r>
+              <a:rPr lang="sk-SK" sz="2800" dirty="0">
+                <a:solidFill>
+                  <a:srgbClr val="FF0000"/>
+                </a:solidFill>
+                <a:highlight>
+                  <a:srgbClr val="00FFFF"/>
+                </a:highlight>
+              </a:rPr>
+              <a:t>musíte vedieť špecifickú syntax</a:t>
+            </a:r>
+            <a:endParaRPr lang="en-US" sz="2800" dirty="0">
+              <a:solidFill>
+                <a:srgbClr val="FF0000"/>
+              </a:solidFill>
+              <a:highlight>
+                <a:srgbClr val="00FFFF"/>
+              </a:highlight>
+            </a:endParaRPr>
+          </a:p>
+          <a:p>
+            <a:pPr lvl="1"/>
+            <a:r>
+              <a:rPr lang="sk-SK" sz="2800" dirty="0">
+                <a:solidFill>
+                  <a:srgbClr val="FF0000"/>
+                </a:solidFill>
+                <a:highlight>
+                  <a:srgbClr val="00FFFF"/>
+                </a:highlight>
+              </a:rPr>
+              <a:t>strata precíznej kontroly vizuálu</a:t>
+            </a:r>
+            <a:endParaRPr lang="en-US" sz="2800" dirty="0">
+              <a:solidFill>
+                <a:srgbClr val="FF0000"/>
+              </a:solidFill>
+              <a:highlight>
+                <a:srgbClr val="00FFFF"/>
+              </a:highlight>
+            </a:endParaRPr>
+          </a:p>
+        </p:txBody>
+      </p:sp>
+    </p:spTree>
+    <p:extLst>
+      <p:ext uri="{BB962C8B-B14F-4D97-AF65-F5344CB8AC3E}">
+        <p14:creationId xmlns:p14="http://schemas.microsoft.com/office/powerpoint/2010/main" val="4193598175"/>
+      </p:ext>
+    </p:extLst>
+  </p:cSld>
+  <p:clrMapOvr>
+    <a:masterClrMapping/>
+  </p:clrMapOvr>
+</p:sld>
+</file>
+
+<file path=ppt/slides/slide2.xml><?xml version="1.0" encoding="utf-8"?>
+<p:sld xmlns:a="http://schemas.openxmlformats.org/drawingml/2006/main" xmlns:r="http://schemas.openxmlformats.org/officeDocument/2006/relationships" xmlns:p="http://schemas.openxmlformats.org/presentationml/2006/main">
+  <p:cSld>
     <p:spTree>
       <p:nvGrpSpPr>
         <p:cNvPr id="1" name=""/>
@@ -7651,10 +4762,10 @@
       </p:grpSpPr>
       <p:sp>
         <p:nvSpPr>
-          <p:cNvPr id="2" name="Nadpis 1">
+          <p:cNvPr id="3" name="Zástupný objekt pre obsah 2">
             <a:extLst>
               <a:ext uri="{FF2B5EF4-FFF2-40B4-BE49-F238E27FC236}">
-                <a16:creationId xmlns:a16="http://schemas.microsoft.com/office/drawing/2014/main" id="{567B636F-49D8-D2C4-4307-6CC245DE0422}"/>
+                <a16:creationId xmlns:a16="http://schemas.microsoft.com/office/drawing/2014/main" id="{5588ED00-8EB1-B24E-FB3F-A5FB48C42353}"/>
               </a:ext>
             </a:extLst>
           </p:cNvPr>
@@ -7662,177 +4773,132 @@
             <a:spLocks noGrp="1"/>
           </p:cNvSpPr>
           <p:nvPr>
-            <p:ph type="title"/>
-          </p:nvPr>
-        </p:nvSpPr>
-        <p:spPr/>
+            <p:ph idx="1"/>
+          </p:nvPr>
+        </p:nvSpPr>
+        <p:spPr>
+          <a:xfrm>
+            <a:off x="838200" y="462116"/>
+            <a:ext cx="10515600" cy="5714847"/>
+          </a:xfrm>
+        </p:spPr>
         <p:txBody>
           <a:bodyPr>
             <a:normAutofit/>
           </a:bodyPr>
           <a:lstStyle/>
           <a:p>
-            <a:r>
-              <a:rPr lang="sk-SK" sz="4000" dirty="0"/>
-              <a:t>Príprava</a:t>
-            </a:r>
-          </a:p>
-        </p:txBody>
-      </p:sp>
-      <p:sp>
-        <p:nvSpPr>
-          <p:cNvPr id="3" name="Zástupný objekt pre obsah 2">
-            <a:extLst>
-              <a:ext uri="{FF2B5EF4-FFF2-40B4-BE49-F238E27FC236}">
-                <a16:creationId xmlns:a16="http://schemas.microsoft.com/office/drawing/2014/main" id="{86314C82-F9FF-4E38-48A5-676AC3CC2CAC}"/>
-              </a:ext>
-            </a:extLst>
-          </p:cNvPr>
-          <p:cNvSpPr>
-            <a:spLocks noGrp="1"/>
-          </p:cNvSpPr>
-          <p:nvPr>
-            <p:ph idx="1"/>
-          </p:nvPr>
-        </p:nvSpPr>
-        <p:spPr>
-          <a:xfrm>
-            <a:off x="5003800" y="1845734"/>
-            <a:ext cx="5283201" cy="4023360"/>
-          </a:xfrm>
-        </p:spPr>
-        <p:txBody>
-          <a:bodyPr>
-            <a:normAutofit/>
-          </a:bodyPr>
-          <a:lstStyle/>
-          <a:p>
             <a:pPr marL="0" indent="0">
               <a:buNone/>
             </a:pPr>
             <a:r>
-              <a:rPr lang="sk-SK" sz="2800" dirty="0"/>
-              <a:t>IDE </a:t>
-            </a:r>
-            <a:r>
-              <a:rPr lang="sk-SK" sz="2800" i="1" dirty="0"/>
-              <a:t>(</a:t>
-            </a:r>
-            <a:r>
-              <a:rPr lang="sk-SK" sz="2800" i="1" dirty="0" err="1"/>
-              <a:t>Integrated</a:t>
-            </a:r>
-            <a:r>
-              <a:rPr lang="sk-SK" sz="2800" i="1" dirty="0"/>
-              <a:t> </a:t>
-            </a:r>
-            <a:r>
-              <a:rPr lang="sk-SK" sz="2800" i="1" dirty="0" err="1"/>
-              <a:t>Development</a:t>
-            </a:r>
-            <a:r>
-              <a:rPr lang="sk-SK" sz="2800" i="1" dirty="0"/>
-              <a:t> </a:t>
-            </a:r>
-            <a:r>
-              <a:rPr lang="sk-SK" sz="2800" i="1" dirty="0" err="1"/>
-              <a:t>Environment</a:t>
-            </a:r>
-            <a:r>
-              <a:rPr lang="sk-SK" sz="2800" i="1" dirty="0"/>
-              <a:t>)</a:t>
-            </a:r>
-            <a:r>
-              <a:rPr lang="sk-SK" sz="2800" dirty="0"/>
-              <a:t>:</a:t>
+              <a:rPr lang="sk-SK" sz="4000" dirty="0">
+                <a:latin typeface="+mj-lt"/>
+              </a:rPr>
+              <a:t>Základné pokyny:</a:t>
             </a:r>
           </a:p>
           <a:p>
             <a:pPr lvl="1"/>
             <a:r>
-              <a:rPr lang="sk-SK" sz="2800" dirty="0"/>
-              <a:t>vývojové prostredie</a:t>
+              <a:rPr lang="sk-SK" sz="2800">
+                <a:latin typeface="+mj-lt"/>
+              </a:rPr>
+              <a:t>Dodržiavať </a:t>
+            </a:r>
+            <a:r>
+              <a:rPr lang="sk-SK" sz="2800" dirty="0">
+                <a:latin typeface="+mj-lt"/>
+              </a:rPr>
+              <a:t>školský poriadok</a:t>
             </a:r>
           </a:p>
           <a:p>
             <a:pPr lvl="1"/>
             <a:r>
-              <a:rPr lang="sk-SK" sz="2800" dirty="0"/>
-              <a:t>uľahčuje programovanie</a:t>
+              <a:rPr lang="sk-SK" sz="2800" dirty="0">
+                <a:latin typeface="+mj-lt"/>
+              </a:rPr>
+              <a:t>Pripravený na hodinu, zošit a notebook</a:t>
             </a:r>
           </a:p>
           <a:p>
             <a:pPr lvl="1"/>
             <a:r>
-              <a:rPr lang="sk-SK" sz="2800" b="1" dirty="0" err="1"/>
-              <a:t>IntelliJ</a:t>
-            </a:r>
-            <a:r>
-              <a:rPr lang="sk-SK" sz="2800" b="1" dirty="0"/>
-              <a:t> IDEA</a:t>
-            </a:r>
-            <a:br>
-              <a:rPr lang="sk-SK" sz="2800" b="1" dirty="0"/>
-            </a:br>
-            <a:endParaRPr lang="sk-SK" sz="2800" b="1" dirty="0"/>
+              <a:rPr lang="sk-SK" sz="2800" dirty="0">
+                <a:latin typeface="+mj-lt"/>
+              </a:rPr>
+              <a:t>Ústne, praktické a písomné skúšania</a:t>
+            </a:r>
+          </a:p>
+          <a:p>
+            <a:pPr lvl="1"/>
+            <a:r>
+              <a:rPr lang="sk-SK" sz="2800" dirty="0">
+                <a:latin typeface="+mj-lt"/>
+              </a:rPr>
+              <a:t>Ospravedlnenia pred začiatkom hodiny</a:t>
+            </a:r>
+          </a:p>
+          <a:p>
+            <a:endParaRPr lang="sk-SK" dirty="0">
+              <a:latin typeface="+mj-lt"/>
+            </a:endParaRPr>
           </a:p>
           <a:p>
             <a:pPr marL="0" indent="0">
               <a:buNone/>
             </a:pPr>
             <a:r>
+              <a:rPr lang="sk-SK" sz="4000" dirty="0">
+                <a:latin typeface="+mj-lt"/>
+              </a:rPr>
+              <a:t>Legenda:</a:t>
+            </a:r>
+          </a:p>
+          <a:p>
+            <a:pPr lvl="1"/>
+            <a:r>
               <a:rPr lang="sk-SK" sz="2800" dirty="0">
-                <a:hlinkClick r:id="rId2"/>
+                <a:highlight>
+                  <a:srgbClr val="FFFF00"/>
+                </a:highlight>
+                <a:latin typeface="Consolas" panose="020B0609020204030204" pitchFamily="49" charset="0"/>
               </a:rPr>
-              <a:t>https://www.jetbrains.com/idea/</a:t>
-            </a:r>
-            <a:r>
-              <a:rPr lang="sk-SK" sz="2800" dirty="0"/>
-              <a:t> </a:t>
-            </a:r>
-          </a:p>
-        </p:txBody>
-      </p:sp>
-      <p:pic>
-        <p:nvPicPr>
-          <p:cNvPr id="10" name="Grafický objekt 9">
-            <a:extLst>
-              <a:ext uri="{FF2B5EF4-FFF2-40B4-BE49-F238E27FC236}">
-                <a16:creationId xmlns:a16="http://schemas.microsoft.com/office/drawing/2014/main" id="{40D4C8E0-A393-AE62-758B-299BA76CCBCF}"/>
-              </a:ext>
-            </a:extLst>
-          </p:cNvPr>
-          <p:cNvPicPr>
-            <a:picLocks noChangeAspect="1"/>
-          </p:cNvPicPr>
-          <p:nvPr/>
-        </p:nvPicPr>
-        <p:blipFill>
-          <a:blip r:embed="rId3">
-            <a:extLst>
-              <a:ext uri="{96DAC541-7B7A-43D3-8B79-37D633B846F1}">
-                <asvg:svgBlip xmlns:asvg="http://schemas.microsoft.com/office/drawing/2016/SVG/main" r:embed="rId4"/>
-              </a:ext>
-            </a:extLst>
-          </a:blip>
-          <a:stretch>
-            <a:fillRect/>
-          </a:stretch>
-        </p:blipFill>
-        <p:spPr>
-          <a:xfrm>
-            <a:off x="2331325" y="2491201"/>
-            <a:ext cx="2321247" cy="2321247"/>
-          </a:xfrm>
-          <a:prstGeom prst="rect">
-            <a:avLst/>
-          </a:prstGeom>
-        </p:spPr>
-      </p:pic>
+              <a:t>Žltý text – kód</a:t>
+            </a:r>
+          </a:p>
+          <a:p>
+            <a:pPr lvl="1"/>
+            <a:r>
+              <a:rPr lang="sk-SK" sz="2800" dirty="0">
+                <a:solidFill>
+                  <a:srgbClr val="FF0000"/>
+                </a:solidFill>
+              </a:rPr>
+              <a:t>Červený text – poznámka do zošita</a:t>
+            </a:r>
+          </a:p>
+          <a:p>
+            <a:pPr lvl="1"/>
+            <a:r>
+              <a:rPr lang="sk-SK" sz="2800" dirty="0">
+                <a:solidFill>
+                  <a:srgbClr val="FF0000"/>
+                </a:solidFill>
+                <a:highlight>
+                  <a:srgbClr val="00FFFF"/>
+                </a:highlight>
+              </a:rPr>
+              <a:t>Modré pozadie – poznámka do zošita</a:t>
+            </a:r>
+          </a:p>
+        </p:txBody>
+      </p:sp>
     </p:spTree>
     <p:extLst>
       <p:ext uri="{BB962C8B-B14F-4D97-AF65-F5344CB8AC3E}">
-        <p14:creationId xmlns:p14="http://schemas.microsoft.com/office/powerpoint/2010/main" val="3869664095"/>
+        <p14:creationId xmlns:p14="http://schemas.microsoft.com/office/powerpoint/2010/main" val="1374612892"/>
       </p:ext>
     </p:extLst>
   </p:cSld>
@@ -7842,303 +4908,7 @@
 </p:sld>
 </file>
 
-<file path=ppt/slides/slide5.xml><?xml version="1.0" encoding="utf-8"?>
-<p:sld xmlns:a="http://schemas.openxmlformats.org/drawingml/2006/main" xmlns:r="http://schemas.openxmlformats.org/officeDocument/2006/relationships" xmlns:p="http://schemas.openxmlformats.org/presentationml/2006/main">
-  <p:cSld>
-    <p:bg>
-      <p:bgPr>
-        <a:solidFill>
-          <a:schemeClr val="bg1"/>
-        </a:solidFill>
-        <a:effectLst/>
-      </p:bgPr>
-    </p:bg>
-    <p:spTree>
-      <p:nvGrpSpPr>
-        <p:cNvPr id="1" name=""/>
-        <p:cNvGrpSpPr/>
-        <p:nvPr/>
-      </p:nvGrpSpPr>
-      <p:grpSpPr>
-        <a:xfrm>
-          <a:off x="0" y="0"/>
-          <a:ext cx="0" cy="0"/>
-          <a:chOff x="0" y="0"/>
-          <a:chExt cx="0" cy="0"/>
-        </a:xfrm>
-      </p:grpSpPr>
-      <p:sp>
-        <p:nvSpPr>
-          <p:cNvPr id="2" name="Nadpis 1">
-            <a:extLst>
-              <a:ext uri="{FF2B5EF4-FFF2-40B4-BE49-F238E27FC236}">
-                <a16:creationId xmlns:a16="http://schemas.microsoft.com/office/drawing/2014/main" id="{5FF8DDDD-602A-49D6-516A-F20B2D6C95AA}"/>
-              </a:ext>
-            </a:extLst>
-          </p:cNvPr>
-          <p:cNvSpPr>
-            <a:spLocks noGrp="1"/>
-          </p:cNvSpPr>
-          <p:nvPr>
-            <p:ph type="title"/>
-          </p:nvPr>
-        </p:nvSpPr>
-        <p:spPr>
-          <a:xfrm>
-            <a:off x="6332764" y="634947"/>
-            <a:ext cx="4335237" cy="1450757"/>
-          </a:xfrm>
-        </p:spPr>
-        <p:txBody>
-          <a:bodyPr>
-            <a:normAutofit/>
-          </a:bodyPr>
-          <a:lstStyle/>
-          <a:p>
-            <a:r>
-              <a:rPr lang="sk-SK" sz="4000" dirty="0"/>
-              <a:t>Úvod do diagramov</a:t>
-            </a:r>
-          </a:p>
-        </p:txBody>
-      </p:sp>
-      <p:sp>
-        <p:nvSpPr>
-          <p:cNvPr id="3" name="Zástupný objekt pre obsah 2">
-            <a:extLst>
-              <a:ext uri="{FF2B5EF4-FFF2-40B4-BE49-F238E27FC236}">
-                <a16:creationId xmlns:a16="http://schemas.microsoft.com/office/drawing/2014/main" id="{A917812E-278F-AFE9-9096-48501F591F65}"/>
-              </a:ext>
-            </a:extLst>
-          </p:cNvPr>
-          <p:cNvSpPr>
-            <a:spLocks noGrp="1"/>
-          </p:cNvSpPr>
-          <p:nvPr>
-            <p:ph idx="1"/>
-          </p:nvPr>
-        </p:nvSpPr>
-        <p:spPr>
-          <a:xfrm>
-            <a:off x="6332764" y="2198914"/>
-            <a:ext cx="3845379" cy="3670180"/>
-          </a:xfrm>
-        </p:spPr>
-        <p:txBody>
-          <a:bodyPr>
-            <a:normAutofit/>
-          </a:bodyPr>
-          <a:lstStyle/>
-          <a:p>
-            <a:pPr marL="0" indent="0">
-              <a:buNone/>
-            </a:pPr>
-            <a:r>
-              <a:rPr lang="sk-SK" sz="2800" dirty="0"/>
-              <a:t>Vývojový diagram znázorňuje kroky procesu alebo algoritmu. </a:t>
-            </a:r>
-          </a:p>
-          <a:p>
-            <a:pPr marL="0" indent="0">
-              <a:buNone/>
-            </a:pPr>
-            <a:r>
-              <a:rPr lang="sk-SK" sz="2800" dirty="0"/>
-              <a:t>V praxi sa používa v zjednodušenej forme. Dopĺňa iné typy diagramov.</a:t>
-            </a:r>
-          </a:p>
-          <a:p>
-            <a:endParaRPr lang="sk-SK" dirty="0"/>
-          </a:p>
-        </p:txBody>
-      </p:sp>
-      <p:pic>
-        <p:nvPicPr>
-          <p:cNvPr id="7" name="Obrázok 6" descr="Obrázok, na ktorom je diagram, text, plán, rad&#10;&#10;Obsah vygenerovaný pomocou AI môže byť nesprávny.">
-            <a:extLst>
-              <a:ext uri="{FF2B5EF4-FFF2-40B4-BE49-F238E27FC236}">
-                <a16:creationId xmlns:a16="http://schemas.microsoft.com/office/drawing/2014/main" id="{BA289351-BF4C-46CA-0123-41BB3D27CC48}"/>
-              </a:ext>
-            </a:extLst>
-          </p:cNvPr>
-          <p:cNvPicPr>
-            <a:picLocks noChangeAspect="1"/>
-          </p:cNvPicPr>
-          <p:nvPr/>
-        </p:nvPicPr>
-        <p:blipFill>
-          <a:blip r:embed="rId2">
-            <a:extLst>
-              <a:ext uri="{28A0092B-C50C-407E-A947-70E740481C1C}">
-                <a14:useLocalDpi xmlns:a14="http://schemas.microsoft.com/office/drawing/2010/main" val="0"/>
-              </a:ext>
-            </a:extLst>
-          </a:blip>
-          <a:srcRect r="66163"/>
-          <a:stretch>
-            <a:fillRect/>
-          </a:stretch>
-        </p:blipFill>
-        <p:spPr>
-          <a:xfrm>
-            <a:off x="2006394" y="776741"/>
-            <a:ext cx="4088720" cy="4984476"/>
-          </a:xfrm>
-          <a:prstGeom prst="rect">
-            <a:avLst/>
-          </a:prstGeom>
-        </p:spPr>
-      </p:pic>
-    </p:spTree>
-    <p:extLst>
-      <p:ext uri="{BB962C8B-B14F-4D97-AF65-F5344CB8AC3E}">
-        <p14:creationId xmlns:p14="http://schemas.microsoft.com/office/powerpoint/2010/main" val="1645311580"/>
-      </p:ext>
-    </p:extLst>
-  </p:cSld>
-  <p:clrMapOvr>
-    <a:masterClrMapping/>
-  </p:clrMapOvr>
-</p:sld>
-</file>
-
-<file path=ppt/slides/slide6.xml><?xml version="1.0" encoding="utf-8"?>
-<p:sld xmlns:a="http://schemas.openxmlformats.org/drawingml/2006/main" xmlns:r="http://schemas.openxmlformats.org/officeDocument/2006/relationships" xmlns:p="http://schemas.openxmlformats.org/presentationml/2006/main" showMasterSp="0">
-  <p:cSld>
-    <p:bg>
-      <p:bgPr>
-        <a:solidFill>
-          <a:schemeClr val="bg1"/>
-        </a:solidFill>
-        <a:effectLst/>
-      </p:bgPr>
-    </p:bg>
-    <p:spTree>
-      <p:nvGrpSpPr>
-        <p:cNvPr id="1" name=""/>
-        <p:cNvGrpSpPr/>
-        <p:nvPr/>
-      </p:nvGrpSpPr>
-      <p:grpSpPr>
-        <a:xfrm>
-          <a:off x="0" y="0"/>
-          <a:ext cx="0" cy="0"/>
-          <a:chOff x="0" y="0"/>
-          <a:chExt cx="0" cy="0"/>
-        </a:xfrm>
-      </p:grpSpPr>
-      <p:pic>
-        <p:nvPicPr>
-          <p:cNvPr id="5" name="Obrázok 4">
-            <a:extLst>
-              <a:ext uri="{FF2B5EF4-FFF2-40B4-BE49-F238E27FC236}">
-                <a16:creationId xmlns:a16="http://schemas.microsoft.com/office/drawing/2014/main" id="{E1AC7644-4857-7889-92EC-DD7E3E4BFB04}"/>
-              </a:ext>
-            </a:extLst>
-          </p:cNvPr>
-          <p:cNvPicPr>
-            <a:picLocks noChangeAspect="1"/>
-          </p:cNvPicPr>
-          <p:nvPr/>
-        </p:nvPicPr>
-        <p:blipFill>
-          <a:blip r:embed="rId2"/>
-          <a:stretch>
-            <a:fillRect/>
-          </a:stretch>
-        </p:blipFill>
-        <p:spPr>
-          <a:xfrm>
-            <a:off x="1979501" y="131838"/>
-            <a:ext cx="8285729" cy="6670012"/>
-          </a:xfrm>
-          <a:prstGeom prst="rect">
-            <a:avLst/>
-          </a:prstGeom>
-        </p:spPr>
-      </p:pic>
-    </p:spTree>
-    <p:extLst>
-      <p:ext uri="{BB962C8B-B14F-4D97-AF65-F5344CB8AC3E}">
-        <p14:creationId xmlns:p14="http://schemas.microsoft.com/office/powerpoint/2010/main" val="728232550"/>
-      </p:ext>
-    </p:extLst>
-  </p:cSld>
-  <p:clrMapOvr>
-    <a:masterClrMapping/>
-  </p:clrMapOvr>
-</p:sld>
-</file>
-
-<file path=ppt/slides/slide7.xml><?xml version="1.0" encoding="utf-8"?>
-<p:sld xmlns:a="http://schemas.openxmlformats.org/drawingml/2006/main" xmlns:r="http://schemas.openxmlformats.org/officeDocument/2006/relationships" xmlns:p="http://schemas.openxmlformats.org/presentationml/2006/main">
-  <p:cSld>
-    <p:bg>
-      <p:bgPr>
-        <a:solidFill>
-          <a:schemeClr val="bg1"/>
-        </a:solidFill>
-        <a:effectLst/>
-      </p:bgPr>
-    </p:bg>
-    <p:spTree>
-      <p:nvGrpSpPr>
-        <p:cNvPr id="1" name=""/>
-        <p:cNvGrpSpPr/>
-        <p:nvPr/>
-      </p:nvGrpSpPr>
-      <p:grpSpPr>
-        <a:xfrm>
-          <a:off x="0" y="0"/>
-          <a:ext cx="0" cy="0"/>
-          <a:chOff x="0" y="0"/>
-          <a:chExt cx="0" cy="0"/>
-        </a:xfrm>
-      </p:grpSpPr>
-      <p:pic>
-        <p:nvPicPr>
-          <p:cNvPr id="5" name="Obrázok 4">
-            <a:extLst>
-              <a:ext uri="{FF2B5EF4-FFF2-40B4-BE49-F238E27FC236}">
-                <a16:creationId xmlns:a16="http://schemas.microsoft.com/office/drawing/2014/main" id="{DA4B8403-0096-2FD4-42D8-F86B5B9428B5}"/>
-              </a:ext>
-            </a:extLst>
-          </p:cNvPr>
-          <p:cNvPicPr>
-            <a:picLocks noChangeAspect="1"/>
-          </p:cNvPicPr>
-          <p:nvPr/>
-        </p:nvPicPr>
-        <p:blipFill>
-          <a:blip r:embed="rId2"/>
-          <a:stretch>
-            <a:fillRect/>
-          </a:stretch>
-        </p:blipFill>
-        <p:spPr>
-          <a:xfrm>
-            <a:off x="2111829" y="52416"/>
-            <a:ext cx="8001000" cy="6780848"/>
-          </a:xfrm>
-          <a:prstGeom prst="rect">
-            <a:avLst/>
-          </a:prstGeom>
-        </p:spPr>
-      </p:pic>
-    </p:spTree>
-    <p:extLst>
-      <p:ext uri="{BB962C8B-B14F-4D97-AF65-F5344CB8AC3E}">
-        <p14:creationId xmlns:p14="http://schemas.microsoft.com/office/powerpoint/2010/main" val="4184874068"/>
-      </p:ext>
-    </p:extLst>
-  </p:cSld>
-  <p:clrMapOvr>
-    <a:masterClrMapping/>
-  </p:clrMapOvr>
-</p:sld>
-</file>
-
-<file path=ppt/slides/slide8.xml><?xml version="1.0" encoding="utf-8"?>
+<file path=ppt/slides/slide3.xml><?xml version="1.0" encoding="utf-8"?>
 <p:sld xmlns:a="http://schemas.openxmlformats.org/drawingml/2006/main" xmlns:r="http://schemas.openxmlformats.org/officeDocument/2006/relationships" xmlns:p="http://schemas.openxmlformats.org/presentationml/2006/main">
   <p:cSld>
     <p:bg>
@@ -8544,7 +5314,7 @@
           <p:cNvPr id="2" name="Nadpis 1">
             <a:extLst>
               <a:ext uri="{FF2B5EF4-FFF2-40B4-BE49-F238E27FC236}">
-                <a16:creationId xmlns:a16="http://schemas.microsoft.com/office/drawing/2014/main" id="{DFC83381-CAF0-FCB2-EBA8-B78020AF4E6F}"/>
+                <a16:creationId xmlns:a16="http://schemas.microsoft.com/office/drawing/2014/main" id="{B3680000-8E97-7BCD-0373-6D09E72013D1}"/>
               </a:ext>
             </a:extLst>
           </p:cNvPr>
@@ -8570,7 +5340,14 @@
             <a:pPr algn="r"/>
             <a:r>
               <a:rPr lang="sk-SK" sz="4000" dirty="0"/>
-              <a:t>Diagramy ako kód</a:t>
+              <a:t>OPG  </a:t>
+            </a:r>
+            <a:br>
+              <a:rPr lang="sk-SK" sz="4000" dirty="0"/>
+            </a:br>
+            <a:r>
+              <a:rPr lang="sk-SK" sz="4000" dirty="0"/>
+              <a:t>Cvičenie 1</a:t>
             </a:r>
           </a:p>
         </p:txBody>
@@ -8635,7 +5412,7 @@
           <p:cNvPr id="3" name="Zástupný objekt pre obsah 2">
             <a:extLst>
               <a:ext uri="{FF2B5EF4-FFF2-40B4-BE49-F238E27FC236}">
-                <a16:creationId xmlns:a16="http://schemas.microsoft.com/office/drawing/2014/main" id="{33C65C32-1305-CFFD-8C8E-396D551DD2B3}"/>
+                <a16:creationId xmlns:a16="http://schemas.microsoft.com/office/drawing/2014/main" id="{19A88E58-5472-E350-E606-D7A492AB529E}"/>
               </a:ext>
             </a:extLst>
           </p:cNvPr>
@@ -8658,51 +5435,54 @@
           </a:bodyPr>
           <a:lstStyle/>
           <a:p>
-            <a:pPr marL="0" indent="0">
-              <a:buNone/>
+            <a:pPr marL="514350" indent="-514350">
+              <a:buFont typeface="+mj-lt"/>
+              <a:buAutoNum type="arabicPeriod"/>
             </a:pPr>
             <a:r>
-              <a:rPr lang="sk-SK" i="1" dirty="0"/>
-              <a:t>"Diagram as </a:t>
-            </a:r>
-            <a:r>
-              <a:rPr lang="sk-SK" i="1" dirty="0" err="1"/>
-              <a:t>Code</a:t>
-            </a:r>
-            <a:r>
-              <a:rPr lang="sk-SK" i="1" dirty="0"/>
-              <a:t>" </a:t>
-            </a:r>
-            <a:r>
               <a:rPr lang="sk-SK" dirty="0"/>
-              <a:t>alebo </a:t>
-            </a:r>
-            <a:r>
-              <a:rPr lang="sk-SK" i="1" dirty="0" err="1"/>
-              <a:t>DaC</a:t>
-            </a:r>
+              <a:t>Inštalácia JDK</a:t>
+            </a:r>
+          </a:p>
+          <a:p>
+            <a:pPr marL="514350" indent="-514350">
+              <a:buFont typeface="+mj-lt"/>
+              <a:buAutoNum type="arabicPeriod"/>
+            </a:pPr>
             <a:r>
               <a:rPr lang="sk-SK" dirty="0"/>
-              <a:t> sú diagramy vo forme textu. Vieme ich dať do dokumentácie alebo zdrojového kódu. </a:t>
-            </a:r>
-          </a:p>
-          <a:p>
-            <a:pPr marL="0" indent="0">
-              <a:buNone/>
+              <a:t>Inštalácia IDE</a:t>
+            </a:r>
+          </a:p>
+          <a:p>
+            <a:pPr marL="514350" indent="-514350">
+              <a:buFont typeface="+mj-lt"/>
+              <a:buAutoNum type="arabicPeriod"/>
             </a:pPr>
             <a:r>
               <a:rPr lang="sk-SK" dirty="0"/>
-              <a:t>Používame nástroj </a:t>
-            </a:r>
-            <a:r>
-              <a:rPr lang="sk-SK" dirty="0">
-                <a:hlinkClick r:id="rId2"/>
-              </a:rPr>
-              <a:t>http://mermaid.live</a:t>
-            </a:r>
-            <a:endParaRPr lang="sk-SK" dirty="0"/>
-          </a:p>
-          <a:p>
+              <a:t>Vývojový diagram</a:t>
+            </a:r>
+          </a:p>
+          <a:p>
+            <a:pPr marL="514350" indent="-514350">
+              <a:buFont typeface="+mj-lt"/>
+              <a:buAutoNum type="arabicPeriod"/>
+            </a:pPr>
+            <a:r>
+              <a:rPr lang="sk-SK" dirty="0"/>
+              <a:t>Diagramy ako kód</a:t>
+            </a:r>
+          </a:p>
+          <a:p>
+            <a:pPr marL="514350" indent="-514350">
+              <a:buFont typeface="+mj-lt"/>
+              <a:buAutoNum type="arabicPeriod"/>
+            </a:pPr>
+            <a:r>
+              <a:rPr lang="sk-SK" dirty="0" err="1"/>
+              <a:t>Pseudokód</a:t>
+            </a:r>
             <a:endParaRPr lang="sk-SK" dirty="0"/>
           </a:p>
         </p:txBody>
@@ -8710,7 +5490,805 @@
     </p:spTree>
     <p:extLst>
       <p:ext uri="{BB962C8B-B14F-4D97-AF65-F5344CB8AC3E}">
-        <p14:creationId xmlns:p14="http://schemas.microsoft.com/office/powerpoint/2010/main" val="1230554443"/>
+        <p14:creationId xmlns:p14="http://schemas.microsoft.com/office/powerpoint/2010/main" val="2991288343"/>
+      </p:ext>
+    </p:extLst>
+  </p:cSld>
+  <p:clrMapOvr>
+    <a:masterClrMapping/>
+  </p:clrMapOvr>
+</p:sld>
+</file>
+
+<file path=ppt/slides/slide4.xml><?xml version="1.0" encoding="utf-8"?>
+<p:sld xmlns:a="http://schemas.openxmlformats.org/drawingml/2006/main" xmlns:r="http://schemas.openxmlformats.org/officeDocument/2006/relationships" xmlns:p="http://schemas.openxmlformats.org/presentationml/2006/main">
+  <p:cSld>
+    <p:bg>
+      <p:bgPr>
+        <a:solidFill>
+          <a:schemeClr val="bg1"/>
+        </a:solidFill>
+        <a:effectLst/>
+      </p:bgPr>
+    </p:bg>
+    <p:spTree>
+      <p:nvGrpSpPr>
+        <p:cNvPr id="1" name=""/>
+        <p:cNvGrpSpPr/>
+        <p:nvPr/>
+      </p:nvGrpSpPr>
+      <p:grpSpPr>
+        <a:xfrm>
+          <a:off x="0" y="0"/>
+          <a:ext cx="0" cy="0"/>
+          <a:chOff x="0" y="0"/>
+          <a:chExt cx="0" cy="0"/>
+        </a:xfrm>
+      </p:grpSpPr>
+      <p:sp>
+        <p:nvSpPr>
+          <p:cNvPr id="2" name="Nadpis 1">
+            <a:extLst>
+              <a:ext uri="{FF2B5EF4-FFF2-40B4-BE49-F238E27FC236}">
+                <a16:creationId xmlns:a16="http://schemas.microsoft.com/office/drawing/2014/main" id="{46D5FFFD-949C-5777-368D-7616CC67C53B}"/>
+              </a:ext>
+            </a:extLst>
+          </p:cNvPr>
+          <p:cNvSpPr>
+            <a:spLocks noGrp="1"/>
+          </p:cNvSpPr>
+          <p:nvPr>
+            <p:ph type="title"/>
+          </p:nvPr>
+        </p:nvSpPr>
+        <p:spPr/>
+        <p:txBody>
+          <a:bodyPr>
+            <a:normAutofit/>
+          </a:bodyPr>
+          <a:lstStyle/>
+          <a:p>
+            <a:r>
+              <a:rPr lang="en-US" sz="4000" b="1" dirty="0">
+                <a:highlight>
+                  <a:srgbClr val="00FFFF"/>
+                </a:highlight>
+              </a:rPr>
+              <a:t>Java</a:t>
+            </a:r>
+            <a:endParaRPr lang="sk-SK" sz="4000" b="1" dirty="0">
+              <a:highlight>
+                <a:srgbClr val="00FFFF"/>
+              </a:highlight>
+            </a:endParaRPr>
+          </a:p>
+        </p:txBody>
+      </p:sp>
+      <p:sp>
+        <p:nvSpPr>
+          <p:cNvPr id="3" name="Zástupný objekt pre obsah 2">
+            <a:extLst>
+              <a:ext uri="{FF2B5EF4-FFF2-40B4-BE49-F238E27FC236}">
+                <a16:creationId xmlns:a16="http://schemas.microsoft.com/office/drawing/2014/main" id="{F834EA18-2911-E0AA-A6B4-7AC44110B2A1}"/>
+              </a:ext>
+            </a:extLst>
+          </p:cNvPr>
+          <p:cNvSpPr>
+            <a:spLocks noGrp="1"/>
+          </p:cNvSpPr>
+          <p:nvPr>
+            <p:ph idx="1"/>
+          </p:nvPr>
+        </p:nvSpPr>
+        <p:spPr>
+          <a:xfrm>
+            <a:off x="838200" y="1845734"/>
+            <a:ext cx="10970342" cy="4217609"/>
+          </a:xfrm>
+        </p:spPr>
+        <p:txBody>
+          <a:bodyPr>
+            <a:normAutofit/>
+          </a:bodyPr>
+          <a:lstStyle/>
+          <a:p>
+            <a:pPr marL="0" indent="0">
+              <a:buNone/>
+            </a:pPr>
+            <a:r>
+              <a:rPr lang="fr-FR" sz="3000" dirty="0">
+                <a:solidFill>
+                  <a:srgbClr val="FF0000"/>
+                </a:solidFill>
+                <a:highlight>
+                  <a:srgbClr val="00FFFF"/>
+                </a:highlight>
+              </a:rPr>
+              <a:t>JRE - </a:t>
+            </a:r>
+            <a:r>
+              <a:rPr lang="fr-FR" sz="3000" b="1" dirty="0">
+                <a:solidFill>
+                  <a:srgbClr val="FF0000"/>
+                </a:solidFill>
+                <a:highlight>
+                  <a:srgbClr val="00FFFF"/>
+                </a:highlight>
+              </a:rPr>
+              <a:t>Java Runtime Environment </a:t>
+            </a:r>
+            <a:r>
+              <a:rPr lang="fr-FR" sz="3000" dirty="0">
+                <a:solidFill>
+                  <a:srgbClr val="FF0000"/>
+                </a:solidFill>
+                <a:highlight>
+                  <a:srgbClr val="00FFFF"/>
+                </a:highlight>
+              </a:rPr>
+              <a:t>- na spúšťanie Java programov</a:t>
+            </a:r>
+          </a:p>
+          <a:p>
+            <a:pPr marL="0" indent="0">
+              <a:buNone/>
+            </a:pPr>
+            <a:r>
+              <a:rPr lang="fr-FR" sz="3000" dirty="0">
+                <a:solidFill>
+                  <a:srgbClr val="FF0000"/>
+                </a:solidFill>
+                <a:highlight>
+                  <a:srgbClr val="00FFFF"/>
+                </a:highlight>
+              </a:rPr>
+              <a:t>JDK - </a:t>
+            </a:r>
+            <a:r>
+              <a:rPr lang="fr-FR" sz="3000" b="1" dirty="0">
+                <a:solidFill>
+                  <a:srgbClr val="FF0000"/>
+                </a:solidFill>
+                <a:highlight>
+                  <a:srgbClr val="00FFFF"/>
+                </a:highlight>
+              </a:rPr>
+              <a:t>Java Development Kit </a:t>
+            </a:r>
+            <a:r>
+              <a:rPr lang="fr-FR" sz="3000" dirty="0">
+                <a:solidFill>
+                  <a:srgbClr val="FF0000"/>
+                </a:solidFill>
+                <a:highlight>
+                  <a:srgbClr val="00FFFF"/>
+                </a:highlight>
+              </a:rPr>
+              <a:t>- na programovanie</a:t>
+            </a:r>
+          </a:p>
+          <a:p>
+            <a:pPr marL="0" indent="0">
+              <a:buNone/>
+            </a:pPr>
+            <a:endParaRPr lang="fr-FR" sz="3000" dirty="0">
+              <a:solidFill>
+                <a:srgbClr val="FF0000"/>
+              </a:solidFill>
+              <a:highlight>
+                <a:srgbClr val="00FFFF"/>
+              </a:highlight>
+            </a:endParaRPr>
+          </a:p>
+          <a:p>
+            <a:pPr marL="0" indent="0">
+              <a:buNone/>
+            </a:pPr>
+            <a:r>
+              <a:rPr lang="fr-FR" sz="3000" dirty="0">
+                <a:solidFill>
+                  <a:srgbClr val="FF0000"/>
+                </a:solidFill>
+                <a:highlight>
+                  <a:srgbClr val="00FFFF"/>
+                </a:highlight>
+              </a:rPr>
+              <a:t>nová verzia každých 6m, stabilné sú 17, 21 a 25</a:t>
+            </a:r>
+          </a:p>
+          <a:p>
+            <a:pPr marL="0" indent="0">
+              <a:buNone/>
+            </a:pPr>
+            <a:r>
+              <a:rPr lang="fr-FR" sz="3000" dirty="0">
+                <a:solidFill>
+                  <a:srgbClr val="FF0000"/>
+                </a:solidFill>
+                <a:highlight>
+                  <a:srgbClr val="FFFF00"/>
+                </a:highlight>
+                <a:latin typeface="Consolas" panose="020B0609020204030204" pitchFamily="49" charset="0"/>
+              </a:rPr>
+              <a:t>java --version</a:t>
+            </a:r>
+            <a:endParaRPr lang="sk-SK" sz="2600" dirty="0">
+              <a:solidFill>
+                <a:srgbClr val="FF0000"/>
+              </a:solidFill>
+              <a:highlight>
+                <a:srgbClr val="FFFF00"/>
+              </a:highlight>
+              <a:latin typeface="Consolas" panose="020B0609020204030204" pitchFamily="49" charset="0"/>
+            </a:endParaRPr>
+          </a:p>
+        </p:txBody>
+      </p:sp>
+      <p:pic>
+        <p:nvPicPr>
+          <p:cNvPr id="5" name="Grafický objekt 4">
+            <a:extLst>
+              <a:ext uri="{FF2B5EF4-FFF2-40B4-BE49-F238E27FC236}">
+                <a16:creationId xmlns:a16="http://schemas.microsoft.com/office/drawing/2014/main" id="{FBD4D2E2-AB48-3A75-D1E3-1F682472EAEF}"/>
+              </a:ext>
+            </a:extLst>
+          </p:cNvPr>
+          <p:cNvPicPr>
+            <a:picLocks noChangeAspect="1"/>
+          </p:cNvPicPr>
+          <p:nvPr/>
+        </p:nvPicPr>
+        <p:blipFill>
+          <a:blip>
+            <a:extLst>
+              <a:ext uri="{96DAC541-7B7A-43D3-8B79-37D633B846F1}">
+                <asvg:svgBlip xmlns:asvg="http://schemas.microsoft.com/office/drawing/2016/SVG/main" r:embed="rId2"/>
+              </a:ext>
+            </a:extLst>
+          </a:blip>
+          <a:stretch>
+            <a:fillRect/>
+          </a:stretch>
+        </p:blipFill>
+        <p:spPr>
+          <a:xfrm>
+            <a:off x="9603117" y="2919208"/>
+            <a:ext cx="1897702" cy="3471012"/>
+          </a:xfrm>
+          <a:prstGeom prst="rect">
+            <a:avLst/>
+          </a:prstGeom>
+        </p:spPr>
+      </p:pic>
+    </p:spTree>
+    <p:extLst>
+      <p:ext uri="{BB962C8B-B14F-4D97-AF65-F5344CB8AC3E}">
+        <p14:creationId xmlns:p14="http://schemas.microsoft.com/office/powerpoint/2010/main" val="4278490673"/>
+      </p:ext>
+    </p:extLst>
+  </p:cSld>
+  <p:clrMapOvr>
+    <a:masterClrMapping/>
+  </p:clrMapOvr>
+</p:sld>
+</file>
+
+<file path=ppt/slides/slide5.xml><?xml version="1.0" encoding="utf-8"?>
+<p:sld xmlns:a="http://schemas.openxmlformats.org/drawingml/2006/main" xmlns:r="http://schemas.openxmlformats.org/officeDocument/2006/relationships" xmlns:p="http://schemas.openxmlformats.org/presentationml/2006/main">
+  <p:cSld>
+    <p:bg>
+      <p:bgPr>
+        <a:solidFill>
+          <a:schemeClr val="bg1"/>
+        </a:solidFill>
+        <a:effectLst/>
+      </p:bgPr>
+    </p:bg>
+    <p:spTree>
+      <p:nvGrpSpPr>
+        <p:cNvPr id="1" name=""/>
+        <p:cNvGrpSpPr/>
+        <p:nvPr/>
+      </p:nvGrpSpPr>
+      <p:grpSpPr>
+        <a:xfrm>
+          <a:off x="0" y="0"/>
+          <a:ext cx="0" cy="0"/>
+          <a:chOff x="0" y="0"/>
+          <a:chExt cx="0" cy="0"/>
+        </a:xfrm>
+      </p:grpSpPr>
+      <p:sp>
+        <p:nvSpPr>
+          <p:cNvPr id="2" name="Nadpis 1">
+            <a:extLst>
+              <a:ext uri="{FF2B5EF4-FFF2-40B4-BE49-F238E27FC236}">
+                <a16:creationId xmlns:a16="http://schemas.microsoft.com/office/drawing/2014/main" id="{567B636F-49D8-D2C4-4307-6CC245DE0422}"/>
+              </a:ext>
+            </a:extLst>
+          </p:cNvPr>
+          <p:cNvSpPr>
+            <a:spLocks noGrp="1"/>
+          </p:cNvSpPr>
+          <p:nvPr>
+            <p:ph type="title"/>
+          </p:nvPr>
+        </p:nvSpPr>
+        <p:spPr/>
+        <p:txBody>
+          <a:bodyPr>
+            <a:normAutofit/>
+          </a:bodyPr>
+          <a:lstStyle/>
+          <a:p>
+            <a:r>
+              <a:rPr lang="sk-SK" sz="4000" dirty="0"/>
+              <a:t>Príprava</a:t>
+            </a:r>
+          </a:p>
+        </p:txBody>
+      </p:sp>
+      <p:sp>
+        <p:nvSpPr>
+          <p:cNvPr id="3" name="Zástupný objekt pre obsah 2">
+            <a:extLst>
+              <a:ext uri="{FF2B5EF4-FFF2-40B4-BE49-F238E27FC236}">
+                <a16:creationId xmlns:a16="http://schemas.microsoft.com/office/drawing/2014/main" id="{86314C82-F9FF-4E38-48A5-676AC3CC2CAC}"/>
+              </a:ext>
+            </a:extLst>
+          </p:cNvPr>
+          <p:cNvSpPr>
+            <a:spLocks noGrp="1"/>
+          </p:cNvSpPr>
+          <p:nvPr>
+            <p:ph idx="1"/>
+          </p:nvPr>
+        </p:nvSpPr>
+        <p:spPr>
+          <a:xfrm>
+            <a:off x="5003800" y="1845734"/>
+            <a:ext cx="6883400" cy="4023360"/>
+          </a:xfrm>
+        </p:spPr>
+        <p:txBody>
+          <a:bodyPr>
+            <a:normAutofit/>
+          </a:bodyPr>
+          <a:lstStyle/>
+          <a:p>
+            <a:pPr marL="0" indent="0">
+              <a:buNone/>
+            </a:pPr>
+            <a:r>
+              <a:rPr lang="sk-SK" sz="2800" dirty="0"/>
+              <a:t>IDE </a:t>
+            </a:r>
+            <a:r>
+              <a:rPr lang="sk-SK" sz="2800" i="1" dirty="0"/>
+              <a:t>(</a:t>
+            </a:r>
+            <a:r>
+              <a:rPr lang="sk-SK" sz="2800" i="1" dirty="0" err="1"/>
+              <a:t>Integrated</a:t>
+            </a:r>
+            <a:r>
+              <a:rPr lang="sk-SK" sz="2800" i="1" dirty="0"/>
+              <a:t> </a:t>
+            </a:r>
+            <a:r>
+              <a:rPr lang="sk-SK" sz="2800" i="1" dirty="0" err="1"/>
+              <a:t>Development</a:t>
+            </a:r>
+            <a:r>
+              <a:rPr lang="sk-SK" sz="2800" i="1" dirty="0"/>
+              <a:t> </a:t>
+            </a:r>
+            <a:r>
+              <a:rPr lang="sk-SK" sz="2800" i="1" dirty="0" err="1"/>
+              <a:t>Environment</a:t>
+            </a:r>
+            <a:r>
+              <a:rPr lang="sk-SK" sz="2800" i="1" dirty="0"/>
+              <a:t>)</a:t>
+            </a:r>
+            <a:r>
+              <a:rPr lang="sk-SK" sz="2800" dirty="0"/>
+              <a:t>:</a:t>
+            </a:r>
+          </a:p>
+          <a:p>
+            <a:pPr lvl="1"/>
+            <a:r>
+              <a:rPr lang="sk-SK" sz="2800" dirty="0"/>
+              <a:t>vývojové prostredie</a:t>
+            </a:r>
+          </a:p>
+          <a:p>
+            <a:pPr lvl="1"/>
+            <a:r>
+              <a:rPr lang="sk-SK" sz="2800" dirty="0"/>
+              <a:t>uľahčuje programovanie</a:t>
+            </a:r>
+          </a:p>
+          <a:p>
+            <a:pPr lvl="1"/>
+            <a:r>
+              <a:rPr lang="sk-SK" sz="2800" b="1" dirty="0" err="1"/>
+              <a:t>IntelliJ</a:t>
+            </a:r>
+            <a:r>
+              <a:rPr lang="sk-SK" sz="2800" b="1" dirty="0"/>
+              <a:t> IDEA</a:t>
+            </a:r>
+            <a:br>
+              <a:rPr lang="sk-SK" sz="2800" b="1" dirty="0"/>
+            </a:br>
+            <a:endParaRPr lang="sk-SK" sz="2800" b="1" dirty="0"/>
+          </a:p>
+          <a:p>
+            <a:pPr marL="0" indent="0">
+              <a:buNone/>
+            </a:pPr>
+            <a:r>
+              <a:rPr lang="sk-SK" sz="2800" dirty="0">
+                <a:hlinkClick r:id="rId2"/>
+              </a:rPr>
+              <a:t>https://www.jetbrains.com/idea/</a:t>
+            </a:r>
+            <a:r>
+              <a:rPr lang="sk-SK" sz="2800" dirty="0"/>
+              <a:t> </a:t>
+            </a:r>
+          </a:p>
+        </p:txBody>
+      </p:sp>
+      <p:pic>
+        <p:nvPicPr>
+          <p:cNvPr id="10" name="Grafický objekt 9">
+            <a:extLst>
+              <a:ext uri="{FF2B5EF4-FFF2-40B4-BE49-F238E27FC236}">
+                <a16:creationId xmlns:a16="http://schemas.microsoft.com/office/drawing/2014/main" id="{40D4C8E0-A393-AE62-758B-299BA76CCBCF}"/>
+              </a:ext>
+            </a:extLst>
+          </p:cNvPr>
+          <p:cNvPicPr>
+            <a:picLocks noChangeAspect="1"/>
+          </p:cNvPicPr>
+          <p:nvPr/>
+        </p:nvPicPr>
+        <p:blipFill>
+          <a:blip>
+            <a:extLst>
+              <a:ext uri="{96DAC541-7B7A-43D3-8B79-37D633B846F1}">
+                <asvg:svgBlip xmlns:asvg="http://schemas.microsoft.com/office/drawing/2016/SVG/main" r:embed="rId3"/>
+              </a:ext>
+            </a:extLst>
+          </a:blip>
+          <a:stretch>
+            <a:fillRect/>
+          </a:stretch>
+        </p:blipFill>
+        <p:spPr>
+          <a:xfrm>
+            <a:off x="2331325" y="2491201"/>
+            <a:ext cx="2321247" cy="2321247"/>
+          </a:xfrm>
+          <a:prstGeom prst="rect">
+            <a:avLst/>
+          </a:prstGeom>
+        </p:spPr>
+      </p:pic>
+    </p:spTree>
+    <p:extLst>
+      <p:ext uri="{BB962C8B-B14F-4D97-AF65-F5344CB8AC3E}">
+        <p14:creationId xmlns:p14="http://schemas.microsoft.com/office/powerpoint/2010/main" val="3869664095"/>
+      </p:ext>
+    </p:extLst>
+  </p:cSld>
+  <p:clrMapOvr>
+    <a:masterClrMapping/>
+  </p:clrMapOvr>
+</p:sld>
+</file>
+
+<file path=ppt/slides/slide6.xml><?xml version="1.0" encoding="utf-8"?>
+<p:sld xmlns:a="http://schemas.openxmlformats.org/drawingml/2006/main" xmlns:r="http://schemas.openxmlformats.org/officeDocument/2006/relationships" xmlns:p="http://schemas.openxmlformats.org/presentationml/2006/main">
+  <p:cSld>
+    <p:bg>
+      <p:bgPr>
+        <a:solidFill>
+          <a:schemeClr val="bg1"/>
+        </a:solidFill>
+        <a:effectLst/>
+      </p:bgPr>
+    </p:bg>
+    <p:spTree>
+      <p:nvGrpSpPr>
+        <p:cNvPr id="1" name=""/>
+        <p:cNvGrpSpPr/>
+        <p:nvPr/>
+      </p:nvGrpSpPr>
+      <p:grpSpPr>
+        <a:xfrm>
+          <a:off x="0" y="0"/>
+          <a:ext cx="0" cy="0"/>
+          <a:chOff x="0" y="0"/>
+          <a:chExt cx="0" cy="0"/>
+        </a:xfrm>
+      </p:grpSpPr>
+      <p:sp>
+        <p:nvSpPr>
+          <p:cNvPr id="2" name="Nadpis 1">
+            <a:extLst>
+              <a:ext uri="{FF2B5EF4-FFF2-40B4-BE49-F238E27FC236}">
+                <a16:creationId xmlns:a16="http://schemas.microsoft.com/office/drawing/2014/main" id="{5FF8DDDD-602A-49D6-516A-F20B2D6C95AA}"/>
+              </a:ext>
+            </a:extLst>
+          </p:cNvPr>
+          <p:cNvSpPr>
+            <a:spLocks noGrp="1"/>
+          </p:cNvSpPr>
+          <p:nvPr>
+            <p:ph type="title"/>
+          </p:nvPr>
+        </p:nvSpPr>
+        <p:spPr>
+          <a:xfrm>
+            <a:off x="6332764" y="634947"/>
+            <a:ext cx="4335237" cy="1450757"/>
+          </a:xfrm>
+        </p:spPr>
+        <p:txBody>
+          <a:bodyPr>
+            <a:normAutofit/>
+          </a:bodyPr>
+          <a:lstStyle/>
+          <a:p>
+            <a:r>
+              <a:rPr lang="sk-SK" sz="4000" b="1" dirty="0">
+                <a:highlight>
+                  <a:srgbClr val="00FFFF"/>
+                </a:highlight>
+              </a:rPr>
+              <a:t>Úvod do diagramov</a:t>
+            </a:r>
+          </a:p>
+        </p:txBody>
+      </p:sp>
+      <p:sp>
+        <p:nvSpPr>
+          <p:cNvPr id="3" name="Zástupný objekt pre obsah 2">
+            <a:extLst>
+              <a:ext uri="{FF2B5EF4-FFF2-40B4-BE49-F238E27FC236}">
+                <a16:creationId xmlns:a16="http://schemas.microsoft.com/office/drawing/2014/main" id="{A917812E-278F-AFE9-9096-48501F591F65}"/>
+              </a:ext>
+            </a:extLst>
+          </p:cNvPr>
+          <p:cNvSpPr>
+            <a:spLocks noGrp="1"/>
+          </p:cNvSpPr>
+          <p:nvPr>
+            <p:ph idx="1"/>
+          </p:nvPr>
+        </p:nvSpPr>
+        <p:spPr>
+          <a:xfrm>
+            <a:off x="6332764" y="2198914"/>
+            <a:ext cx="5102152" cy="3670180"/>
+          </a:xfrm>
+        </p:spPr>
+        <p:txBody>
+          <a:bodyPr>
+            <a:normAutofit/>
+          </a:bodyPr>
+          <a:lstStyle/>
+          <a:p>
+            <a:pPr marL="0" indent="0">
+              <a:buNone/>
+            </a:pPr>
+            <a:r>
+              <a:rPr lang="sk-SK" sz="2800" dirty="0">
+                <a:solidFill>
+                  <a:srgbClr val="FF0000"/>
+                </a:solidFill>
+                <a:highlight>
+                  <a:srgbClr val="00FFFF"/>
+                </a:highlight>
+              </a:rPr>
+              <a:t>Vývojový diagram znázorňuje kroky procesu alebo algoritmu. </a:t>
+            </a:r>
+          </a:p>
+          <a:p>
+            <a:pPr marL="0" indent="0">
+              <a:buNone/>
+            </a:pPr>
+            <a:r>
+              <a:rPr lang="sk-SK" sz="2800" dirty="0"/>
+              <a:t>V praxi sa používa v zjednodušenej forme. Dopĺňa iné typy diagramov.</a:t>
+            </a:r>
+          </a:p>
+          <a:p>
+            <a:endParaRPr lang="sk-SK" dirty="0"/>
+          </a:p>
+        </p:txBody>
+      </p:sp>
+      <p:pic>
+        <p:nvPicPr>
+          <p:cNvPr id="7" name="Obrázok 6" descr="Obrázok, na ktorom je diagram, text, plán, rad&#10;&#10;Obsah vygenerovaný pomocou AI môže byť nesprávny.">
+            <a:extLst>
+              <a:ext uri="{FF2B5EF4-FFF2-40B4-BE49-F238E27FC236}">
+                <a16:creationId xmlns:a16="http://schemas.microsoft.com/office/drawing/2014/main" id="{BA289351-BF4C-46CA-0123-41BB3D27CC48}"/>
+              </a:ext>
+            </a:extLst>
+          </p:cNvPr>
+          <p:cNvPicPr>
+            <a:picLocks noChangeAspect="1"/>
+          </p:cNvPicPr>
+          <p:nvPr/>
+        </p:nvPicPr>
+        <p:blipFill>
+          <a:blip r:embed="rId2">
+            <a:extLst>
+              <a:ext uri="{28A0092B-C50C-407E-A947-70E740481C1C}">
+                <a14:useLocalDpi xmlns:a14="http://schemas.microsoft.com/office/drawing/2010/main" val="0"/>
+              </a:ext>
+            </a:extLst>
+          </a:blip>
+          <a:srcRect r="66163"/>
+          <a:stretch>
+            <a:fillRect/>
+          </a:stretch>
+        </p:blipFill>
+        <p:spPr>
+          <a:xfrm>
+            <a:off x="2007280" y="766909"/>
+            <a:ext cx="4088720" cy="4984476"/>
+          </a:xfrm>
+          <a:prstGeom prst="rect">
+            <a:avLst/>
+          </a:prstGeom>
+        </p:spPr>
+      </p:pic>
+    </p:spTree>
+    <p:extLst>
+      <p:ext uri="{BB962C8B-B14F-4D97-AF65-F5344CB8AC3E}">
+        <p14:creationId xmlns:p14="http://schemas.microsoft.com/office/powerpoint/2010/main" val="1645311580"/>
+      </p:ext>
+    </p:extLst>
+  </p:cSld>
+  <p:clrMapOvr>
+    <a:masterClrMapping/>
+  </p:clrMapOvr>
+</p:sld>
+</file>
+
+<file path=ppt/slides/slide7.xml><?xml version="1.0" encoding="utf-8"?>
+<p:sld xmlns:a="http://schemas.openxmlformats.org/drawingml/2006/main" xmlns:r="http://schemas.openxmlformats.org/officeDocument/2006/relationships" xmlns:p="http://schemas.openxmlformats.org/presentationml/2006/main" showMasterSp="0">
+  <p:cSld>
+    <p:bg>
+      <p:bgPr>
+        <a:solidFill>
+          <a:schemeClr val="bg1"/>
+        </a:solidFill>
+        <a:effectLst/>
+      </p:bgPr>
+    </p:bg>
+    <p:spTree>
+      <p:nvGrpSpPr>
+        <p:cNvPr id="1" name=""/>
+        <p:cNvGrpSpPr/>
+        <p:nvPr/>
+      </p:nvGrpSpPr>
+      <p:grpSpPr>
+        <a:xfrm>
+          <a:off x="0" y="0"/>
+          <a:ext cx="0" cy="0"/>
+          <a:chOff x="0" y="0"/>
+          <a:chExt cx="0" cy="0"/>
+        </a:xfrm>
+      </p:grpSpPr>
+      <p:pic>
+        <p:nvPicPr>
+          <p:cNvPr id="5" name="Obrázok 4">
+            <a:extLst>
+              <a:ext uri="{FF2B5EF4-FFF2-40B4-BE49-F238E27FC236}">
+                <a16:creationId xmlns:a16="http://schemas.microsoft.com/office/drawing/2014/main" id="{E1AC7644-4857-7889-92EC-DD7E3E4BFB04}"/>
+              </a:ext>
+            </a:extLst>
+          </p:cNvPr>
+          <p:cNvPicPr>
+            <a:picLocks noChangeAspect="1"/>
+          </p:cNvPicPr>
+          <p:nvPr/>
+        </p:nvPicPr>
+        <p:blipFill>
+          <a:blip r:embed="rId2"/>
+          <a:stretch>
+            <a:fillRect/>
+          </a:stretch>
+        </p:blipFill>
+        <p:spPr>
+          <a:xfrm>
+            <a:off x="1979501" y="131838"/>
+            <a:ext cx="8285729" cy="6670012"/>
+          </a:xfrm>
+          <a:prstGeom prst="rect">
+            <a:avLst/>
+          </a:prstGeom>
+        </p:spPr>
+      </p:pic>
+    </p:spTree>
+    <p:extLst>
+      <p:ext uri="{BB962C8B-B14F-4D97-AF65-F5344CB8AC3E}">
+        <p14:creationId xmlns:p14="http://schemas.microsoft.com/office/powerpoint/2010/main" val="728232550"/>
+      </p:ext>
+    </p:extLst>
+  </p:cSld>
+  <p:clrMapOvr>
+    <a:masterClrMapping/>
+  </p:clrMapOvr>
+</p:sld>
+</file>
+
+<file path=ppt/slides/slide8.xml><?xml version="1.0" encoding="utf-8"?>
+<p:sld xmlns:a="http://schemas.openxmlformats.org/drawingml/2006/main" xmlns:r="http://schemas.openxmlformats.org/officeDocument/2006/relationships" xmlns:p="http://schemas.openxmlformats.org/presentationml/2006/main">
+  <p:cSld>
+    <p:bg>
+      <p:bgPr>
+        <a:solidFill>
+          <a:schemeClr val="bg1"/>
+        </a:solidFill>
+        <a:effectLst/>
+      </p:bgPr>
+    </p:bg>
+    <p:spTree>
+      <p:nvGrpSpPr>
+        <p:cNvPr id="1" name=""/>
+        <p:cNvGrpSpPr/>
+        <p:nvPr/>
+      </p:nvGrpSpPr>
+      <p:grpSpPr>
+        <a:xfrm>
+          <a:off x="0" y="0"/>
+          <a:ext cx="0" cy="0"/>
+          <a:chOff x="0" y="0"/>
+          <a:chExt cx="0" cy="0"/>
+        </a:xfrm>
+      </p:grpSpPr>
+      <p:pic>
+        <p:nvPicPr>
+          <p:cNvPr id="5" name="Obrázok 4">
+            <a:extLst>
+              <a:ext uri="{FF2B5EF4-FFF2-40B4-BE49-F238E27FC236}">
+                <a16:creationId xmlns:a16="http://schemas.microsoft.com/office/drawing/2014/main" id="{DA4B8403-0096-2FD4-42D8-F86B5B9428B5}"/>
+              </a:ext>
+            </a:extLst>
+          </p:cNvPr>
+          <p:cNvPicPr>
+            <a:picLocks noChangeAspect="1"/>
+          </p:cNvPicPr>
+          <p:nvPr/>
+        </p:nvPicPr>
+        <p:blipFill>
+          <a:blip r:embed="rId2"/>
+          <a:stretch>
+            <a:fillRect/>
+          </a:stretch>
+        </p:blipFill>
+        <p:spPr>
+          <a:xfrm>
+            <a:off x="2111829" y="52416"/>
+            <a:ext cx="8001000" cy="6780848"/>
+          </a:xfrm>
+          <a:prstGeom prst="rect">
+            <a:avLst/>
+          </a:prstGeom>
+        </p:spPr>
+      </p:pic>
+    </p:spTree>
+    <p:extLst>
+      <p:ext uri="{BB962C8B-B14F-4D97-AF65-F5344CB8AC3E}">
+        <p14:creationId xmlns:p14="http://schemas.microsoft.com/office/powerpoint/2010/main" val="4184874068"/>
       </p:ext>
     </p:extLst>
   </p:cSld>
@@ -8739,10 +6317,49 @@
       </p:grpSpPr>
       <p:sp>
         <p:nvSpPr>
+          <p:cNvPr id="2" name="Nadpis 1">
+            <a:extLst>
+              <a:ext uri="{FF2B5EF4-FFF2-40B4-BE49-F238E27FC236}">
+                <a16:creationId xmlns:a16="http://schemas.microsoft.com/office/drawing/2014/main" id="{497ACFD1-9ADA-CBAF-F800-5D5950EC32B2}"/>
+              </a:ext>
+            </a:extLst>
+          </p:cNvPr>
+          <p:cNvSpPr>
+            <a:spLocks noGrp="1"/>
+          </p:cNvSpPr>
+          <p:nvPr>
+            <p:ph type="title"/>
+          </p:nvPr>
+        </p:nvSpPr>
+        <p:spPr/>
+        <p:txBody>
+          <a:bodyPr>
+            <a:normAutofit/>
+          </a:bodyPr>
+          <a:lstStyle/>
+          <a:p>
+            <a:r>
+              <a:rPr lang="sk-SK" sz="4000" b="1" dirty="0" err="1">
+                <a:highlight>
+                  <a:srgbClr val="00FFFF"/>
+                </a:highlight>
+              </a:rPr>
+              <a:t>Pseudokód</a:t>
+            </a:r>
+            <a:endParaRPr lang="sk-SK" sz="4000" b="1" dirty="0">
+              <a:highlight>
+                <a:srgbClr val="00FFFF"/>
+              </a:highlight>
+            </a:endParaRPr>
+          </a:p>
+        </p:txBody>
+      </p:sp>
+      <p:sp>
+        <p:nvSpPr>
           <p:cNvPr id="3" name="Zástupný objekt pre obsah 2">
             <a:extLst>
               <a:ext uri="{FF2B5EF4-FFF2-40B4-BE49-F238E27FC236}">
-                <a16:creationId xmlns:a16="http://schemas.microsoft.com/office/drawing/2014/main" id="{E2868FFB-94A8-6B2E-B21C-40560B1F38A9}"/>
+                <a16:creationId xmlns:a16="http://schemas.microsoft.com/office/drawing/2014/main" id="{C323853C-4467-FEE0-62F1-68A68DD64A32}"/>
               </a:ext>
             </a:extLst>
           </p:cNvPr>
@@ -8755,13 +6372,13 @@
         </p:nvSpPr>
         <p:spPr>
           <a:xfrm>
-            <a:off x="2152650" y="478971"/>
-            <a:ext cx="7886700" cy="5697992"/>
+            <a:off x="698090" y="1825625"/>
+            <a:ext cx="9341260" cy="4825546"/>
           </a:xfrm>
         </p:spPr>
         <p:txBody>
           <a:bodyPr>
-            <a:normAutofit fontScale="92500" lnSpcReduction="20000"/>
+            <a:normAutofit/>
           </a:bodyPr>
           <a:lstStyle/>
           <a:p>
@@ -8769,219 +6386,168 @@
               <a:buNone/>
             </a:pPr>
             <a:r>
+              <a:rPr lang="sk-SK" sz="2800" dirty="0" err="1">
+                <a:solidFill>
+                  <a:srgbClr val="FF0000"/>
+                </a:solidFill>
+                <a:highlight>
+                  <a:srgbClr val="00FFFF"/>
+                </a:highlight>
+              </a:rPr>
+              <a:t>Pseudokód</a:t>
+            </a:r>
+            <a:r>
+              <a:rPr lang="sk-SK" sz="2800" dirty="0">
+                <a:solidFill>
+                  <a:srgbClr val="FF0000"/>
+                </a:solidFill>
+                <a:highlight>
+                  <a:srgbClr val="00FFFF"/>
+                </a:highlight>
+              </a:rPr>
+              <a:t> je zápis algoritmu v prirodzenom jazyku, bez pravidiel. Pomáha </a:t>
+            </a:r>
+            <a:r>
+              <a:rPr lang="en-US" sz="2800" dirty="0">
+                <a:solidFill>
+                  <a:srgbClr val="FF0000"/>
+                </a:solidFill>
+                <a:highlight>
+                  <a:srgbClr val="00FFFF"/>
+                </a:highlight>
+              </a:rPr>
+              <a:t>v</a:t>
+            </a:r>
+            <a:r>
+              <a:rPr lang="sk-SK" sz="2800" dirty="0" err="1">
+                <a:solidFill>
+                  <a:srgbClr val="FF0000"/>
+                </a:solidFill>
+                <a:highlight>
+                  <a:srgbClr val="00FFFF"/>
+                </a:highlight>
+              </a:rPr>
+              <a:t>ysvetliť</a:t>
+            </a:r>
+            <a:r>
+              <a:rPr lang="sk-SK" sz="2800" dirty="0">
+                <a:solidFill>
+                  <a:srgbClr val="FF0000"/>
+                </a:solidFill>
+                <a:highlight>
+                  <a:srgbClr val="00FFFF"/>
+                </a:highlight>
+              </a:rPr>
+              <a:t> algoritmus a plánovať.</a:t>
+            </a:r>
+          </a:p>
+          <a:p>
+            <a:pPr marL="0" indent="0">
+              <a:buNone/>
+            </a:pPr>
+            <a:r>
               <a:rPr lang="sk-SK" sz="2800" dirty="0"/>
-              <a:t>Príklad vývojového diagramu v jazyku </a:t>
+              <a:t>Príklad </a:t>
             </a:r>
             <a:r>
               <a:rPr lang="sk-SK" sz="2800" dirty="0" err="1"/>
-              <a:t>Mermaid</a:t>
+              <a:t>pseudokódu</a:t>
             </a:r>
             <a:r>
               <a:rPr lang="sk-SK" sz="2800" dirty="0"/>
-              <a:t>:</a:t>
-            </a:r>
-          </a:p>
-          <a:p>
-            <a:pPr marL="0" indent="0">
+              <a:t> pre súčet dvoch čísel:</a:t>
+            </a:r>
+          </a:p>
+          <a:p>
+            <a:pPr marL="457200" lvl="1" indent="0">
               <a:buNone/>
             </a:pPr>
-            <a:endParaRPr lang="sk-SK" dirty="0">
+            <a:endParaRPr lang="sk-SK" sz="1000" dirty="0">
               <a:latin typeface="Consolas" panose="020B0609020204030204" pitchFamily="49" charset="0"/>
             </a:endParaRPr>
           </a:p>
           <a:p>
-            <a:pPr marL="0" indent="0">
+            <a:pPr marL="457200" lvl="1" indent="0">
               <a:buNone/>
             </a:pPr>
             <a:r>
-              <a:rPr lang="sk-SK" dirty="0" err="1">
+              <a:rPr lang="sk-SK" sz="2400" dirty="0">
+                <a:highlight>
+                  <a:srgbClr val="FFFF00"/>
+                </a:highlight>
                 <a:latin typeface="Consolas" panose="020B0609020204030204" pitchFamily="49" charset="0"/>
               </a:rPr>
-              <a:t>flowchart</a:t>
-            </a:r>
-            <a:r>
-              <a:rPr lang="sk-SK" dirty="0">
+              <a:t>Začať</a:t>
+            </a:r>
+          </a:p>
+          <a:p>
+            <a:pPr marL="457200" lvl="1" indent="0">
+              <a:buNone/>
+            </a:pPr>
+            <a:r>
+              <a:rPr lang="sk-SK" sz="2400" dirty="0">
+                <a:highlight>
+                  <a:srgbClr val="FFFF00"/>
+                </a:highlight>
                 <a:latin typeface="Consolas" panose="020B0609020204030204" pitchFamily="49" charset="0"/>
               </a:rPr>
-              <a:t> TD</a:t>
-            </a:r>
-          </a:p>
-          <a:p>
-            <a:pPr marL="0" indent="0">
+              <a:t>Prečítať číslo1</a:t>
+            </a:r>
+          </a:p>
+          <a:p>
+            <a:pPr marL="457200" lvl="1" indent="0">
               <a:buNone/>
             </a:pPr>
             <a:r>
-              <a:rPr lang="sk-SK" dirty="0">
+              <a:rPr lang="sk-SK" sz="2400" dirty="0">
+                <a:highlight>
+                  <a:srgbClr val="FFFF00"/>
+                </a:highlight>
                 <a:latin typeface="Consolas" panose="020B0609020204030204" pitchFamily="49" charset="0"/>
               </a:rPr>
-              <a:t>    </a:t>
-            </a:r>
-            <a:r>
-              <a:rPr lang="sk-SK" dirty="0" err="1">
+              <a:t>Prečítať číslo2</a:t>
+            </a:r>
+          </a:p>
+          <a:p>
+            <a:pPr marL="457200" lvl="1" indent="0">
+              <a:buNone/>
+            </a:pPr>
+            <a:r>
+              <a:rPr lang="sk-SK" sz="2400" dirty="0">
+                <a:highlight>
+                  <a:srgbClr val="FFFF00"/>
+                </a:highlight>
                 <a:latin typeface="Consolas" panose="020B0609020204030204" pitchFamily="49" charset="0"/>
               </a:rPr>
-              <a:t>Start</a:t>
-            </a:r>
-            <a:r>
-              <a:rPr lang="sk-SK" dirty="0">
+              <a:t>súčet = číslo1 + číslo2</a:t>
+            </a:r>
+          </a:p>
+          <a:p>
+            <a:pPr marL="457200" lvl="1" indent="0">
+              <a:buNone/>
+            </a:pPr>
+            <a:r>
+              <a:rPr lang="sk-SK" sz="2400" dirty="0">
+                <a:highlight>
+                  <a:srgbClr val="FFFF00"/>
+                </a:highlight>
                 <a:latin typeface="Consolas" panose="020B0609020204030204" pitchFamily="49" charset="0"/>
               </a:rPr>
-              <a:t>([Štart])</a:t>
-            </a:r>
-          </a:p>
-          <a:p>
-            <a:pPr marL="0" indent="0">
+              <a:t>Vypísať súčet</a:t>
+            </a:r>
+          </a:p>
+          <a:p>
+            <a:pPr marL="457200" lvl="1" indent="0">
               <a:buNone/>
             </a:pPr>
             <a:r>
-              <a:rPr lang="sk-SK" dirty="0">
+              <a:rPr lang="sk-SK" sz="2400" dirty="0">
+                <a:highlight>
+                  <a:srgbClr val="FFFF00"/>
+                </a:highlight>
                 <a:latin typeface="Consolas" panose="020B0609020204030204" pitchFamily="49" charset="0"/>
               </a:rPr>
-              <a:t>    Input1[/Prečítať číslo1/]</a:t>
-            </a:r>
-          </a:p>
-          <a:p>
-            <a:pPr marL="0" indent="0">
-              <a:buNone/>
-            </a:pPr>
-            <a:r>
-              <a:rPr lang="sk-SK" dirty="0">
-                <a:latin typeface="Consolas" panose="020B0609020204030204" pitchFamily="49" charset="0"/>
-              </a:rPr>
-              <a:t>    Input2[/Prečítať číslo2/]</a:t>
-            </a:r>
-          </a:p>
-          <a:p>
-            <a:pPr marL="0" indent="0">
-              <a:buNone/>
-            </a:pPr>
-            <a:r>
-              <a:rPr lang="sk-SK" dirty="0">
-                <a:latin typeface="Consolas" panose="020B0609020204030204" pitchFamily="49" charset="0"/>
-              </a:rPr>
-              <a:t>    </a:t>
-            </a:r>
-            <a:r>
-              <a:rPr lang="sk-SK" dirty="0" err="1">
-                <a:latin typeface="Consolas" panose="020B0609020204030204" pitchFamily="49" charset="0"/>
-              </a:rPr>
-              <a:t>Sum</a:t>
-            </a:r>
-            <a:r>
-              <a:rPr lang="sk-SK" dirty="0">
-                <a:latin typeface="Consolas" panose="020B0609020204030204" pitchFamily="49" charset="0"/>
-              </a:rPr>
-              <a:t>[súčet = číslo1 + číslo2]</a:t>
-            </a:r>
-          </a:p>
-          <a:p>
-            <a:pPr marL="0" indent="0">
-              <a:buNone/>
-            </a:pPr>
-            <a:r>
-              <a:rPr lang="sk-SK" dirty="0">
-                <a:latin typeface="Consolas" panose="020B0609020204030204" pitchFamily="49" charset="0"/>
-              </a:rPr>
-              <a:t>    Output[/Vypísať súčet/]</a:t>
-            </a:r>
-          </a:p>
-          <a:p>
-            <a:pPr marL="0" indent="0">
-              <a:buNone/>
-            </a:pPr>
-            <a:r>
-              <a:rPr lang="sk-SK" dirty="0">
-                <a:latin typeface="Consolas" panose="020B0609020204030204" pitchFamily="49" charset="0"/>
-              </a:rPr>
-              <a:t>    End([Koniec])</a:t>
-            </a:r>
-          </a:p>
-          <a:p>
-            <a:pPr marL="0" indent="0">
-              <a:buNone/>
-            </a:pPr>
-            <a:r>
-              <a:rPr lang="sk-SK" dirty="0">
-                <a:latin typeface="Consolas" panose="020B0609020204030204" pitchFamily="49" charset="0"/>
-              </a:rPr>
-              <a:t>    </a:t>
-            </a:r>
-            <a:r>
-              <a:rPr lang="sk-SK" dirty="0" err="1">
-                <a:latin typeface="Consolas" panose="020B0609020204030204" pitchFamily="49" charset="0"/>
-              </a:rPr>
-              <a:t>Start</a:t>
-            </a:r>
-            <a:r>
-              <a:rPr lang="sk-SK" dirty="0">
-                <a:latin typeface="Consolas" panose="020B0609020204030204" pitchFamily="49" charset="0"/>
-              </a:rPr>
-              <a:t> --&gt; Input1</a:t>
-            </a:r>
-          </a:p>
-          <a:p>
-            <a:pPr marL="0" indent="0">
-              <a:buNone/>
-            </a:pPr>
-            <a:r>
-              <a:rPr lang="sk-SK" dirty="0">
-                <a:latin typeface="Consolas" panose="020B0609020204030204" pitchFamily="49" charset="0"/>
-              </a:rPr>
-              <a:t>    Input1 --&gt; Input2</a:t>
-            </a:r>
-          </a:p>
-          <a:p>
-            <a:pPr marL="0" indent="0">
-              <a:buNone/>
-            </a:pPr>
-            <a:r>
-              <a:rPr lang="sk-SK" dirty="0">
-                <a:latin typeface="Consolas" panose="020B0609020204030204" pitchFamily="49" charset="0"/>
-              </a:rPr>
-              <a:t>    Input2 --&gt; </a:t>
-            </a:r>
-            <a:r>
-              <a:rPr lang="sk-SK" dirty="0" err="1">
-                <a:latin typeface="Consolas" panose="020B0609020204030204" pitchFamily="49" charset="0"/>
-              </a:rPr>
-              <a:t>Sum</a:t>
-            </a:r>
-            <a:endParaRPr lang="sk-SK" dirty="0">
-              <a:latin typeface="Consolas" panose="020B0609020204030204" pitchFamily="49" charset="0"/>
-            </a:endParaRPr>
-          </a:p>
-          <a:p>
-            <a:pPr marL="0" indent="0">
-              <a:buNone/>
-            </a:pPr>
-            <a:r>
-              <a:rPr lang="sk-SK" dirty="0">
-                <a:latin typeface="Consolas" panose="020B0609020204030204" pitchFamily="49" charset="0"/>
-              </a:rPr>
-              <a:t>    </a:t>
-            </a:r>
-            <a:r>
-              <a:rPr lang="sk-SK" dirty="0" err="1">
-                <a:latin typeface="Consolas" panose="020B0609020204030204" pitchFamily="49" charset="0"/>
-              </a:rPr>
-              <a:t>Sum</a:t>
-            </a:r>
-            <a:r>
-              <a:rPr lang="sk-SK" dirty="0">
-                <a:latin typeface="Consolas" panose="020B0609020204030204" pitchFamily="49" charset="0"/>
-              </a:rPr>
-              <a:t> --&gt; Output</a:t>
-            </a:r>
-          </a:p>
-          <a:p>
-            <a:pPr marL="0" indent="0">
-              <a:buNone/>
-            </a:pPr>
-            <a:r>
-              <a:rPr lang="sk-SK" dirty="0">
-                <a:latin typeface="Consolas" panose="020B0609020204030204" pitchFamily="49" charset="0"/>
-              </a:rPr>
-              <a:t>    Output --&gt; End</a:t>
+              <a:t>Koniec</a:t>
             </a:r>
           </a:p>
         </p:txBody>
@@ -8989,7 +6555,7 @@
     </p:spTree>
     <p:extLst>
       <p:ext uri="{BB962C8B-B14F-4D97-AF65-F5344CB8AC3E}">
-        <p14:creationId xmlns:p14="http://schemas.microsoft.com/office/powerpoint/2010/main" val="1464798716"/>
+        <p14:creationId xmlns:p14="http://schemas.microsoft.com/office/powerpoint/2010/main" val="2707637133"/>
       </p:ext>
     </p:extLst>
   </p:cSld>
